--- a/Pitch_AlgoPulse.pptx
+++ b/Pitch_AlgoPulse.pptx
@@ -15,8 +15,6 @@
     <p:sldId id="263" r:id="rId14"/>
     <p:sldId id="264" r:id="rId15"/>
     <p:sldId id="265" r:id="rId16"/>
-    <p:sldId id="266" r:id="rId17"/>
-    <p:sldId id="267" r:id="rId18"/>
   </p:sldIdLst>
   <p:sldSz cx="12191695" cy="6858000" type="screen4x3"/>
   <p:notesSz cx="6858000" cy="9144000"/>
@@ -3095,7 +3093,7 @@
     <p:bg>
       <p:bgPr>
         <a:solidFill>
-          <a:srgbClr val="0D1117"/>
+          <a:srgbClr val="FFFFFF"/>
         </a:solidFill>
         <a:effectLst/>
       </p:bgPr>
@@ -3109,14 +3107,57 @@
       <p:grpSpPr/>
       <p:sp>
         <p:nvSpPr>
-          <p:cNvPr id="2" name="TextBox 1"/>
+          <p:cNvPr id="2" name="Rectangle 1"/>
+          <p:cNvSpPr/>
+          <p:nvPr/>
+        </p:nvSpPr>
+        <p:spPr>
+          <a:xfrm>
+            <a:off x="731520" y="685800"/>
+            <a:ext cx="1645920" cy="82296"/>
+          </a:xfrm>
+          <a:prstGeom prst="rect">
+            <a:avLst/>
+          </a:prstGeom>
+          <a:solidFill>
+            <a:srgbClr val="2563EB"/>
+          </a:solidFill>
+          <a:ln>
+            <a:noFill/>
+          </a:ln>
+        </p:spPr>
+        <p:style>
+          <a:lnRef idx="1">
+            <a:schemeClr val="accent1"/>
+          </a:lnRef>
+          <a:fillRef idx="3">
+            <a:schemeClr val="accent1"/>
+          </a:fillRef>
+          <a:effectRef idx="2">
+            <a:schemeClr val="accent1"/>
+          </a:effectRef>
+          <a:fontRef idx="minor">
+            <a:schemeClr val="lt1"/>
+          </a:fontRef>
+        </p:style>
+        <p:txBody>
+          <a:bodyPr rtlCol="0" anchor="ctr"/>
+          <a:lstStyle/>
+          <a:p>
+            <a:pPr algn="ctr"/>
+          </a:p>
+        </p:txBody>
+      </p:sp>
+      <p:sp>
+        <p:nvSpPr>
+          <p:cNvPr id="3" name="TextBox 2"/>
           <p:cNvSpPr txBox="1"/>
           <p:nvPr/>
         </p:nvSpPr>
         <p:spPr>
           <a:xfrm>
-            <a:off x="914400" y="1645920"/>
-            <a:ext cx="10332720" cy="4114800"/>
+            <a:off x="731520" y="960120"/>
+            <a:ext cx="10698480" cy="2926080"/>
           </a:xfrm>
           <a:prstGeom prst="rect">
             <a:avLst/>
@@ -3131,58 +3172,255 @@
           <a:p>
             <a:pPr>
               <a:spcAft>
+                <a:spcPts val="1000"/>
+              </a:spcAft>
+              <a:defRPr sz="1400" b="1">
+                <a:solidFill>
+                  <a:srgbClr val="2563EB"/>
+                </a:solidFill>
+              </a:defRPr>
+            </a:pPr>
+            <a:r>
+              <a:t>AI CODE REVIEWER &amp; SKILL INTELLIGENCE PLATFORM</a:t>
+            </a:r>
+          </a:p>
+          <a:p>
+            <a:pPr>
+              <a:spcAft>
+                <a:spcPts val="800"/>
+              </a:spcAft>
+              <a:defRPr sz="5800" b="1">
+                <a:solidFill>
+                  <a:srgbClr val="0F172A"/>
+                </a:solidFill>
+              </a:defRPr>
+            </a:pPr>
+            <a:r>
+              <a:t>AlgoPulse</a:t>
+            </a:r>
+          </a:p>
+          <a:p>
+            <a:pPr>
+              <a:spcAft>
                 <a:spcPts val="1400"/>
               </a:spcAft>
-              <a:defRPr sz="1300" b="1">
-                <a:solidFill>
-                  <a:srgbClr val="4285F4"/>
+              <a:defRPr sz="2400" b="1">
+                <a:solidFill>
+                  <a:srgbClr val="059669"/>
                 </a:solidFill>
               </a:defRPr>
             </a:pPr>
             <a:r>
-              <a:t>⚡ NEXT-GEN DEVELOPER PEDAGOGY &amp; SKILL INTELLIGENCE</a:t>
-            </a:r>
-          </a:p>
-          <a:p>
-            <a:pPr>
-              <a:spcAft>
-                <a:spcPts val="1200"/>
-              </a:spcAft>
-              <a:defRPr sz="5400" b="1">
-                <a:solidFill>
-                  <a:srgbClr val="F0F6FC"/>
+              <a:t>Look Beyond 'Accepted': Evaluate Your Approach, Get Hints, and Never Forget</a:t>
+            </a:r>
+          </a:p>
+          <a:p>
+            <a:pPr>
+              <a:defRPr sz="1700">
+                <a:solidFill>
+                  <a:srgbClr val="475569"/>
                 </a:solidFill>
               </a:defRPr>
             </a:pPr>
             <a:r>
-              <a:t>AlgoPulse</a:t>
-            </a:r>
-          </a:p>
-          <a:p>
-            <a:pPr>
-              <a:spcAft>
-                <a:spcPts val="2400"/>
-              </a:spcAft>
-              <a:defRPr sz="2200">
-                <a:solidFill>
-                  <a:srgbClr val="34A853"/>
+              <a:t>A unified coding mentor working directly inside Chrome (LeetCode, GFG, HackerRank), VS Code, and a live Next.js dashboard.</a:t>
+            </a:r>
+          </a:p>
+        </p:txBody>
+      </p:sp>
+      <p:sp>
+        <p:nvSpPr>
+          <p:cNvPr id="4" name="Rounded Rectangle 3"/>
+          <p:cNvSpPr/>
+          <p:nvPr/>
+        </p:nvSpPr>
+        <p:spPr>
+          <a:xfrm>
+            <a:off x="731520" y="4069080"/>
+            <a:ext cx="10725912" cy="2194560"/>
+          </a:xfrm>
+          <a:prstGeom prst="roundRect">
+            <a:avLst>
+              <a:gd name="adj" fmla="val 3000"/>
+            </a:avLst>
+          </a:prstGeom>
+          <a:solidFill>
+            <a:srgbClr val="F8FAFC"/>
+          </a:solidFill>
+          <a:ln w="15240">
+            <a:solidFill>
+              <a:srgbClr val="CBD5E1"/>
+            </a:solidFill>
+          </a:ln>
+        </p:spPr>
+        <p:style>
+          <a:lnRef idx="1">
+            <a:schemeClr val="accent1"/>
+          </a:lnRef>
+          <a:fillRef idx="3">
+            <a:schemeClr val="accent1"/>
+          </a:fillRef>
+          <a:effectRef idx="2">
+            <a:schemeClr val="accent1"/>
+          </a:effectRef>
+          <a:fontRef idx="minor">
+            <a:schemeClr val="lt1"/>
+          </a:fontRef>
+        </p:style>
+        <p:txBody>
+          <a:bodyPr rtlCol="0" anchor="ctr"/>
+          <a:lstStyle/>
+          <a:p>
+            <a:pPr algn="ctr"/>
+          </a:p>
+        </p:txBody>
+      </p:sp>
+      <p:sp>
+        <p:nvSpPr>
+          <p:cNvPr id="5" name="Rectangle 4"/>
+          <p:cNvSpPr/>
+          <p:nvPr/>
+        </p:nvSpPr>
+        <p:spPr>
+          <a:xfrm>
+            <a:off x="731520" y="4069080"/>
+            <a:ext cx="10725912" cy="73152"/>
+          </a:xfrm>
+          <a:prstGeom prst="rect">
+            <a:avLst/>
+          </a:prstGeom>
+          <a:solidFill>
+            <a:srgbClr val="2563EB"/>
+          </a:solidFill>
+          <a:ln>
+            <a:noFill/>
+          </a:ln>
+        </p:spPr>
+        <p:style>
+          <a:lnRef idx="1">
+            <a:schemeClr val="accent1"/>
+          </a:lnRef>
+          <a:fillRef idx="3">
+            <a:schemeClr val="accent1"/>
+          </a:fillRef>
+          <a:effectRef idx="2">
+            <a:schemeClr val="accent1"/>
+          </a:effectRef>
+          <a:fontRef idx="minor">
+            <a:schemeClr val="lt1"/>
+          </a:fontRef>
+        </p:style>
+        <p:txBody>
+          <a:bodyPr rtlCol="0" anchor="ctr"/>
+          <a:lstStyle/>
+          <a:p>
+            <a:pPr algn="ctr"/>
+          </a:p>
+        </p:txBody>
+      </p:sp>
+      <p:sp>
+        <p:nvSpPr>
+          <p:cNvPr id="6" name="TextBox 5"/>
+          <p:cNvSpPr txBox="1"/>
+          <p:nvPr/>
+        </p:nvSpPr>
+        <p:spPr>
+          <a:xfrm>
+            <a:off x="1024128" y="4325112"/>
+            <a:ext cx="10140696" cy="1783080"/>
+          </a:xfrm>
+          <a:prstGeom prst="rect">
+            <a:avLst/>
+          </a:prstGeom>
+          <a:noFill/>
+        </p:spPr>
+        <p:txBody>
+          <a:bodyPr wrap="square" lIns="0" tIns="0" rIns="0" bIns="0">
+            <a:spAutoFit/>
+          </a:bodyPr>
+          <a:lstStyle/>
+          <a:p>
+            <a:pPr>
+              <a:spcAft>
+                <a:spcPts val="1400"/>
+              </a:spcAft>
+              <a:defRPr sz="2100" b="1">
+                <a:solidFill>
+                  <a:srgbClr val="0F172A"/>
                 </a:solidFill>
               </a:defRPr>
             </a:pPr>
             <a:r>
-              <a:t>Beyond the Binary Verdict: Real-Time Algorithmic Code Review &amp; Career Readiness</a:t>
-            </a:r>
-          </a:p>
-          <a:p>
-            <a:pPr>
-              <a:defRPr sz="1500">
-                <a:solidFill>
-                  <a:srgbClr val="8B949E"/>
-                </a:solidFill>
-              </a:defRPr>
-            </a:pPr>
-            <a:r>
-              <a:t>A multi-platform developer ecosystem uniting Chrome, VS Code, and Next.js to evaluate problem-solving approaches, uncover paradigm blind spots, and guarantee interview retention.</a:t>
+              <a:t>Project Team &amp; Guide Details</a:t>
+            </a:r>
+          </a:p>
+          <a:p>
+            <a:pPr>
+              <a:spcAft>
+                <a:spcPts val="1100"/>
+              </a:spcAft>
+            </a:pPr>
+            <a:r>
+              <a:rPr b="1" sz="1600">
+                <a:solidFill>
+                  <a:srgbClr val="2563EB"/>
+                </a:solidFill>
+              </a:rPr>
+              <a:t>• Project Lead: </a:t>
+            </a:r>
+            <a:r>
+              <a:rPr b="0" sz="1600">
+                <a:solidFill>
+                  <a:srgbClr val="1E293B"/>
+                </a:solidFill>
+              </a:rPr>
+              <a:t>Rohith Bheemini</a:t>
+            </a:r>
+          </a:p>
+          <a:p>
+            <a:pPr>
+              <a:spcAft>
+                <a:spcPts val="1100"/>
+              </a:spcAft>
+            </a:pPr>
+            <a:r>
+              <a:rPr b="1" sz="1600">
+                <a:solidFill>
+                  <a:srgbClr val="2563EB"/>
+                </a:solidFill>
+              </a:rPr>
+              <a:t>• Team Members: </a:t>
+            </a:r>
+            <a:r>
+              <a:rPr b="0" sz="1600">
+                <a:solidFill>
+                  <a:srgbClr val="1E293B"/>
+                </a:solidFill>
+              </a:rPr>
+              <a:t>[Member 2 Name &amp; Roll No.]   •   [Member 3 Name &amp; Roll No.]   •   [Member 4 Name &amp; Roll No.]</a:t>
+            </a:r>
+          </a:p>
+          <a:p>
+            <a:pPr>
+              <a:spcAft>
+                <a:spcPts val="1100"/>
+              </a:spcAft>
+            </a:pPr>
+            <a:r>
+              <a:rPr b="1" sz="1600">
+                <a:solidFill>
+                  <a:srgbClr val="2563EB"/>
+                </a:solidFill>
+              </a:rPr>
+              <a:t>• Project Guide: </a:t>
+            </a:r>
+            <a:r>
+              <a:rPr b="0" sz="1600">
+                <a:solidFill>
+                  <a:srgbClr val="1E293B"/>
+                </a:solidFill>
+              </a:rPr>
+              <a:t>[Guide Name &amp; Designation]   •   Department of Computer Science &amp; Engineering</a:t>
             </a:r>
           </a:p>
         </p:txBody>
@@ -3201,7 +3439,7 @@
     <p:bg>
       <p:bgPr>
         <a:solidFill>
-          <a:srgbClr val="0D1117"/>
+          <a:srgbClr val="FFFFFF"/>
         </a:solidFill>
         <a:effectLst/>
       </p:bgPr>
@@ -3215,129 +3453,26 @@
       <p:grpSpPr/>
       <p:sp>
         <p:nvSpPr>
-          <p:cNvPr id="2" name="TextBox 1"/>
-          <p:cNvSpPr txBox="1"/>
-          <p:nvPr/>
-        </p:nvSpPr>
-        <p:spPr>
-          <a:xfrm>
-            <a:off x="731520" y="411480"/>
-            <a:ext cx="4114800" cy="365760"/>
-          </a:xfrm>
-          <a:prstGeom prst="rect">
-            <a:avLst/>
-          </a:prstGeom>
-          <a:noFill/>
-        </p:spPr>
-        <p:txBody>
-          <a:bodyPr wrap="square" lIns="0" tIns="0" rIns="0" bIns="0">
-            <a:spAutoFit/>
-          </a:bodyPr>
-          <a:lstStyle/>
-          <a:p>
-            <a:pPr>
-              <a:defRPr sz="1100" b="1">
-                <a:solidFill>
-                  <a:srgbClr val="4285F4"/>
-                </a:solidFill>
-              </a:defRPr>
-            </a:pPr>
-            <a:r>
-              <a:t>LIVE DEMONSTRATION</a:t>
-            </a:r>
-          </a:p>
-        </p:txBody>
-      </p:sp>
-      <p:sp>
-        <p:nvSpPr>
-          <p:cNvPr id="3" name="TextBox 2"/>
-          <p:cNvSpPr txBox="1"/>
-          <p:nvPr/>
-        </p:nvSpPr>
-        <p:spPr>
-          <a:xfrm>
-            <a:off x="731520" y="777240"/>
-            <a:ext cx="10698480" cy="731520"/>
-          </a:xfrm>
-          <a:prstGeom prst="rect">
-            <a:avLst/>
-          </a:prstGeom>
-          <a:noFill/>
-        </p:spPr>
-        <p:txBody>
-          <a:bodyPr wrap="square" lIns="0" tIns="0" rIns="0" bIns="0">
-            <a:spAutoFit/>
-          </a:bodyPr>
-          <a:lstStyle/>
-          <a:p>
-            <a:pPr>
-              <a:defRPr sz="2800" b="1">
-                <a:solidFill>
-                  <a:srgbClr val="F0F6FC"/>
-                </a:solidFill>
-              </a:defRPr>
-            </a:pPr>
-            <a:r>
-              <a:t>The Complete 3-Minute Live Demo Structure</a:t>
-            </a:r>
-          </a:p>
-        </p:txBody>
-      </p:sp>
-      <p:sp>
-        <p:nvSpPr>
-          <p:cNvPr id="4" name="TextBox 3"/>
-          <p:cNvSpPr txBox="1"/>
-          <p:nvPr/>
-        </p:nvSpPr>
-        <p:spPr>
-          <a:xfrm>
-            <a:off x="731520" y="1508760"/>
-            <a:ext cx="10698480" cy="411480"/>
-          </a:xfrm>
-          <a:prstGeom prst="rect">
-            <a:avLst/>
-          </a:prstGeom>
-          <a:noFill/>
-        </p:spPr>
-        <p:txBody>
-          <a:bodyPr wrap="square" lIns="0" tIns="0" rIns="0" bIns="0">
-            <a:spAutoFit/>
-          </a:bodyPr>
-          <a:lstStyle/>
-          <a:p>
-            <a:pPr>
-              <a:defRPr sz="1400">
-                <a:solidFill>
-                  <a:srgbClr val="8B949E"/>
-                </a:solidFill>
-              </a:defRPr>
-            </a:pPr>
-            <a:r>
-              <a:t>A flawless sequence to showcase the entire platform during tomorrow's presentation.</a:t>
-            </a:r>
-          </a:p>
-        </p:txBody>
-      </p:sp>
-      <p:sp>
-        <p:nvSpPr>
-          <p:cNvPr id="5" name="Rounded Rectangle 4"/>
+          <p:cNvPr id="2" name="Rounded Rectangle 1"/>
           <p:cNvSpPr/>
           <p:nvPr/>
         </p:nvSpPr>
         <p:spPr>
           <a:xfrm>
-            <a:off x="731520" y="2011680"/>
-            <a:ext cx="3291840" cy="4297680"/>
+            <a:off x="1463040" y="1234440"/>
+            <a:ext cx="9262872" cy="4389120"/>
           </a:xfrm>
           <a:prstGeom prst="roundRect">
-            <a:avLst/>
+            <a:avLst>
+              <a:gd name="adj" fmla="val 3000"/>
+            </a:avLst>
           </a:prstGeom>
           <a:solidFill>
-            <a:srgbClr val="161B22"/>
+            <a:srgbClr val="F8FAFC"/>
           </a:solidFill>
-          <a:ln w="15240">
+          <a:ln w="19050">
             <a:solidFill>
-              <a:srgbClr val="30363D"/>
+              <a:srgbClr val="CBD5E1"/>
             </a:solidFill>
           </a:ln>
         </p:spPr>
@@ -3365,20 +3500,20 @@
       </p:sp>
       <p:sp>
         <p:nvSpPr>
-          <p:cNvPr id="6" name="Rounded Rectangle 5"/>
+          <p:cNvPr id="3" name="Rectangle 2"/>
           <p:cNvSpPr/>
           <p:nvPr/>
         </p:nvSpPr>
         <p:spPr>
           <a:xfrm>
-            <a:off x="731520" y="2011680"/>
-            <a:ext cx="3291840" cy="73152"/>
-          </a:xfrm>
-          <a:prstGeom prst="roundRect">
+            <a:off x="1463040" y="1234440"/>
+            <a:ext cx="9262872" cy="82296"/>
+          </a:xfrm>
+          <a:prstGeom prst="rect">
             <a:avLst/>
           </a:prstGeom>
           <a:solidFill>
-            <a:srgbClr val="4285F4"/>
+            <a:srgbClr val="2563EB"/>
           </a:solidFill>
           <a:ln>
             <a:noFill/>
@@ -3408,14 +3543,14 @@
       </p:sp>
       <p:sp>
         <p:nvSpPr>
-          <p:cNvPr id="7" name="TextBox 6"/>
+          <p:cNvPr id="4" name="TextBox 3"/>
           <p:cNvSpPr txBox="1"/>
           <p:nvPr/>
         </p:nvSpPr>
         <p:spPr>
           <a:xfrm>
-            <a:off x="1051560" y="2286000"/>
-            <a:ext cx="2651760" cy="3886200"/>
+            <a:off x="1920240" y="1783080"/>
+            <a:ext cx="8348472" cy="3383280"/>
           </a:xfrm>
           <a:prstGeom prst="rect">
             <a:avLst/>
@@ -3423,1811 +3558,65 @@
           <a:noFill/>
         </p:spPr>
         <p:txBody>
-          <a:bodyPr wrap="square" lIns="0" tIns="0" rIns="0" bIns="0">
+          <a:bodyPr wrap="square">
             <a:spAutoFit/>
           </a:bodyPr>
           <a:lstStyle/>
           <a:p>
-            <a:pPr>
-              <a:spcAft>
-                <a:spcPts val="1200"/>
-              </a:spcAft>
-              <a:defRPr sz="1900" b="1">
-                <a:solidFill>
-                  <a:srgbClr val="F0F6FC"/>
+            <a:pPr algn="ctr">
+              <a:spcAft>
+                <a:spcPts val="1400"/>
+              </a:spcAft>
+              <a:defRPr sz="1400" b="1">
+                <a:solidFill>
+                  <a:srgbClr val="2563EB"/>
                 </a:solidFill>
               </a:defRPr>
             </a:pPr>
             <a:r>
-              <a:t>Step 1: The Browser Extension</a:t>
-            </a:r>
-          </a:p>
-          <a:p>
-            <a:pPr>
-              <a:spcAft>
-                <a:spcPts val="800"/>
-              </a:spcAft>
-            </a:pPr>
-            <a:r>
-              <a:rPr b="1" sz="1400">
-                <a:solidFill>
-                  <a:srgbClr val="4285F4"/>
-                </a:solidFill>
-              </a:rPr>
-              <a:t>Open LeetCode/GFG: </a:t>
-            </a:r>
-            <a:r>
-              <a:rPr b="0" sz="1400">
-                <a:solidFill>
-                  <a:srgbClr val="F0F6FC"/>
-                </a:solidFill>
-              </a:rPr>
-              <a:t>Navigate to Kadane's Algorithm on GFG or Two Sum on LeetCode.</a:t>
-            </a:r>
-          </a:p>
-          <a:p>
-            <a:pPr>
-              <a:spcAft>
-                <a:spcPts val="800"/>
-              </a:spcAft>
-            </a:pPr>
-            <a:r>
-              <a:rPr b="1" sz="1400">
-                <a:solidFill>
-                  <a:srgbClr val="4285F4"/>
-                </a:solidFill>
-              </a:rPr>
-              <a:t>In-Page Widget: </a:t>
-            </a:r>
-            <a:r>
-              <a:rPr b="0" sz="1400">
-                <a:solidFill>
-                  <a:srgbClr val="F0F6FC"/>
-                </a:solidFill>
-              </a:rPr>
-              <a:t>Show the floating AlgoPulse badge and click 'Analyze Code'.</a:t>
-            </a:r>
-          </a:p>
-          <a:p>
-            <a:pPr>
-              <a:spcAft>
-                <a:spcPts val="800"/>
-              </a:spcAft>
-            </a:pPr>
-            <a:r>
-              <a:rPr b="1" sz="1400">
-                <a:solidFill>
-                  <a:srgbClr val="4285F4"/>
-                </a:solidFill>
-              </a:rPr>
-              <a:t>4-Pillar Feedback: </a:t>
-            </a:r>
-            <a:r>
-              <a:rPr b="0" sz="1400">
-                <a:solidFill>
-                  <a:srgbClr val="F0F6FC"/>
-                </a:solidFill>
-              </a:rPr>
-              <a:t>Walk through the Optimality, Time, Space, and Cleanliness scores.</a:t>
-            </a:r>
-          </a:p>
-          <a:p>
-            <a:pPr>
-              <a:spcAft>
-                <a:spcPts val="800"/>
-              </a:spcAft>
-            </a:pPr>
-            <a:r>
-              <a:rPr b="1" sz="1400">
-                <a:solidFill>
-                  <a:srgbClr val="4285F4"/>
-                </a:solidFill>
-              </a:rPr>
-              <a:t>Progressive Hints: </a:t>
-            </a:r>
-            <a:r>
-              <a:rPr b="0" sz="1400">
-                <a:solidFill>
-                  <a:srgbClr val="F0F6FC"/>
-                </a:solidFill>
-              </a:rPr>
-              <a:t>Click 'Reveal Tier 1 Observation' to show Socratic coaching.</a:t>
-            </a:r>
-          </a:p>
-        </p:txBody>
-      </p:sp>
-      <p:sp>
-        <p:nvSpPr>
-          <p:cNvPr id="8" name="Rounded Rectangle 7"/>
-          <p:cNvSpPr/>
-          <p:nvPr/>
-        </p:nvSpPr>
-        <p:spPr>
-          <a:xfrm>
-            <a:off x="4389120" y="2011680"/>
-            <a:ext cx="3291840" cy="4297680"/>
-          </a:xfrm>
-          <a:prstGeom prst="roundRect">
-            <a:avLst/>
-          </a:prstGeom>
-          <a:solidFill>
-            <a:srgbClr val="161B22"/>
-          </a:solidFill>
-          <a:ln w="15240">
-            <a:solidFill>
-              <a:srgbClr val="30363D"/>
-            </a:solidFill>
-          </a:ln>
-        </p:spPr>
-        <p:style>
-          <a:lnRef idx="1">
-            <a:schemeClr val="accent1"/>
-          </a:lnRef>
-          <a:fillRef idx="3">
-            <a:schemeClr val="accent1"/>
-          </a:fillRef>
-          <a:effectRef idx="2">
-            <a:schemeClr val="accent1"/>
-          </a:effectRef>
-          <a:fontRef idx="minor">
-            <a:schemeClr val="lt1"/>
-          </a:fontRef>
-        </p:style>
-        <p:txBody>
-          <a:bodyPr rtlCol="0" anchor="ctr"/>
-          <a:lstStyle/>
-          <a:p>
-            <a:pPr algn="ctr"/>
-          </a:p>
-        </p:txBody>
-      </p:sp>
-      <p:sp>
-        <p:nvSpPr>
-          <p:cNvPr id="9" name="Rounded Rectangle 8"/>
-          <p:cNvSpPr/>
-          <p:nvPr/>
-        </p:nvSpPr>
-        <p:spPr>
-          <a:xfrm>
-            <a:off x="4389120" y="2011680"/>
-            <a:ext cx="3291840" cy="73152"/>
-          </a:xfrm>
-          <a:prstGeom prst="roundRect">
-            <a:avLst/>
-          </a:prstGeom>
-          <a:solidFill>
-            <a:srgbClr val="FBBC05"/>
-          </a:solidFill>
-          <a:ln>
-            <a:noFill/>
-          </a:ln>
-        </p:spPr>
-        <p:style>
-          <a:lnRef idx="1">
-            <a:schemeClr val="accent1"/>
-          </a:lnRef>
-          <a:fillRef idx="3">
-            <a:schemeClr val="accent1"/>
-          </a:fillRef>
-          <a:effectRef idx="2">
-            <a:schemeClr val="accent1"/>
-          </a:effectRef>
-          <a:fontRef idx="minor">
-            <a:schemeClr val="lt1"/>
-          </a:fontRef>
-        </p:style>
-        <p:txBody>
-          <a:bodyPr rtlCol="0" anchor="ctr"/>
-          <a:lstStyle/>
-          <a:p>
-            <a:pPr algn="ctr"/>
-          </a:p>
-        </p:txBody>
-      </p:sp>
-      <p:sp>
-        <p:nvSpPr>
-          <p:cNvPr id="10" name="TextBox 9"/>
-          <p:cNvSpPr txBox="1"/>
-          <p:nvPr/>
-        </p:nvSpPr>
-        <p:spPr>
-          <a:xfrm>
-            <a:off x="4709160" y="2286000"/>
-            <a:ext cx="2651760" cy="3886200"/>
-          </a:xfrm>
-          <a:prstGeom prst="rect">
-            <a:avLst/>
-          </a:prstGeom>
-          <a:noFill/>
-        </p:spPr>
-        <p:txBody>
-          <a:bodyPr wrap="square" lIns="0" tIns="0" rIns="0" bIns="0">
-            <a:spAutoFit/>
-          </a:bodyPr>
-          <a:lstStyle/>
-          <a:p>
-            <a:pPr>
-              <a:spcAft>
-                <a:spcPts val="1200"/>
-              </a:spcAft>
-              <a:defRPr sz="1900" b="1">
-                <a:solidFill>
-                  <a:srgbClr val="F0F6FC"/>
+              <a:t>ALGOPULSE — AI CODE REVIEWER &amp; SKILL INTELLIGENCE</a:t>
+            </a:r>
+          </a:p>
+          <a:p>
+            <a:pPr algn="ctr">
+              <a:spcAft>
+                <a:spcPts val="1400"/>
+              </a:spcAft>
+              <a:defRPr sz="5600" b="1">
+                <a:solidFill>
+                  <a:srgbClr val="0F172A"/>
                 </a:solidFill>
               </a:defRPr>
             </a:pPr>
             <a:r>
-              <a:t>Step 2: The VS Code Extension</a:t>
-            </a:r>
-          </a:p>
-          <a:p>
-            <a:pPr>
-              <a:spcAft>
-                <a:spcPts val="800"/>
-              </a:spcAft>
-            </a:pPr>
-            <a:r>
-              <a:rPr b="1" sz="1400">
-                <a:solidFill>
-                  <a:srgbClr val="FBBC05"/>
-                </a:solidFill>
-              </a:rPr>
-              <a:t>Open VS Code: </a:t>
-            </a:r>
-            <a:r>
-              <a:rPr b="0" sz="1400">
-                <a:solidFill>
-                  <a:srgbClr val="F0F6FC"/>
-                </a:solidFill>
-              </a:rPr>
-              <a:t>Show local editor with a solution file (solution.py).</a:t>
-            </a:r>
-          </a:p>
-          <a:p>
-            <a:pPr>
-              <a:spcAft>
-                <a:spcPts val="800"/>
-              </a:spcAft>
-            </a:pPr>
-            <a:r>
-              <a:rPr b="1" sz="1400">
-                <a:solidFill>
-                  <a:srgbClr val="FBBC05"/>
-                </a:solidFill>
-              </a:rPr>
-              <a:t>Run Hotkey: </a:t>
-            </a:r>
-            <a:r>
-              <a:rPr b="0" sz="1400">
-                <a:solidFill>
-                  <a:srgbClr val="F0F6FC"/>
-                </a:solidFill>
-              </a:rPr>
-              <a:t>Press Ctrl+Alt+A or click 'AlgoPulse' in the Activity Bar.</a:t>
-            </a:r>
-          </a:p>
-          <a:p>
-            <a:pPr>
-              <a:spcAft>
-                <a:spcPts val="800"/>
-              </a:spcAft>
-            </a:pPr>
-            <a:r>
-              <a:rPr b="1" sz="1400">
-                <a:solidFill>
-                  <a:srgbClr val="FBBC05"/>
-                </a:solidFill>
-              </a:rPr>
-              <a:t>Instant Analysis: </a:t>
-            </a:r>
-            <a:r>
-              <a:rPr b="0" sz="1400">
-                <a:solidFill>
-                  <a:srgbClr val="F0F6FC"/>
-                </a:solidFill>
-              </a:rPr>
-              <a:t>Highlight how the same 4-pillar review appears inside the desktop IDE.</a:t>
-            </a:r>
-          </a:p>
-          <a:p>
-            <a:pPr>
-              <a:spcAft>
-                <a:spcPts val="800"/>
-              </a:spcAft>
-            </a:pPr>
-            <a:r>
-              <a:rPr b="1" sz="1400">
-                <a:solidFill>
-                  <a:srgbClr val="FBBC05"/>
-                </a:solidFill>
-              </a:rPr>
-              <a:t>Insert Reference Code: </a:t>
-            </a:r>
-            <a:r>
-              <a:rPr b="0" sz="1400">
-                <a:solidFill>
-                  <a:srgbClr val="F0F6FC"/>
-                </a:solidFill>
-              </a:rPr>
-              <a:t>Demonstrate 1-click insertion of optimal code.</a:t>
-            </a:r>
-          </a:p>
-        </p:txBody>
-      </p:sp>
-      <p:sp>
-        <p:nvSpPr>
-          <p:cNvPr id="11" name="Rounded Rectangle 10"/>
-          <p:cNvSpPr/>
-          <p:nvPr/>
-        </p:nvSpPr>
-        <p:spPr>
-          <a:xfrm>
-            <a:off x="8046720" y="2011680"/>
-            <a:ext cx="3291840" cy="4297680"/>
-          </a:xfrm>
-          <a:prstGeom prst="roundRect">
-            <a:avLst/>
-          </a:prstGeom>
-          <a:solidFill>
-            <a:srgbClr val="161B22"/>
-          </a:solidFill>
-          <a:ln w="15240">
-            <a:solidFill>
-              <a:srgbClr val="30363D"/>
-            </a:solidFill>
-          </a:ln>
-        </p:spPr>
-        <p:style>
-          <a:lnRef idx="1">
-            <a:schemeClr val="accent1"/>
-          </a:lnRef>
-          <a:fillRef idx="3">
-            <a:schemeClr val="accent1"/>
-          </a:fillRef>
-          <a:effectRef idx="2">
-            <a:schemeClr val="accent1"/>
-          </a:effectRef>
-          <a:fontRef idx="minor">
-            <a:schemeClr val="lt1"/>
-          </a:fontRef>
-        </p:style>
-        <p:txBody>
-          <a:bodyPr rtlCol="0" anchor="ctr"/>
-          <a:lstStyle/>
-          <a:p>
-            <a:pPr algn="ctr"/>
-          </a:p>
-        </p:txBody>
-      </p:sp>
-      <p:sp>
-        <p:nvSpPr>
-          <p:cNvPr id="12" name="Rounded Rectangle 11"/>
-          <p:cNvSpPr/>
-          <p:nvPr/>
-        </p:nvSpPr>
-        <p:spPr>
-          <a:xfrm>
-            <a:off x="8046720" y="2011680"/>
-            <a:ext cx="3291840" cy="73152"/>
-          </a:xfrm>
-          <a:prstGeom prst="roundRect">
-            <a:avLst/>
-          </a:prstGeom>
-          <a:solidFill>
-            <a:srgbClr val="34A853"/>
-          </a:solidFill>
-          <a:ln>
-            <a:noFill/>
-          </a:ln>
-        </p:spPr>
-        <p:style>
-          <a:lnRef idx="1">
-            <a:schemeClr val="accent1"/>
-          </a:lnRef>
-          <a:fillRef idx="3">
-            <a:schemeClr val="accent1"/>
-          </a:fillRef>
-          <a:effectRef idx="2">
-            <a:schemeClr val="accent1"/>
-          </a:effectRef>
-          <a:fontRef idx="minor">
-            <a:schemeClr val="lt1"/>
-          </a:fontRef>
-        </p:style>
-        <p:txBody>
-          <a:bodyPr rtlCol="0" anchor="ctr"/>
-          <a:lstStyle/>
-          <a:p>
-            <a:pPr algn="ctr"/>
-          </a:p>
-        </p:txBody>
-      </p:sp>
-      <p:sp>
-        <p:nvSpPr>
-          <p:cNvPr id="13" name="TextBox 12"/>
-          <p:cNvSpPr txBox="1"/>
-          <p:nvPr/>
-        </p:nvSpPr>
-        <p:spPr>
-          <a:xfrm>
-            <a:off x="8366760" y="2286000"/>
-            <a:ext cx="2651760" cy="3886200"/>
-          </a:xfrm>
-          <a:prstGeom prst="rect">
-            <a:avLst/>
-          </a:prstGeom>
-          <a:noFill/>
-        </p:spPr>
-        <p:txBody>
-          <a:bodyPr wrap="square" lIns="0" tIns="0" rIns="0" bIns="0">
-            <a:spAutoFit/>
-          </a:bodyPr>
-          <a:lstStyle/>
-          <a:p>
-            <a:pPr>
-              <a:spcAft>
-                <a:spcPts val="1200"/>
-              </a:spcAft>
-              <a:defRPr sz="1900" b="1">
-                <a:solidFill>
-                  <a:srgbClr val="F0F6FC"/>
+              <a:t>Thank You!</a:t>
+            </a:r>
+          </a:p>
+          <a:p>
+            <a:pPr algn="ctr">
+              <a:spcAft>
+                <a:spcPts val="2400"/>
+              </a:spcAft>
+              <a:defRPr sz="2200" b="1">
+                <a:solidFill>
+                  <a:srgbClr val="059669"/>
                 </a:solidFill>
               </a:defRPr>
             </a:pPr>
             <a:r>
-              <a:t>Step 3: Web Dashboard Sync</a:t>
-            </a:r>
-          </a:p>
-          <a:p>
-            <a:pPr>
-              <a:spcAft>
-                <a:spcPts val="800"/>
-              </a:spcAft>
-            </a:pPr>
-            <a:r>
-              <a:rPr b="1" sz="1400">
-                <a:solidFill>
-                  <a:srgbClr val="34A853"/>
-                </a:solidFill>
-              </a:rPr>
-              <a:t>Switch to Dashboard: </a:t>
-            </a:r>
-            <a:r>
-              <a:rPr b="0" sz="1400">
-                <a:solidFill>
-                  <a:srgbClr val="F0F6FC"/>
-                </a:solidFill>
-              </a:rPr>
-              <a:t>Open http://localhost:3000/dashboard.</a:t>
-            </a:r>
-          </a:p>
-          <a:p>
-            <a:pPr>
-              <a:spcAft>
-                <a:spcPts val="800"/>
-              </a:spcAft>
-            </a:pPr>
-            <a:r>
-              <a:rPr b="1" sz="1400">
-                <a:solidFill>
-                  <a:srgbClr val="34A853"/>
-                </a:solidFill>
-              </a:rPr>
-              <a:t>User Isolation: </a:t>
-            </a:r>
-            <a:r>
-              <a:rPr b="0" sz="1400">
-                <a:solidFill>
-                  <a:srgbClr val="F0F6FC"/>
-                </a:solidFill>
-              </a:rPr>
-              <a:t>Authenticated personal dashboard — zero mock data for new users.</a:t>
-            </a:r>
-          </a:p>
-          <a:p>
-            <a:pPr>
-              <a:spcAft>
-                <a:spcPts val="800"/>
-              </a:spcAft>
-            </a:pPr>
-            <a:r>
-              <a:rPr b="1" sz="1400">
-                <a:solidFill>
-                  <a:srgbClr val="34A853"/>
-                </a:solidFill>
-              </a:rPr>
-              <a:t>14-Paradigm Radar: </a:t>
-            </a:r>
-            <a:r>
-              <a:rPr b="0" sz="1400">
-                <a:solidFill>
-                  <a:srgbClr val="F0F6FC"/>
-                </a:solidFill>
-              </a:rPr>
-              <a:t>Show dynamic paradigm counts and interview readiness score.</a:t>
-            </a:r>
-          </a:p>
-          <a:p>
-            <a:pPr>
-              <a:spcAft>
-                <a:spcPts val="800"/>
-              </a:spcAft>
-            </a:pPr>
-            <a:r>
-              <a:rPr b="1" sz="1400">
-                <a:solidFill>
-                  <a:srgbClr val="34A853"/>
-                </a:solidFill>
-              </a:rPr>
-              <a:t>Public Transcript: </a:t>
-            </a:r>
-            <a:r>
-              <a:rPr b="0" sz="1400">
-                <a:solidFill>
-                  <a:srgbClr val="F0F6FC"/>
-                </a:solidFill>
-              </a:rPr>
-              <a:t>Click 'Verify' to show the shareable recruiter transcript.</a:t>
-            </a:r>
-          </a:p>
-        </p:txBody>
-      </p:sp>
-    </p:spTree>
-  </p:cSld>
-  <p:clrMapOvr>
-    <a:masterClrMapping/>
-  </p:clrMapOvr>
-</p:sld>
-</file>
-
-<file path=ppt/slides/slide11.xml><?xml version="1.0" encoding="utf-8"?>
-<p:sld xmlns:a="http://schemas.openxmlformats.org/drawingml/2006/main" xmlns:p="http://schemas.openxmlformats.org/presentationml/2006/main" xmlns:r="http://schemas.openxmlformats.org/officeDocument/2006/relationships">
-  <p:cSld>
-    <p:bg>
-      <p:bgPr>
-        <a:solidFill>
-          <a:srgbClr val="0D1117"/>
-        </a:solidFill>
-        <a:effectLst/>
-      </p:bgPr>
-    </p:bg>
-    <p:spTree>
-      <p:nvGrpSpPr>
-        <p:cNvPr id="1" name=""/>
-        <p:cNvGrpSpPr/>
-        <p:nvPr/>
-      </p:nvGrpSpPr>
-      <p:grpSpPr/>
-      <p:sp>
-        <p:nvSpPr>
-          <p:cNvPr id="2" name="TextBox 1"/>
-          <p:cNvSpPr txBox="1"/>
-          <p:nvPr/>
-        </p:nvSpPr>
-        <p:spPr>
-          <a:xfrm>
-            <a:off x="731520" y="411480"/>
-            <a:ext cx="4114800" cy="365760"/>
-          </a:xfrm>
-          <a:prstGeom prst="rect">
-            <a:avLst/>
-          </a:prstGeom>
-          <a:noFill/>
-        </p:spPr>
-        <p:txBody>
-          <a:bodyPr wrap="square" lIns="0" tIns="0" rIns="0" bIns="0">
-            <a:spAutoFit/>
-          </a:bodyPr>
-          <a:lstStyle/>
-          <a:p>
-            <a:pPr>
-              <a:defRPr sz="1100" b="1">
-                <a:solidFill>
-                  <a:srgbClr val="4285F4"/>
+              <a:t>We Welcome Your Questions &amp; Live Demo Requests</a:t>
+            </a:r>
+          </a:p>
+          <a:p>
+            <a:pPr algn="ctr">
+              <a:defRPr sz="1600">
+                <a:solidFill>
+                  <a:srgbClr val="475569"/>
                 </a:solidFill>
               </a:defRPr>
             </a:pPr>
             <a:r>
-              <a:t>FEASIBILITY &amp; COST</a:t>
-            </a:r>
-          </a:p>
-        </p:txBody>
-      </p:sp>
-      <p:sp>
-        <p:nvSpPr>
-          <p:cNvPr id="3" name="TextBox 2"/>
-          <p:cNvSpPr txBox="1"/>
-          <p:nvPr/>
-        </p:nvSpPr>
-        <p:spPr>
-          <a:xfrm>
-            <a:off x="731520" y="777240"/>
-            <a:ext cx="10698480" cy="731520"/>
-          </a:xfrm>
-          <a:prstGeom prst="rect">
-            <a:avLst/>
-          </a:prstGeom>
-          <a:noFill/>
-        </p:spPr>
-        <p:txBody>
-          <a:bodyPr wrap="square" lIns="0" tIns="0" rIns="0" bIns="0">
-            <a:spAutoFit/>
-          </a:bodyPr>
-          <a:lstStyle/>
-          <a:p>
-            <a:pPr>
-              <a:defRPr sz="2800" b="1">
-                <a:solidFill>
-                  <a:srgbClr val="F0F6FC"/>
-                </a:solidFill>
-              </a:defRPr>
-            </a:pPr>
-            <a:r>
-              <a:t>100% Free-Tier Architecture &amp; Scalability</a:t>
-            </a:r>
-          </a:p>
-        </p:txBody>
-      </p:sp>
-      <p:sp>
-        <p:nvSpPr>
-          <p:cNvPr id="4" name="TextBox 3"/>
-          <p:cNvSpPr txBox="1"/>
-          <p:nvPr/>
-        </p:nvSpPr>
-        <p:spPr>
-          <a:xfrm>
-            <a:off x="731520" y="1508760"/>
-            <a:ext cx="10698480" cy="411480"/>
-          </a:xfrm>
-          <a:prstGeom prst="rect">
-            <a:avLst/>
-          </a:prstGeom>
-          <a:noFill/>
-        </p:spPr>
-        <p:txBody>
-          <a:bodyPr wrap="square" lIns="0" tIns="0" rIns="0" bIns="0">
-            <a:spAutoFit/>
-          </a:bodyPr>
-          <a:lstStyle/>
-          <a:p>
-            <a:pPr>
-              <a:defRPr sz="1400">
-                <a:solidFill>
-                  <a:srgbClr val="8B949E"/>
-                </a:solidFill>
-              </a:defRPr>
-            </a:pPr>
-            <a:r>
-              <a:t>Engineered from day one to operate with zero infrastructure cost and infinite accessibility.</a:t>
-            </a:r>
-          </a:p>
-        </p:txBody>
-      </p:sp>
-      <p:sp>
-        <p:nvSpPr>
-          <p:cNvPr id="5" name="Rounded Rectangle 4"/>
-          <p:cNvSpPr/>
-          <p:nvPr/>
-        </p:nvSpPr>
-        <p:spPr>
-          <a:xfrm>
-            <a:off x="731520" y="2011680"/>
-            <a:ext cx="5120640" cy="4297680"/>
-          </a:xfrm>
-          <a:prstGeom prst="roundRect">
-            <a:avLst/>
-          </a:prstGeom>
-          <a:solidFill>
-            <a:srgbClr val="161B22"/>
-          </a:solidFill>
-          <a:ln w="15240">
-            <a:solidFill>
-              <a:srgbClr val="30363D"/>
-            </a:solidFill>
-          </a:ln>
-        </p:spPr>
-        <p:style>
-          <a:lnRef idx="1">
-            <a:schemeClr val="accent1"/>
-          </a:lnRef>
-          <a:fillRef idx="3">
-            <a:schemeClr val="accent1"/>
-          </a:fillRef>
-          <a:effectRef idx="2">
-            <a:schemeClr val="accent1"/>
-          </a:effectRef>
-          <a:fontRef idx="minor">
-            <a:schemeClr val="lt1"/>
-          </a:fontRef>
-        </p:style>
-        <p:txBody>
-          <a:bodyPr rtlCol="0" anchor="ctr"/>
-          <a:lstStyle/>
-          <a:p>
-            <a:pPr algn="ctr"/>
-          </a:p>
-        </p:txBody>
-      </p:sp>
-      <p:sp>
-        <p:nvSpPr>
-          <p:cNvPr id="6" name="Rounded Rectangle 5"/>
-          <p:cNvSpPr/>
-          <p:nvPr/>
-        </p:nvSpPr>
-        <p:spPr>
-          <a:xfrm>
-            <a:off x="731520" y="2011680"/>
-            <a:ext cx="5120640" cy="73152"/>
-          </a:xfrm>
-          <a:prstGeom prst="roundRect">
-            <a:avLst/>
-          </a:prstGeom>
-          <a:solidFill>
-            <a:srgbClr val="4285F4"/>
-          </a:solidFill>
-          <a:ln>
-            <a:noFill/>
-          </a:ln>
-        </p:spPr>
-        <p:style>
-          <a:lnRef idx="1">
-            <a:schemeClr val="accent1"/>
-          </a:lnRef>
-          <a:fillRef idx="3">
-            <a:schemeClr val="accent1"/>
-          </a:fillRef>
-          <a:effectRef idx="2">
-            <a:schemeClr val="accent1"/>
-          </a:effectRef>
-          <a:fontRef idx="minor">
-            <a:schemeClr val="lt1"/>
-          </a:fontRef>
-        </p:style>
-        <p:txBody>
-          <a:bodyPr rtlCol="0" anchor="ctr"/>
-          <a:lstStyle/>
-          <a:p>
-            <a:pPr algn="ctr"/>
-          </a:p>
-        </p:txBody>
-      </p:sp>
-      <p:sp>
-        <p:nvSpPr>
-          <p:cNvPr id="7" name="TextBox 6"/>
-          <p:cNvSpPr txBox="1"/>
-          <p:nvPr/>
-        </p:nvSpPr>
-        <p:spPr>
-          <a:xfrm>
-            <a:off x="1051560" y="2286000"/>
-            <a:ext cx="4480560" cy="3886200"/>
-          </a:xfrm>
-          <a:prstGeom prst="rect">
-            <a:avLst/>
-          </a:prstGeom>
-          <a:noFill/>
-        </p:spPr>
-        <p:txBody>
-          <a:bodyPr wrap="square" lIns="0" tIns="0" rIns="0" bIns="0">
-            <a:spAutoFit/>
-          </a:bodyPr>
-          <a:lstStyle/>
-          <a:p>
-            <a:pPr>
-              <a:spcAft>
-                <a:spcPts val="1200"/>
-              </a:spcAft>
-              <a:defRPr sz="1900" b="1">
-                <a:solidFill>
-                  <a:srgbClr val="F0F6FC"/>
-                </a:solidFill>
-              </a:defRPr>
-            </a:pPr>
-            <a:r>
-              <a:t>100% Free-Tier Technology Stack</a:t>
-            </a:r>
-          </a:p>
-          <a:p>
-            <a:pPr>
-              <a:spcAft>
-                <a:spcPts val="800"/>
-              </a:spcAft>
-            </a:pPr>
-            <a:r>
-              <a:rPr b="1" sz="1400">
-                <a:solidFill>
-                  <a:srgbClr val="4285F4"/>
-                </a:solidFill>
-              </a:rPr>
-              <a:t>AI Intelligence: </a:t>
-            </a:r>
-            <a:r>
-              <a:rPr b="0" sz="1400">
-                <a:solidFill>
-                  <a:srgbClr val="F0F6FC"/>
-                </a:solidFill>
-              </a:rPr>
-              <a:t>Google Gemini Flash API via dynamic ListModels discovery (Gemini 3.7/3.6/3.8 Flash).</a:t>
-            </a:r>
-          </a:p>
-          <a:p>
-            <a:pPr>
-              <a:spcAft>
-                <a:spcPts val="800"/>
-              </a:spcAft>
-            </a:pPr>
-            <a:r>
-              <a:rPr b="1" sz="1400">
-                <a:solidFill>
-                  <a:srgbClr val="4285F4"/>
-                </a:solidFill>
-              </a:rPr>
-              <a:t>Web Application: </a:t>
-            </a:r>
-            <a:r>
-              <a:rPr b="0" sz="1400">
-                <a:solidFill>
-                  <a:srgbClr val="F0F6FC"/>
-                </a:solidFill>
-              </a:rPr>
-              <a:t>Next.js 14 App Router deployed locally or on Vercel Hobby (100% free).</a:t>
-            </a:r>
-          </a:p>
-          <a:p>
-            <a:pPr>
-              <a:spcAft>
-                <a:spcPts val="800"/>
-              </a:spcAft>
-            </a:pPr>
-            <a:r>
-              <a:rPr b="1" sz="1400">
-                <a:solidFill>
-                  <a:srgbClr val="4285F4"/>
-                </a:solidFill>
-              </a:rPr>
-              <a:t>Database Layer: </a:t>
-            </a:r>
-            <a:r>
-              <a:rPr b="0" sz="1400">
-                <a:solidFill>
-                  <a:srgbClr val="F0F6FC"/>
-                </a:solidFill>
-              </a:rPr>
-              <a:t>Supabase PostgreSQL free tier (500MB) with offline local JSON mirroring.</a:t>
-            </a:r>
-          </a:p>
-          <a:p>
-            <a:pPr>
-              <a:spcAft>
-                <a:spcPts val="800"/>
-              </a:spcAft>
-            </a:pPr>
-            <a:r>
-              <a:rPr b="1" sz="1400">
-                <a:solidFill>
-                  <a:srgbClr val="4285F4"/>
-                </a:solidFill>
-              </a:rPr>
-              <a:t>Extensions: </a:t>
-            </a:r>
-            <a:r>
-              <a:rPr b="0" sz="1400">
-                <a:solidFill>
-                  <a:srgbClr val="F0F6FC"/>
-                </a:solidFill>
-              </a:rPr>
-              <a:t>Chrome Manifest V3 and VS Code Ext API (distributed freely without app store fees).</a:t>
-            </a:r>
-          </a:p>
-        </p:txBody>
-      </p:sp>
-      <p:sp>
-        <p:nvSpPr>
-          <p:cNvPr id="8" name="Rounded Rectangle 7"/>
-          <p:cNvSpPr/>
-          <p:nvPr/>
-        </p:nvSpPr>
-        <p:spPr>
-          <a:xfrm>
-            <a:off x="6217920" y="2011680"/>
-            <a:ext cx="5120640" cy="4297680"/>
-          </a:xfrm>
-          <a:prstGeom prst="roundRect">
-            <a:avLst/>
-          </a:prstGeom>
-          <a:solidFill>
-            <a:srgbClr val="161B22"/>
-          </a:solidFill>
-          <a:ln w="15240">
-            <a:solidFill>
-              <a:srgbClr val="30363D"/>
-            </a:solidFill>
-          </a:ln>
-        </p:spPr>
-        <p:style>
-          <a:lnRef idx="1">
-            <a:schemeClr val="accent1"/>
-          </a:lnRef>
-          <a:fillRef idx="3">
-            <a:schemeClr val="accent1"/>
-          </a:fillRef>
-          <a:effectRef idx="2">
-            <a:schemeClr val="accent1"/>
-          </a:effectRef>
-          <a:fontRef idx="minor">
-            <a:schemeClr val="lt1"/>
-          </a:fontRef>
-        </p:style>
-        <p:txBody>
-          <a:bodyPr rtlCol="0" anchor="ctr"/>
-          <a:lstStyle/>
-          <a:p>
-            <a:pPr algn="ctr"/>
-          </a:p>
-        </p:txBody>
-      </p:sp>
-      <p:sp>
-        <p:nvSpPr>
-          <p:cNvPr id="9" name="Rounded Rectangle 8"/>
-          <p:cNvSpPr/>
-          <p:nvPr/>
-        </p:nvSpPr>
-        <p:spPr>
-          <a:xfrm>
-            <a:off x="6217920" y="2011680"/>
-            <a:ext cx="5120640" cy="73152"/>
-          </a:xfrm>
-          <a:prstGeom prst="roundRect">
-            <a:avLst/>
-          </a:prstGeom>
-          <a:solidFill>
-            <a:srgbClr val="34A853"/>
-          </a:solidFill>
-          <a:ln>
-            <a:noFill/>
-          </a:ln>
-        </p:spPr>
-        <p:style>
-          <a:lnRef idx="1">
-            <a:schemeClr val="accent1"/>
-          </a:lnRef>
-          <a:fillRef idx="3">
-            <a:schemeClr val="accent1"/>
-          </a:fillRef>
-          <a:effectRef idx="2">
-            <a:schemeClr val="accent1"/>
-          </a:effectRef>
-          <a:fontRef idx="minor">
-            <a:schemeClr val="lt1"/>
-          </a:fontRef>
-        </p:style>
-        <p:txBody>
-          <a:bodyPr rtlCol="0" anchor="ctr"/>
-          <a:lstStyle/>
-          <a:p>
-            <a:pPr algn="ctr"/>
-          </a:p>
-        </p:txBody>
-      </p:sp>
-      <p:sp>
-        <p:nvSpPr>
-          <p:cNvPr id="10" name="TextBox 9"/>
-          <p:cNvSpPr txBox="1"/>
-          <p:nvPr/>
-        </p:nvSpPr>
-        <p:spPr>
-          <a:xfrm>
-            <a:off x="6537960" y="2286000"/>
-            <a:ext cx="4480560" cy="3886200"/>
-          </a:xfrm>
-          <a:prstGeom prst="rect">
-            <a:avLst/>
-          </a:prstGeom>
-          <a:noFill/>
-        </p:spPr>
-        <p:txBody>
-          <a:bodyPr wrap="square" lIns="0" tIns="0" rIns="0" bIns="0">
-            <a:spAutoFit/>
-          </a:bodyPr>
-          <a:lstStyle/>
-          <a:p>
-            <a:pPr>
-              <a:spcAft>
-                <a:spcPts val="1200"/>
-              </a:spcAft>
-              <a:defRPr sz="1900" b="1">
-                <a:solidFill>
-                  <a:srgbClr val="F0F6FC"/>
-                </a:solidFill>
-              </a:defRPr>
-            </a:pPr>
-            <a:r>
-              <a:t>Who Benefits from AlgoPulse?</a:t>
-            </a:r>
-          </a:p>
-          <a:p>
-            <a:pPr>
-              <a:spcAft>
-                <a:spcPts val="800"/>
-              </a:spcAft>
-            </a:pPr>
-            <a:r>
-              <a:rPr b="1" sz="1400">
-                <a:solidFill>
-                  <a:srgbClr val="34A853"/>
-                </a:solidFill>
-              </a:rPr>
-              <a:t>Individual Engineers: </a:t>
-            </a:r>
-            <a:r>
-              <a:rPr b="0" sz="1400">
-                <a:solidFill>
-                  <a:srgbClr val="F0F6FC"/>
-                </a:solidFill>
-              </a:rPr>
-              <a:t>Saves hundreds of hours of directionless grinding and prevents memory loss.</a:t>
-            </a:r>
-          </a:p>
-          <a:p>
-            <a:pPr>
-              <a:spcAft>
-                <a:spcPts val="800"/>
-              </a:spcAft>
-            </a:pPr>
-            <a:r>
-              <a:rPr b="1" sz="1400">
-                <a:solidFill>
-                  <a:srgbClr val="34A853"/>
-                </a:solidFill>
-              </a:rPr>
-              <a:t>Coding Bootcamps &amp; Universities: </a:t>
-            </a:r>
-            <a:r>
-              <a:rPr b="0" sz="1400">
-                <a:solidFill>
-                  <a:srgbClr val="F0F6FC"/>
-                </a:solidFill>
-              </a:rPr>
-              <a:t>Automates pedagogical TA reviews with progressive hint scaffolds.</a:t>
-            </a:r>
-          </a:p>
-          <a:p>
-            <a:pPr>
-              <a:spcAft>
-                <a:spcPts val="800"/>
-              </a:spcAft>
-            </a:pPr>
-            <a:r>
-              <a:rPr b="1" sz="1400">
-                <a:solidFill>
-                  <a:srgbClr val="34A853"/>
-                </a:solidFill>
-              </a:rPr>
-              <a:t>Engineering Hiring: </a:t>
-            </a:r>
-            <a:r>
-              <a:rPr b="0" sz="1400">
-                <a:solidFill>
-                  <a:srgbClr val="F0F6FC"/>
-                </a:solidFill>
-              </a:rPr>
-              <a:t>Replaces unreliable resume bullet points with verified 16-week proof-of-work portfolios.</a:t>
-            </a:r>
-          </a:p>
-        </p:txBody>
-      </p:sp>
-    </p:spTree>
-  </p:cSld>
-  <p:clrMapOvr>
-    <a:masterClrMapping/>
-  </p:clrMapOvr>
-</p:sld>
-</file>
-
-<file path=ppt/slides/slide12.xml><?xml version="1.0" encoding="utf-8"?>
-<p:sld xmlns:a="http://schemas.openxmlformats.org/drawingml/2006/main" xmlns:p="http://schemas.openxmlformats.org/presentationml/2006/main" xmlns:r="http://schemas.openxmlformats.org/officeDocument/2006/relationships">
-  <p:cSld>
-    <p:bg>
-      <p:bgPr>
-        <a:solidFill>
-          <a:srgbClr val="0D1117"/>
-        </a:solidFill>
-        <a:effectLst/>
-      </p:bgPr>
-    </p:bg>
-    <p:spTree>
-      <p:nvGrpSpPr>
-        <p:cNvPr id="1" name=""/>
-        <p:cNvGrpSpPr/>
-        <p:nvPr/>
-      </p:nvGrpSpPr>
-      <p:grpSpPr/>
-      <p:sp>
-        <p:nvSpPr>
-          <p:cNvPr id="2" name="TextBox 1"/>
-          <p:cNvSpPr txBox="1"/>
-          <p:nvPr/>
-        </p:nvSpPr>
-        <p:spPr>
-          <a:xfrm>
-            <a:off x="731520" y="411480"/>
-            <a:ext cx="4114800" cy="365760"/>
-          </a:xfrm>
-          <a:prstGeom prst="rect">
-            <a:avLst/>
-          </a:prstGeom>
-          <a:noFill/>
-        </p:spPr>
-        <p:txBody>
-          <a:bodyPr wrap="square" lIns="0" tIns="0" rIns="0" bIns="0">
-            <a:spAutoFit/>
-          </a:bodyPr>
-          <a:lstStyle/>
-          <a:p>
-            <a:pPr>
-              <a:defRPr sz="1100" b="1">
-                <a:solidFill>
-                  <a:srgbClr val="4285F4"/>
-                </a:solidFill>
-              </a:defRPr>
-            </a:pPr>
-            <a:r>
-              <a:t>SUMMARY</a:t>
-            </a:r>
-          </a:p>
-        </p:txBody>
-      </p:sp>
-      <p:sp>
-        <p:nvSpPr>
-          <p:cNvPr id="3" name="TextBox 2"/>
-          <p:cNvSpPr txBox="1"/>
-          <p:nvPr/>
-        </p:nvSpPr>
-        <p:spPr>
-          <a:xfrm>
-            <a:off x="731520" y="777240"/>
-            <a:ext cx="10698480" cy="731520"/>
-          </a:xfrm>
-          <a:prstGeom prst="rect">
-            <a:avLst/>
-          </a:prstGeom>
-          <a:noFill/>
-        </p:spPr>
-        <p:txBody>
-          <a:bodyPr wrap="square" lIns="0" tIns="0" rIns="0" bIns="0">
-            <a:spAutoFit/>
-          </a:bodyPr>
-          <a:lstStyle/>
-          <a:p>
-            <a:pPr>
-              <a:defRPr sz="2800" b="1">
-                <a:solidFill>
-                  <a:srgbClr val="F0F6FC"/>
-                </a:solidFill>
-              </a:defRPr>
-            </a:pPr>
-            <a:r>
-              <a:t>Conclusion: Elevating Algorithmic Mastery</a:t>
-            </a:r>
-          </a:p>
-        </p:txBody>
-      </p:sp>
-      <p:sp>
-        <p:nvSpPr>
-          <p:cNvPr id="4" name="TextBox 3"/>
-          <p:cNvSpPr txBox="1"/>
-          <p:nvPr/>
-        </p:nvSpPr>
-        <p:spPr>
-          <a:xfrm>
-            <a:off x="731520" y="1508760"/>
-            <a:ext cx="10698480" cy="411480"/>
-          </a:xfrm>
-          <a:prstGeom prst="rect">
-            <a:avLst/>
-          </a:prstGeom>
-          <a:noFill/>
-        </p:spPr>
-        <p:txBody>
-          <a:bodyPr wrap="square" lIns="0" tIns="0" rIns="0" bIns="0">
-            <a:spAutoFit/>
-          </a:bodyPr>
-          <a:lstStyle/>
-          <a:p>
-            <a:pPr>
-              <a:defRPr sz="1400">
-                <a:solidFill>
-                  <a:srgbClr val="8B949E"/>
-                </a:solidFill>
-              </a:defRPr>
-            </a:pPr>
-            <a:r>
-              <a:t>Turning algorithmic problem solving into a structured, delightful, and verifiable science.</a:t>
-            </a:r>
-          </a:p>
-        </p:txBody>
-      </p:sp>
-      <p:sp>
-        <p:nvSpPr>
-          <p:cNvPr id="5" name="Rounded Rectangle 4"/>
-          <p:cNvSpPr/>
-          <p:nvPr/>
-        </p:nvSpPr>
-        <p:spPr>
-          <a:xfrm>
-            <a:off x="731520" y="2011680"/>
-            <a:ext cx="3291840" cy="4297680"/>
-          </a:xfrm>
-          <a:prstGeom prst="roundRect">
-            <a:avLst/>
-          </a:prstGeom>
-          <a:solidFill>
-            <a:srgbClr val="161B22"/>
-          </a:solidFill>
-          <a:ln w="15240">
-            <a:solidFill>
-              <a:srgbClr val="30363D"/>
-            </a:solidFill>
-          </a:ln>
-        </p:spPr>
-        <p:style>
-          <a:lnRef idx="1">
-            <a:schemeClr val="accent1"/>
-          </a:lnRef>
-          <a:fillRef idx="3">
-            <a:schemeClr val="accent1"/>
-          </a:fillRef>
-          <a:effectRef idx="2">
-            <a:schemeClr val="accent1"/>
-          </a:effectRef>
-          <a:fontRef idx="minor">
-            <a:schemeClr val="lt1"/>
-          </a:fontRef>
-        </p:style>
-        <p:txBody>
-          <a:bodyPr rtlCol="0" anchor="ctr"/>
-          <a:lstStyle/>
-          <a:p>
-            <a:pPr algn="ctr"/>
-          </a:p>
-        </p:txBody>
-      </p:sp>
-      <p:sp>
-        <p:nvSpPr>
-          <p:cNvPr id="6" name="Rounded Rectangle 5"/>
-          <p:cNvSpPr/>
-          <p:nvPr/>
-        </p:nvSpPr>
-        <p:spPr>
-          <a:xfrm>
-            <a:off x="731520" y="2011680"/>
-            <a:ext cx="3291840" cy="73152"/>
-          </a:xfrm>
-          <a:prstGeom prst="roundRect">
-            <a:avLst/>
-          </a:prstGeom>
-          <a:solidFill>
-            <a:srgbClr val="4285F4"/>
-          </a:solidFill>
-          <a:ln>
-            <a:noFill/>
-          </a:ln>
-        </p:spPr>
-        <p:style>
-          <a:lnRef idx="1">
-            <a:schemeClr val="accent1"/>
-          </a:lnRef>
-          <a:fillRef idx="3">
-            <a:schemeClr val="accent1"/>
-          </a:fillRef>
-          <a:effectRef idx="2">
-            <a:schemeClr val="accent1"/>
-          </a:effectRef>
-          <a:fontRef idx="minor">
-            <a:schemeClr val="lt1"/>
-          </a:fontRef>
-        </p:style>
-        <p:txBody>
-          <a:bodyPr rtlCol="0" anchor="ctr"/>
-          <a:lstStyle/>
-          <a:p>
-            <a:pPr algn="ctr"/>
-          </a:p>
-        </p:txBody>
-      </p:sp>
-      <p:sp>
-        <p:nvSpPr>
-          <p:cNvPr id="7" name="TextBox 6"/>
-          <p:cNvSpPr txBox="1"/>
-          <p:nvPr/>
-        </p:nvSpPr>
-        <p:spPr>
-          <a:xfrm>
-            <a:off x="1051560" y="2286000"/>
-            <a:ext cx="2651760" cy="3886200"/>
-          </a:xfrm>
-          <a:prstGeom prst="rect">
-            <a:avLst/>
-          </a:prstGeom>
-          <a:noFill/>
-        </p:spPr>
-        <p:txBody>
-          <a:bodyPr wrap="square" lIns="0" tIns="0" rIns="0" bIns="0">
-            <a:spAutoFit/>
-          </a:bodyPr>
-          <a:lstStyle/>
-          <a:p>
-            <a:pPr>
-              <a:spcAft>
-                <a:spcPts val="1200"/>
-              </a:spcAft>
-              <a:defRPr sz="1900" b="1">
-                <a:solidFill>
-                  <a:srgbClr val="F0F6FC"/>
-                </a:solidFill>
-              </a:defRPr>
-            </a:pPr>
-            <a:r>
-              <a:t>The Shift in Thinking</a:t>
-            </a:r>
-          </a:p>
-          <a:p>
-            <a:pPr>
-              <a:spcAft>
-                <a:spcPts val="800"/>
-              </a:spcAft>
-            </a:pPr>
-            <a:r>
-              <a:rPr b="1" sz="1400">
-                <a:solidFill>
-                  <a:srgbClr val="4285F4"/>
-                </a:solidFill>
-              </a:rPr>
-              <a:t>From: </a:t>
-            </a:r>
-            <a:r>
-              <a:rPr b="0" sz="1400">
-                <a:solidFill>
-                  <a:srgbClr val="F0F6FC"/>
-                </a:solidFill>
-              </a:rPr>
-              <a:t>Passing test cases by accident and memorizing solutions.</a:t>
-            </a:r>
-          </a:p>
-          <a:p>
-            <a:pPr>
-              <a:spcAft>
-                <a:spcPts val="800"/>
-              </a:spcAft>
-            </a:pPr>
-            <a:r>
-              <a:rPr b="1" sz="1400">
-                <a:solidFill>
-                  <a:srgbClr val="4285F4"/>
-                </a:solidFill>
-              </a:rPr>
-              <a:t>To: </a:t>
-            </a:r>
-            <a:r>
-              <a:rPr b="0" sz="1400">
-                <a:solidFill>
-                  <a:srgbClr val="F0F6FC"/>
-                </a:solidFill>
-              </a:rPr>
-              <a:t>Mastering 14 foundational mental models and understanding exact Big-O trade-offs.</a:t>
-            </a:r>
-          </a:p>
-          <a:p>
-            <a:pPr>
-              <a:spcAft>
-                <a:spcPts val="800"/>
-              </a:spcAft>
-            </a:pPr>
-            <a:r>
-              <a:rPr b="1" sz="1400">
-                <a:solidFill>
-                  <a:srgbClr val="4285F4"/>
-                </a:solidFill>
-              </a:rPr>
-              <a:t>Result: </a:t>
-            </a:r>
-            <a:r>
-              <a:rPr b="0" sz="1400">
-                <a:solidFill>
-                  <a:srgbClr val="F0F6FC"/>
-                </a:solidFill>
-              </a:rPr>
-              <a:t>Confidence in any interview room, regardless of problem variations.</a:t>
-            </a:r>
-          </a:p>
-        </p:txBody>
-      </p:sp>
-      <p:sp>
-        <p:nvSpPr>
-          <p:cNvPr id="8" name="Rounded Rectangle 7"/>
-          <p:cNvSpPr/>
-          <p:nvPr/>
-        </p:nvSpPr>
-        <p:spPr>
-          <a:xfrm>
-            <a:off x="4389120" y="2011680"/>
-            <a:ext cx="3291840" cy="4297680"/>
-          </a:xfrm>
-          <a:prstGeom prst="roundRect">
-            <a:avLst/>
-          </a:prstGeom>
-          <a:solidFill>
-            <a:srgbClr val="161B22"/>
-          </a:solidFill>
-          <a:ln w="15240">
-            <a:solidFill>
-              <a:srgbClr val="30363D"/>
-            </a:solidFill>
-          </a:ln>
-        </p:spPr>
-        <p:style>
-          <a:lnRef idx="1">
-            <a:schemeClr val="accent1"/>
-          </a:lnRef>
-          <a:fillRef idx="3">
-            <a:schemeClr val="accent1"/>
-          </a:fillRef>
-          <a:effectRef idx="2">
-            <a:schemeClr val="accent1"/>
-          </a:effectRef>
-          <a:fontRef idx="minor">
-            <a:schemeClr val="lt1"/>
-          </a:fontRef>
-        </p:style>
-        <p:txBody>
-          <a:bodyPr rtlCol="0" anchor="ctr"/>
-          <a:lstStyle/>
-          <a:p>
-            <a:pPr algn="ctr"/>
-          </a:p>
-        </p:txBody>
-      </p:sp>
-      <p:sp>
-        <p:nvSpPr>
-          <p:cNvPr id="9" name="Rounded Rectangle 8"/>
-          <p:cNvSpPr/>
-          <p:nvPr/>
-        </p:nvSpPr>
-        <p:spPr>
-          <a:xfrm>
-            <a:off x="4389120" y="2011680"/>
-            <a:ext cx="3291840" cy="73152"/>
-          </a:xfrm>
-          <a:prstGeom prst="roundRect">
-            <a:avLst/>
-          </a:prstGeom>
-          <a:solidFill>
-            <a:srgbClr val="FBBC05"/>
-          </a:solidFill>
-          <a:ln>
-            <a:noFill/>
-          </a:ln>
-        </p:spPr>
-        <p:style>
-          <a:lnRef idx="1">
-            <a:schemeClr val="accent1"/>
-          </a:lnRef>
-          <a:fillRef idx="3">
-            <a:schemeClr val="accent1"/>
-          </a:fillRef>
-          <a:effectRef idx="2">
-            <a:schemeClr val="accent1"/>
-          </a:effectRef>
-          <a:fontRef idx="minor">
-            <a:schemeClr val="lt1"/>
-          </a:fontRef>
-        </p:style>
-        <p:txBody>
-          <a:bodyPr rtlCol="0" anchor="ctr"/>
-          <a:lstStyle/>
-          <a:p>
-            <a:pPr algn="ctr"/>
-          </a:p>
-        </p:txBody>
-      </p:sp>
-      <p:sp>
-        <p:nvSpPr>
-          <p:cNvPr id="10" name="TextBox 9"/>
-          <p:cNvSpPr txBox="1"/>
-          <p:nvPr/>
-        </p:nvSpPr>
-        <p:spPr>
-          <a:xfrm>
-            <a:off x="4709160" y="2286000"/>
-            <a:ext cx="2651760" cy="3886200"/>
-          </a:xfrm>
-          <a:prstGeom prst="rect">
-            <a:avLst/>
-          </a:prstGeom>
-          <a:noFill/>
-        </p:spPr>
-        <p:txBody>
-          <a:bodyPr wrap="square" lIns="0" tIns="0" rIns="0" bIns="0">
-            <a:spAutoFit/>
-          </a:bodyPr>
-          <a:lstStyle/>
-          <a:p>
-            <a:pPr>
-              <a:spcAft>
-                <a:spcPts val="1200"/>
-              </a:spcAft>
-              <a:defRPr sz="1900" b="1">
-                <a:solidFill>
-                  <a:srgbClr val="F0F6FC"/>
-                </a:solidFill>
-              </a:defRPr>
-            </a:pPr>
-            <a:r>
-              <a:t>The Power of Workflow</a:t>
-            </a:r>
-          </a:p>
-          <a:p>
-            <a:pPr>
-              <a:spcAft>
-                <a:spcPts val="800"/>
-              </a:spcAft>
-            </a:pPr>
-            <a:r>
-              <a:rPr b="1" sz="1400">
-                <a:solidFill>
-                  <a:srgbClr val="FBBC05"/>
-                </a:solidFill>
-              </a:rPr>
-              <a:t>Seamless Flow: </a:t>
-            </a:r>
-            <a:r>
-              <a:rPr b="0" sz="1400">
-                <a:solidFill>
-                  <a:srgbClr val="F0F6FC"/>
-                </a:solidFill>
-              </a:rPr>
-              <a:t>One unified ecosystem spanning Chrome, VS Code, and Next.js.</a:t>
-            </a:r>
-          </a:p>
-          <a:p>
-            <a:pPr>
-              <a:spcAft>
-                <a:spcPts val="800"/>
-              </a:spcAft>
-            </a:pPr>
-            <a:r>
-              <a:rPr b="1" sz="1400">
-                <a:solidFill>
-                  <a:srgbClr val="FBBC05"/>
-                </a:solidFill>
-              </a:rPr>
-              <a:t>Continuous Recall: </a:t>
-            </a:r>
-            <a:r>
-              <a:rPr b="0" sz="1400">
-                <a:solidFill>
-                  <a:srgbClr val="F0F6FC"/>
-                </a:solidFill>
-              </a:rPr>
-              <a:t>Spaced repetition ensures you never lose what you worked hard to learn.</a:t>
-            </a:r>
-          </a:p>
-          <a:p>
-            <a:pPr>
-              <a:spcAft>
-                <a:spcPts val="800"/>
-              </a:spcAft>
-            </a:pPr>
-            <a:r>
-              <a:rPr b="1" sz="1400">
-                <a:solidFill>
-                  <a:srgbClr val="FBBC05"/>
-                </a:solidFill>
-              </a:rPr>
-              <a:t>No Friction: </a:t>
-            </a:r>
-            <a:r>
-              <a:rPr b="0" sz="1400">
-                <a:solidFill>
-                  <a:srgbClr val="F0F6FC"/>
-                </a:solidFill>
-              </a:rPr>
-              <a:t>Instant evaluation in under 2 seconds.</a:t>
-            </a:r>
-          </a:p>
-        </p:txBody>
-      </p:sp>
-      <p:sp>
-        <p:nvSpPr>
-          <p:cNvPr id="11" name="Rounded Rectangle 10"/>
-          <p:cNvSpPr/>
-          <p:nvPr/>
-        </p:nvSpPr>
-        <p:spPr>
-          <a:xfrm>
-            <a:off x="8046720" y="2011680"/>
-            <a:ext cx="3291840" cy="4297680"/>
-          </a:xfrm>
-          <a:prstGeom prst="roundRect">
-            <a:avLst/>
-          </a:prstGeom>
-          <a:solidFill>
-            <a:srgbClr val="161B22"/>
-          </a:solidFill>
-          <a:ln w="15240">
-            <a:solidFill>
-              <a:srgbClr val="30363D"/>
-            </a:solidFill>
-          </a:ln>
-        </p:spPr>
-        <p:style>
-          <a:lnRef idx="1">
-            <a:schemeClr val="accent1"/>
-          </a:lnRef>
-          <a:fillRef idx="3">
-            <a:schemeClr val="accent1"/>
-          </a:fillRef>
-          <a:effectRef idx="2">
-            <a:schemeClr val="accent1"/>
-          </a:effectRef>
-          <a:fontRef idx="minor">
-            <a:schemeClr val="lt1"/>
-          </a:fontRef>
-        </p:style>
-        <p:txBody>
-          <a:bodyPr rtlCol="0" anchor="ctr"/>
-          <a:lstStyle/>
-          <a:p>
-            <a:pPr algn="ctr"/>
-          </a:p>
-        </p:txBody>
-      </p:sp>
-      <p:sp>
-        <p:nvSpPr>
-          <p:cNvPr id="12" name="Rounded Rectangle 11"/>
-          <p:cNvSpPr/>
-          <p:nvPr/>
-        </p:nvSpPr>
-        <p:spPr>
-          <a:xfrm>
-            <a:off x="8046720" y="2011680"/>
-            <a:ext cx="3291840" cy="73152"/>
-          </a:xfrm>
-          <a:prstGeom prst="roundRect">
-            <a:avLst/>
-          </a:prstGeom>
-          <a:solidFill>
-            <a:srgbClr val="34A853"/>
-          </a:solidFill>
-          <a:ln>
-            <a:noFill/>
-          </a:ln>
-        </p:spPr>
-        <p:style>
-          <a:lnRef idx="1">
-            <a:schemeClr val="accent1"/>
-          </a:lnRef>
-          <a:fillRef idx="3">
-            <a:schemeClr val="accent1"/>
-          </a:fillRef>
-          <a:effectRef idx="2">
-            <a:schemeClr val="accent1"/>
-          </a:effectRef>
-          <a:fontRef idx="minor">
-            <a:schemeClr val="lt1"/>
-          </a:fontRef>
-        </p:style>
-        <p:txBody>
-          <a:bodyPr rtlCol="0" anchor="ctr"/>
-          <a:lstStyle/>
-          <a:p>
-            <a:pPr algn="ctr"/>
-          </a:p>
-        </p:txBody>
-      </p:sp>
-      <p:sp>
-        <p:nvSpPr>
-          <p:cNvPr id="13" name="TextBox 12"/>
-          <p:cNvSpPr txBox="1"/>
-          <p:nvPr/>
-        </p:nvSpPr>
-        <p:spPr>
-          <a:xfrm>
-            <a:off x="8366760" y="2286000"/>
-            <a:ext cx="2651760" cy="3886200"/>
-          </a:xfrm>
-          <a:prstGeom prst="rect">
-            <a:avLst/>
-          </a:prstGeom>
-          <a:noFill/>
-        </p:spPr>
-        <p:txBody>
-          <a:bodyPr wrap="square" lIns="0" tIns="0" rIns="0" bIns="0">
-            <a:spAutoFit/>
-          </a:bodyPr>
-          <a:lstStyle/>
-          <a:p>
-            <a:pPr>
-              <a:spcAft>
-                <a:spcPts val="1200"/>
-              </a:spcAft>
-              <a:defRPr sz="1900" b="1">
-                <a:solidFill>
-                  <a:srgbClr val="F0F6FC"/>
-                </a:solidFill>
-              </a:defRPr>
-            </a:pPr>
-            <a:r>
-              <a:t>Ready Today</a:t>
-            </a:r>
-          </a:p>
-          <a:p>
-            <a:pPr>
-              <a:spcAft>
-                <a:spcPts val="800"/>
-              </a:spcAft>
-            </a:pPr>
-            <a:r>
-              <a:rPr b="1" sz="1400">
-                <a:solidFill>
-                  <a:srgbClr val="34A853"/>
-                </a:solidFill>
-              </a:rPr>
-              <a:t>Fully Built: </a:t>
-            </a:r>
-            <a:r>
-              <a:rPr b="0" sz="1400">
-                <a:solidFill>
-                  <a:srgbClr val="F0F6FC"/>
-                </a:solidFill>
-              </a:rPr>
-              <a:t>Dual extensions, 15 Next.js routes, 4-pillar evaluation, and 19 verified API tests.</a:t>
-            </a:r>
-          </a:p>
-          <a:p>
-            <a:pPr>
-              <a:spcAft>
-                <a:spcPts val="800"/>
-              </a:spcAft>
-            </a:pPr>
-            <a:r>
-              <a:rPr b="1" sz="1400">
-                <a:solidFill>
-                  <a:srgbClr val="34A853"/>
-                </a:solidFill>
-              </a:rPr>
-              <a:t>Production Verified: </a:t>
-            </a:r>
-            <a:r>
-              <a:rPr b="0" sz="1400">
-                <a:solidFill>
-                  <a:srgbClr val="F0F6FC"/>
-                </a:solidFill>
-              </a:rPr>
-              <a:t>0 type errors, clean REST endpoints, and live syncing.</a:t>
-            </a:r>
-          </a:p>
-          <a:p>
-            <a:pPr>
-              <a:spcAft>
-                <a:spcPts val="800"/>
-              </a:spcAft>
-            </a:pPr>
-            <a:r>
-              <a:rPr b="1" sz="1400">
-                <a:solidFill>
-                  <a:srgbClr val="34A853"/>
-                </a:solidFill>
-              </a:rPr>
-              <a:t>Try It Now: </a:t>
-            </a:r>
-            <a:r>
-              <a:rPr b="0" sz="1400">
-                <a:solidFill>
-                  <a:srgbClr val="F0F6FC"/>
-                </a:solidFill>
-              </a:rPr>
-              <a:t>Open http://localhost:3000 to see AlgoPulse in action!</a:t>
+              <a:t>Chrome Extension  •  VS Code Extension  •  Web Dashboard (http://localhost:3000)</a:t>
             </a:r>
           </a:p>
         </p:txBody>
@@ -5246,7 +3635,7 @@
     <p:bg>
       <p:bgPr>
         <a:solidFill>
-          <a:srgbClr val="0D1117"/>
+          <a:srgbClr val="FFFFFF"/>
         </a:solidFill>
         <a:effectLst/>
       </p:bgPr>
@@ -5266,8 +3655,8 @@
         </p:nvSpPr>
         <p:spPr>
           <a:xfrm>
-            <a:off x="731520" y="411480"/>
-            <a:ext cx="4114800" cy="365760"/>
+            <a:off x="731520" y="365760"/>
+            <a:ext cx="7315200" cy="320040"/>
           </a:xfrm>
           <a:prstGeom prst="rect">
             <a:avLst/>
@@ -5281,14 +3670,14 @@
           <a:lstStyle/>
           <a:p>
             <a:pPr>
-              <a:defRPr sz="1100" b="1">
-                <a:solidFill>
-                  <a:srgbClr val="4285F4"/>
+              <a:defRPr sz="1300" b="1">
+                <a:solidFill>
+                  <a:srgbClr val="DC2626"/>
                 </a:solidFill>
               </a:defRPr>
             </a:pPr>
             <a:r>
-              <a:t>THE ORIGIN STORY</a:t>
+              <a:t>SLIDE 2 • PROBLEM STATEMENT</a:t>
             </a:r>
           </a:p>
         </p:txBody>
@@ -5301,8 +3690,8 @@
         </p:nvSpPr>
         <p:spPr>
           <a:xfrm>
-            <a:off x="731520" y="777240"/>
-            <a:ext cx="10698480" cy="731520"/>
+            <a:off x="731520" y="713232"/>
+            <a:ext cx="10698480" cy="640080"/>
           </a:xfrm>
           <a:prstGeom prst="rect">
             <a:avLst/>
@@ -5316,14 +3705,14 @@
           <a:lstStyle/>
           <a:p>
             <a:pPr>
-              <a:defRPr sz="2800" b="1">
-                <a:solidFill>
-                  <a:srgbClr val="F0F6FC"/>
+              <a:defRPr sz="3200" b="1">
+                <a:solidFill>
+                  <a:srgbClr val="0F172A"/>
                 </a:solidFill>
               </a:defRPr>
             </a:pPr>
             <a:r>
-              <a:t>How We Got This Idea: The 'Accepted' Trap</a:t>
+              <a:t>The Problem Currently &amp; How It Affects Us</a:t>
             </a:r>
           </a:p>
         </p:txBody>
@@ -5336,7 +3725,7 @@
         </p:nvSpPr>
         <p:spPr>
           <a:xfrm>
-            <a:off x="731520" y="1508760"/>
+            <a:off x="731520" y="1353312"/>
             <a:ext cx="10698480" cy="411480"/>
           </a:xfrm>
           <a:prstGeom prst="rect">
@@ -5351,39 +3740,37 @@
           <a:lstStyle/>
           <a:p>
             <a:pPr>
-              <a:defRPr sz="1400">
-                <a:solidFill>
-                  <a:srgbClr val="8B949E"/>
+              <a:defRPr sz="1600">
+                <a:solidFill>
+                  <a:srgbClr val="475569"/>
                 </a:solidFill>
               </a:defRPr>
             </a:pPr>
             <a:r>
-              <a:t>Every developer knows the relief of seeing green text on LeetCode. But is green code really good code?</a:t>
-            </a:r>
-          </a:p>
-        </p:txBody>
-      </p:sp>
-      <p:sp>
-        <p:nvSpPr>
-          <p:cNvPr id="5" name="Rounded Rectangle 4"/>
+              <a:t>Three major problems every student faces while practicing coding problems today.</a:t>
+            </a:r>
+          </a:p>
+        </p:txBody>
+      </p:sp>
+      <p:sp>
+        <p:nvSpPr>
+          <p:cNvPr id="5" name="Rectangle 4"/>
           <p:cNvSpPr/>
           <p:nvPr/>
         </p:nvSpPr>
         <p:spPr>
           <a:xfrm>
-            <a:off x="731520" y="2011680"/>
-            <a:ext cx="3291840" cy="4297680"/>
-          </a:xfrm>
-          <a:prstGeom prst="roundRect">
+            <a:off x="731520" y="1847088"/>
+            <a:ext cx="10725912" cy="18288"/>
+          </a:xfrm>
+          <a:prstGeom prst="rect">
             <a:avLst/>
           </a:prstGeom>
           <a:solidFill>
-            <a:srgbClr val="161B22"/>
+            <a:srgbClr val="CBD5E1"/>
           </a:solidFill>
-          <a:ln w="15240">
-            <a:solidFill>
-              <a:srgbClr val="30363D"/>
-            </a:solidFill>
+          <a:ln>
+            <a:noFill/>
           </a:ln>
         </p:spPr>
         <p:style>
@@ -5416,17 +3803,21 @@
         </p:nvSpPr>
         <p:spPr>
           <a:xfrm>
-            <a:off x="731520" y="2011680"/>
-            <a:ext cx="3291840" cy="73152"/>
+            <a:off x="731520" y="2057400"/>
+            <a:ext cx="3337560" cy="4297680"/>
           </a:xfrm>
           <a:prstGeom prst="roundRect">
-            <a:avLst/>
+            <a:avLst>
+              <a:gd name="adj" fmla="val 3000"/>
+            </a:avLst>
           </a:prstGeom>
           <a:solidFill>
-            <a:srgbClr val="EA4335"/>
+            <a:srgbClr val="F8FAFC"/>
           </a:solidFill>
-          <a:ln>
-            <a:noFill/>
+          <a:ln w="15240">
+            <a:solidFill>
+              <a:srgbClr val="CBD5E1"/>
+            </a:solidFill>
           </a:ln>
         </p:spPr>
         <p:style>
@@ -5453,132 +3844,23 @@
       </p:sp>
       <p:sp>
         <p:nvSpPr>
-          <p:cNvPr id="7" name="TextBox 6"/>
-          <p:cNvSpPr txBox="1"/>
-          <p:nvPr/>
-        </p:nvSpPr>
-        <p:spPr>
-          <a:xfrm>
-            <a:off x="1051560" y="2286000"/>
-            <a:ext cx="2651760" cy="3886200"/>
+          <p:cNvPr id="7" name="Rectangle 6"/>
+          <p:cNvSpPr/>
+          <p:nvPr/>
+        </p:nvSpPr>
+        <p:spPr>
+          <a:xfrm>
+            <a:off x="731520" y="2057400"/>
+            <a:ext cx="3337560" cy="73152"/>
           </a:xfrm>
           <a:prstGeom prst="rect">
             <a:avLst/>
           </a:prstGeom>
-          <a:noFill/>
-        </p:spPr>
-        <p:txBody>
-          <a:bodyPr wrap="square" lIns="0" tIns="0" rIns="0" bIns="0">
-            <a:spAutoFit/>
-          </a:bodyPr>
-          <a:lstStyle/>
-          <a:p>
-            <a:pPr>
-              <a:spcAft>
-                <a:spcPts val="1200"/>
-              </a:spcAft>
-              <a:defRPr sz="1900" b="1">
-                <a:solidFill>
-                  <a:srgbClr val="F0F6FC"/>
-                </a:solidFill>
-              </a:defRPr>
-            </a:pPr>
-            <a:r>
-              <a:t>The False Sense of Security</a:t>
-            </a:r>
-          </a:p>
-          <a:p>
-            <a:pPr>
-              <a:spcAft>
-                <a:spcPts val="800"/>
-              </a:spcAft>
-            </a:pPr>
-            <a:r>
-              <a:rPr b="1" sz="1400">
-                <a:solidFill>
-                  <a:srgbClr val="EA4335"/>
-                </a:solidFill>
-              </a:rPr>
-              <a:t>The Trap: </a:t>
-            </a:r>
-            <a:r>
-              <a:rPr b="0" sz="1400">
-                <a:solidFill>
-                  <a:srgbClr val="F0F6FC"/>
-                </a:solidFill>
-              </a:rPr>
-              <a:t>You write an O(N²) brute-force solution. The judge accepts it because the test inputs happen to be small.</a:t>
-            </a:r>
-          </a:p>
-          <a:p>
-            <a:pPr>
-              <a:spcAft>
-                <a:spcPts val="800"/>
-              </a:spcAft>
-            </a:pPr>
-            <a:r>
-              <a:rPr b="1" sz="1400">
-                <a:solidFill>
-                  <a:srgbClr val="EA4335"/>
-                </a:solidFill>
-              </a:rPr>
-              <a:t>The Illusion: </a:t>
-            </a:r>
-            <a:r>
-              <a:rPr b="0" sz="1400">
-                <a:solidFill>
-                  <a:srgbClr val="F0F6FC"/>
-                </a:solidFill>
-              </a:rPr>
-              <a:t>You feel ready and confident because the platform gave you an 'Accepted' verdict.</a:t>
-            </a:r>
-          </a:p>
-          <a:p>
-            <a:pPr>
-              <a:spcAft>
-                <a:spcPts val="800"/>
-              </a:spcAft>
-            </a:pPr>
-            <a:r>
-              <a:rPr b="1" sz="1400">
-                <a:solidFill>
-                  <a:srgbClr val="EA4335"/>
-                </a:solidFill>
-              </a:rPr>
-              <a:t>The Reality: </a:t>
-            </a:r>
-            <a:r>
-              <a:rPr b="0" sz="1400">
-                <a:solidFill>
-                  <a:srgbClr val="F0F6FC"/>
-                </a:solidFill>
-              </a:rPr>
-              <a:t>In a Tier-1 tech interview, passing tests is only step one. An O(N²) solution when O(N) exists is an instant rejection.</a:t>
-            </a:r>
-          </a:p>
-        </p:txBody>
-      </p:sp>
-      <p:sp>
-        <p:nvSpPr>
-          <p:cNvPr id="8" name="Rounded Rectangle 7"/>
-          <p:cNvSpPr/>
-          <p:nvPr/>
-        </p:nvSpPr>
-        <p:spPr>
-          <a:xfrm>
-            <a:off x="4389120" y="2011680"/>
-            <a:ext cx="3291840" cy="4297680"/>
-          </a:xfrm>
-          <a:prstGeom prst="roundRect">
-            <a:avLst/>
-          </a:prstGeom>
           <a:solidFill>
-            <a:srgbClr val="161B22"/>
+            <a:srgbClr val="DC2626"/>
           </a:solidFill>
-          <a:ln w="15240">
-            <a:solidFill>
-              <a:srgbClr val="30363D"/>
-            </a:solidFill>
+          <a:ln>
+            <a:noFill/>
           </a:ln>
         </p:spPr>
         <p:style>
@@ -5605,23 +3887,134 @@
       </p:sp>
       <p:sp>
         <p:nvSpPr>
+          <p:cNvPr id="8" name="TextBox 7"/>
+          <p:cNvSpPr txBox="1"/>
+          <p:nvPr/>
+        </p:nvSpPr>
+        <p:spPr>
+          <a:xfrm>
+            <a:off x="1024128" y="2313432"/>
+            <a:ext cx="2752344" cy="3886200"/>
+          </a:xfrm>
+          <a:prstGeom prst="rect">
+            <a:avLst/>
+          </a:prstGeom>
+          <a:noFill/>
+        </p:spPr>
+        <p:txBody>
+          <a:bodyPr wrap="square" lIns="0" tIns="0" rIns="0" bIns="0">
+            <a:spAutoFit/>
+          </a:bodyPr>
+          <a:lstStyle/>
+          <a:p>
+            <a:pPr>
+              <a:spcAft>
+                <a:spcPts val="1400"/>
+              </a:spcAft>
+              <a:defRPr sz="2100" b="1">
+                <a:solidFill>
+                  <a:srgbClr val="0F172A"/>
+                </a:solidFill>
+              </a:defRPr>
+            </a:pPr>
+            <a:r>
+              <a:t>1. The 'Accepted' Trap</a:t>
+            </a:r>
+          </a:p>
+          <a:p>
+            <a:pPr>
+              <a:spcAft>
+                <a:spcPts val="1100"/>
+              </a:spcAft>
+            </a:pPr>
+            <a:r>
+              <a:rPr b="1" sz="1550">
+                <a:solidFill>
+                  <a:srgbClr val="DC2626"/>
+                </a:solidFill>
+              </a:rPr>
+              <a:t>• What Happens: </a:t>
+            </a:r>
+            <a:r>
+              <a:rPr b="0" sz="1550">
+                <a:solidFill>
+                  <a:srgbClr val="1E293B"/>
+                </a:solidFill>
+              </a:rPr>
+              <a:t>Platforms like LeetCode only say 'Accepted' or 'Wrong Answer'.</a:t>
+            </a:r>
+          </a:p>
+          <a:p>
+            <a:pPr>
+              <a:spcAft>
+                <a:spcPts val="1100"/>
+              </a:spcAft>
+            </a:pPr>
+            <a:r>
+              <a:rPr b="1" sz="1550">
+                <a:solidFill>
+                  <a:srgbClr val="DC2626"/>
+                </a:solidFill>
+              </a:rPr>
+              <a:t>• The Hidden Flaw: </a:t>
+            </a:r>
+            <a:r>
+              <a:rPr b="0" sz="1550">
+                <a:solidFill>
+                  <a:srgbClr val="1E293B"/>
+                </a:solidFill>
+              </a:rPr>
+              <a:t>Slow brute-force code (O(N²)) still passes when test cases are small.</a:t>
+            </a:r>
+          </a:p>
+          <a:p>
+            <a:pPr>
+              <a:spcAft>
+                <a:spcPts val="1100"/>
+              </a:spcAft>
+            </a:pPr>
+            <a:r>
+              <a:rPr b="1" sz="1550">
+                <a:solidFill>
+                  <a:srgbClr val="DC2626"/>
+                </a:solidFill>
+              </a:rPr>
+              <a:t>• How It Hurts Us: </a:t>
+            </a:r>
+            <a:r>
+              <a:rPr b="0" sz="1550">
+                <a:solidFill>
+                  <a:srgbClr val="1E293B"/>
+                </a:solidFill>
+              </a:rPr>
+              <a:t>We think we mastered the problem, but get rejected in real interviews for slow code.</a:t>
+            </a:r>
+          </a:p>
+        </p:txBody>
+      </p:sp>
+      <p:sp>
+        <p:nvSpPr>
           <p:cNvPr id="9" name="Rounded Rectangle 8"/>
           <p:cNvSpPr/>
           <p:nvPr/>
         </p:nvSpPr>
         <p:spPr>
           <a:xfrm>
-            <a:off x="4389120" y="2011680"/>
-            <a:ext cx="3291840" cy="73152"/>
+            <a:off x="4425696" y="2057400"/>
+            <a:ext cx="3337560" cy="4297680"/>
           </a:xfrm>
           <a:prstGeom prst="roundRect">
-            <a:avLst/>
+            <a:avLst>
+              <a:gd name="adj" fmla="val 3000"/>
+            </a:avLst>
           </a:prstGeom>
           <a:solidFill>
-            <a:srgbClr val="FBBC05"/>
+            <a:srgbClr val="F8FAFC"/>
           </a:solidFill>
-          <a:ln>
-            <a:noFill/>
+          <a:ln w="15240">
+            <a:solidFill>
+              <a:srgbClr val="CBD5E1"/>
+            </a:solidFill>
           </a:ln>
         </p:spPr>
         <p:style>
@@ -5648,132 +4041,23 @@
       </p:sp>
       <p:sp>
         <p:nvSpPr>
-          <p:cNvPr id="10" name="TextBox 9"/>
-          <p:cNvSpPr txBox="1"/>
-          <p:nvPr/>
-        </p:nvSpPr>
-        <p:spPr>
-          <a:xfrm>
-            <a:off x="4709160" y="2286000"/>
-            <a:ext cx="2651760" cy="3886200"/>
+          <p:cNvPr id="10" name="Rectangle 9"/>
+          <p:cNvSpPr/>
+          <p:nvPr/>
+        </p:nvSpPr>
+        <p:spPr>
+          <a:xfrm>
+            <a:off x="4425696" y="2057400"/>
+            <a:ext cx="3337560" cy="73152"/>
           </a:xfrm>
           <a:prstGeom prst="rect">
             <a:avLst/>
           </a:prstGeom>
-          <a:noFill/>
-        </p:spPr>
-        <p:txBody>
-          <a:bodyPr wrap="square" lIns="0" tIns="0" rIns="0" bIns="0">
-            <a:spAutoFit/>
-          </a:bodyPr>
-          <a:lstStyle/>
-          <a:p>
-            <a:pPr>
-              <a:spcAft>
-                <a:spcPts val="1200"/>
-              </a:spcAft>
-              <a:defRPr sz="1900" b="1">
-                <a:solidFill>
-                  <a:srgbClr val="F0F6FC"/>
-                </a:solidFill>
-              </a:defRPr>
-            </a:pPr>
-            <a:r>
-              <a:t>The Context-Switch Friction</a:t>
-            </a:r>
-          </a:p>
-          <a:p>
-            <a:pPr>
-              <a:spcAft>
-                <a:spcPts val="800"/>
-              </a:spcAft>
-            </a:pPr>
-            <a:r>
-              <a:rPr b="1" sz="1400">
-                <a:solidFill>
-                  <a:srgbClr val="FBBC05"/>
-                </a:solidFill>
-              </a:rPr>
-              <a:t>The Split: </a:t>
-            </a:r>
-            <a:r>
-              <a:rPr b="0" sz="1400">
-                <a:solidFill>
-                  <a:srgbClr val="F0F6FC"/>
-                </a:solidFill>
-              </a:rPr>
-              <a:t>We practice algorithms in the web browser, but we build real software in VS Code.</a:t>
-            </a:r>
-          </a:p>
-          <a:p>
-            <a:pPr>
-              <a:spcAft>
-                <a:spcPts val="800"/>
-              </a:spcAft>
-            </a:pPr>
-            <a:r>
-              <a:rPr b="1" sz="1400">
-                <a:solidFill>
-                  <a:srgbClr val="FBBC05"/>
-                </a:solidFill>
-              </a:rPr>
-              <a:t>The Disconnect: </a:t>
-            </a:r>
-            <a:r>
-              <a:rPr b="0" sz="1400">
-                <a:solidFill>
-                  <a:srgbClr val="F0F6FC"/>
-                </a:solidFill>
-              </a:rPr>
-              <a:t>No existing tool connects your daily local engineering with your competitive programming streak.</a:t>
-            </a:r>
-          </a:p>
-          <a:p>
-            <a:pPr>
-              <a:spcAft>
-                <a:spcPts val="800"/>
-              </a:spcAft>
-            </a:pPr>
-            <a:r>
-              <a:rPr b="1" sz="1400">
-                <a:solidFill>
-                  <a:srgbClr val="FBBC05"/>
-                </a:solidFill>
-              </a:rPr>
-              <a:t>The Pain: </a:t>
-            </a:r>
-            <a:r>
-              <a:rPr b="0" sz="1400">
-                <a:solidFill>
-                  <a:srgbClr val="F0F6FC"/>
-                </a:solidFill>
-              </a:rPr>
-              <a:t>Your growth data is scattered across three platforms and lost in private scratchpad files.</a:t>
-            </a:r>
-          </a:p>
-        </p:txBody>
-      </p:sp>
-      <p:sp>
-        <p:nvSpPr>
-          <p:cNvPr id="11" name="Rounded Rectangle 10"/>
-          <p:cNvSpPr/>
-          <p:nvPr/>
-        </p:nvSpPr>
-        <p:spPr>
-          <a:xfrm>
-            <a:off x="8046720" y="2011680"/>
-            <a:ext cx="3291840" cy="4297680"/>
-          </a:xfrm>
-          <a:prstGeom prst="roundRect">
-            <a:avLst/>
-          </a:prstGeom>
           <a:solidFill>
-            <a:srgbClr val="161B22"/>
+            <a:srgbClr val="D97706"/>
           </a:solidFill>
-          <a:ln w="15240">
-            <a:solidFill>
-              <a:srgbClr val="30363D"/>
-            </a:solidFill>
+          <a:ln>
+            <a:noFill/>
           </a:ln>
         </p:spPr>
         <p:style>
@@ -5800,23 +4084,134 @@
       </p:sp>
       <p:sp>
         <p:nvSpPr>
+          <p:cNvPr id="11" name="TextBox 10"/>
+          <p:cNvSpPr txBox="1"/>
+          <p:nvPr/>
+        </p:nvSpPr>
+        <p:spPr>
+          <a:xfrm>
+            <a:off x="4718304" y="2313432"/>
+            <a:ext cx="2752344" cy="3886200"/>
+          </a:xfrm>
+          <a:prstGeom prst="rect">
+            <a:avLst/>
+          </a:prstGeom>
+          <a:noFill/>
+        </p:spPr>
+        <p:txBody>
+          <a:bodyPr wrap="square" lIns="0" tIns="0" rIns="0" bIns="0">
+            <a:spAutoFit/>
+          </a:bodyPr>
+          <a:lstStyle/>
+          <a:p>
+            <a:pPr>
+              <a:spcAft>
+                <a:spcPts val="1400"/>
+              </a:spcAft>
+              <a:defRPr sz="2100" b="1">
+                <a:solidFill>
+                  <a:srgbClr val="0F172A"/>
+                </a:solidFill>
+              </a:defRPr>
+            </a:pPr>
+            <a:r>
+              <a:t>2. ChatGPT Spoils Answers</a:t>
+            </a:r>
+          </a:p>
+          <a:p>
+            <a:pPr>
+              <a:spcAft>
+                <a:spcPts val="1100"/>
+              </a:spcAft>
+            </a:pPr>
+            <a:r>
+              <a:rPr b="1" sz="1550">
+                <a:solidFill>
+                  <a:srgbClr val="D97706"/>
+                </a:solidFill>
+              </a:rPr>
+              <a:t>• What Happens: </a:t>
+            </a:r>
+            <a:r>
+              <a:rPr b="0" sz="1550">
+                <a:solidFill>
+                  <a:srgbClr val="1E293B"/>
+                </a:solidFill>
+              </a:rPr>
+              <a:t>When stuck, students copy-paste their code into ChatGPT.</a:t>
+            </a:r>
+          </a:p>
+          <a:p>
+            <a:pPr>
+              <a:spcAft>
+                <a:spcPts val="1100"/>
+              </a:spcAft>
+            </a:pPr>
+            <a:r>
+              <a:rPr b="1" sz="1550">
+                <a:solidFill>
+                  <a:srgbClr val="D97706"/>
+                </a:solidFill>
+              </a:rPr>
+              <a:t>• The Hidden Flaw: </a:t>
+            </a:r>
+            <a:r>
+              <a:rPr b="0" sz="1550">
+                <a:solidFill>
+                  <a:srgbClr val="1E293B"/>
+                </a:solidFill>
+              </a:rPr>
+              <a:t>ChatGPT immediately gives the full working code instead of teaching.</a:t>
+            </a:r>
+          </a:p>
+          <a:p>
+            <a:pPr>
+              <a:spcAft>
+                <a:spcPts val="1100"/>
+              </a:spcAft>
+            </a:pPr>
+            <a:r>
+              <a:rPr b="1" sz="1550">
+                <a:solidFill>
+                  <a:srgbClr val="D97706"/>
+                </a:solidFill>
+              </a:rPr>
+              <a:t>• How It Hurts Us: </a:t>
+            </a:r>
+            <a:r>
+              <a:rPr b="0" sz="1550">
+                <a:solidFill>
+                  <a:srgbClr val="1E293B"/>
+                </a:solidFill>
+              </a:rPr>
+              <a:t>Spoiling the answer stops our brain from learning, and switching tabs breaks focus.</a:t>
+            </a:r>
+          </a:p>
+        </p:txBody>
+      </p:sp>
+      <p:sp>
+        <p:nvSpPr>
           <p:cNvPr id="12" name="Rounded Rectangle 11"/>
           <p:cNvSpPr/>
           <p:nvPr/>
         </p:nvSpPr>
         <p:spPr>
           <a:xfrm>
-            <a:off x="8046720" y="2011680"/>
-            <a:ext cx="3291840" cy="73152"/>
+            <a:off x="8119872" y="2057400"/>
+            <a:ext cx="3337560" cy="4297680"/>
           </a:xfrm>
           <a:prstGeom prst="roundRect">
-            <a:avLst/>
+            <a:avLst>
+              <a:gd name="adj" fmla="val 3000"/>
+            </a:avLst>
           </a:prstGeom>
           <a:solidFill>
-            <a:srgbClr val="4285F4"/>
+            <a:srgbClr val="F8FAFC"/>
           </a:solidFill>
-          <a:ln>
-            <a:noFill/>
+          <a:ln w="15240">
+            <a:solidFill>
+              <a:srgbClr val="CBD5E1"/>
+            </a:solidFill>
           </a:ln>
         </p:spPr>
         <p:style>
@@ -5843,14 +4238,57 @@
       </p:sp>
       <p:sp>
         <p:nvSpPr>
-          <p:cNvPr id="13" name="TextBox 12"/>
+          <p:cNvPr id="13" name="Rectangle 12"/>
+          <p:cNvSpPr/>
+          <p:nvPr/>
+        </p:nvSpPr>
+        <p:spPr>
+          <a:xfrm>
+            <a:off x="8119872" y="2057400"/>
+            <a:ext cx="3337560" cy="73152"/>
+          </a:xfrm>
+          <a:prstGeom prst="rect">
+            <a:avLst/>
+          </a:prstGeom>
+          <a:solidFill>
+            <a:srgbClr val="2563EB"/>
+          </a:solidFill>
+          <a:ln>
+            <a:noFill/>
+          </a:ln>
+        </p:spPr>
+        <p:style>
+          <a:lnRef idx="1">
+            <a:schemeClr val="accent1"/>
+          </a:lnRef>
+          <a:fillRef idx="3">
+            <a:schemeClr val="accent1"/>
+          </a:fillRef>
+          <a:effectRef idx="2">
+            <a:schemeClr val="accent1"/>
+          </a:effectRef>
+          <a:fontRef idx="minor">
+            <a:schemeClr val="lt1"/>
+          </a:fontRef>
+        </p:style>
+        <p:txBody>
+          <a:bodyPr rtlCol="0" anchor="ctr"/>
+          <a:lstStyle/>
+          <a:p>
+            <a:pPr algn="ctr"/>
+          </a:p>
+        </p:txBody>
+      </p:sp>
+      <p:sp>
+        <p:nvSpPr>
+          <p:cNvPr id="14" name="TextBox 13"/>
           <p:cNvSpPr txBox="1"/>
           <p:nvPr/>
         </p:nvSpPr>
         <p:spPr>
           <a:xfrm>
-            <a:off x="8366760" y="2286000"/>
-            <a:ext cx="2651760" cy="3886200"/>
+            <a:off x="8412480" y="2313432"/>
+            <a:ext cx="2752344" cy="3886200"/>
           </a:xfrm>
           <a:prstGeom prst="rect">
             <a:avLst/>
@@ -5865,85 +4303,85 @@
           <a:p>
             <a:pPr>
               <a:spcAft>
-                <a:spcPts val="1200"/>
-              </a:spcAft>
-              <a:defRPr sz="1900" b="1">
-                <a:solidFill>
-                  <a:srgbClr val="F0F6FC"/>
+                <a:spcPts val="1400"/>
+              </a:spcAft>
+              <a:defRPr sz="2100" b="1">
+                <a:solidFill>
+                  <a:srgbClr val="0F172A"/>
                 </a:solidFill>
               </a:defRPr>
             </a:pPr>
             <a:r>
-              <a:t>The Forgetting Curve</a:t>
-            </a:r>
-          </a:p>
-          <a:p>
-            <a:pPr>
-              <a:spcAft>
-                <a:spcPts val="800"/>
-              </a:spcAft>
-            </a:pPr>
-            <a:r>
-              <a:rPr b="1" sz="1400">
-                <a:solidFill>
-                  <a:srgbClr val="4285F4"/>
-                </a:solidFill>
-              </a:rPr>
-              <a:t>The Reality: </a:t>
-            </a:r>
-            <a:r>
-              <a:rPr b="0" sz="1400">
-                <a:solidFill>
-                  <a:srgbClr val="F0F6FC"/>
-                </a:solidFill>
-              </a:rPr>
-              <a:t>You solve 100 problems this month. Two months later, you can barely solve Two Sum.</a:t>
-            </a:r>
-          </a:p>
-          <a:p>
-            <a:pPr>
-              <a:spcAft>
-                <a:spcPts val="800"/>
-              </a:spcAft>
-            </a:pPr>
-            <a:r>
-              <a:rPr b="1" sz="1400">
-                <a:solidFill>
-                  <a:srgbClr val="4285F4"/>
-                </a:solidFill>
-              </a:rPr>
-              <a:t>The Cause: </a:t>
-            </a:r>
-            <a:r>
-              <a:rPr b="0" sz="1400">
-                <a:solidFill>
-                  <a:srgbClr val="F0F6FC"/>
-                </a:solidFill>
-              </a:rPr>
-              <a:t>No platform models Ebbinghaus memory decay or reminds you before mental extinction occurs.</a:t>
-            </a:r>
-          </a:p>
-          <a:p>
-            <a:pPr>
-              <a:spcAft>
-                <a:spcPts val="800"/>
-              </a:spcAft>
-            </a:pPr>
-            <a:r>
-              <a:rPr b="1" sz="1400">
-                <a:solidFill>
-                  <a:srgbClr val="4285F4"/>
-                </a:solidFill>
-              </a:rPr>
-              <a:t>The Goal: </a:t>
-            </a:r>
-            <a:r>
-              <a:rPr b="0" sz="1400">
-                <a:solidFill>
-                  <a:srgbClr val="F0F6FC"/>
-                </a:solidFill>
-              </a:rPr>
-              <a:t>We needed a personal AI senior engineer living in our workflow that coaches us continuously.</a:t>
+              <a:t>3. We Forget What We Solve</a:t>
+            </a:r>
+          </a:p>
+          <a:p>
+            <a:pPr>
+              <a:spcAft>
+                <a:spcPts val="1100"/>
+              </a:spcAft>
+            </a:pPr>
+            <a:r>
+              <a:rPr b="1" sz="1550">
+                <a:solidFill>
+                  <a:srgbClr val="2563EB"/>
+                </a:solidFill>
+              </a:rPr>
+              <a:t>• What Happens: </a:t>
+            </a:r>
+            <a:r>
+              <a:rPr b="0" sz="1550">
+                <a:solidFill>
+                  <a:srgbClr val="1E293B"/>
+                </a:solidFill>
+              </a:rPr>
+              <a:t>We solve 100 problems this month and move on.</a:t>
+            </a:r>
+          </a:p>
+          <a:p>
+            <a:pPr>
+              <a:spcAft>
+                <a:spcPts val="1100"/>
+              </a:spcAft>
+            </a:pPr>
+            <a:r>
+              <a:rPr b="1" sz="1550">
+                <a:solidFill>
+                  <a:srgbClr val="2563EB"/>
+                </a:solidFill>
+              </a:rPr>
+              <a:t>• The Hidden Flaw: </a:t>
+            </a:r>
+            <a:r>
+              <a:rPr b="0" sz="1550">
+                <a:solidFill>
+                  <a:srgbClr val="1E293B"/>
+                </a:solidFill>
+              </a:rPr>
+              <a:t>No coding site tracks memory loss or tells us when to revise.</a:t>
+            </a:r>
+          </a:p>
+          <a:p>
+            <a:pPr>
+              <a:spcAft>
+                <a:spcPts val="1100"/>
+              </a:spcAft>
+            </a:pPr>
+            <a:r>
+              <a:rPr b="1" sz="1550">
+                <a:solidFill>
+                  <a:srgbClr val="2563EB"/>
+                </a:solidFill>
+              </a:rPr>
+              <a:t>• How It Hurts Us: </a:t>
+            </a:r>
+            <a:r>
+              <a:rPr b="0" sz="1550">
+                <a:solidFill>
+                  <a:srgbClr val="1E293B"/>
+                </a:solidFill>
+              </a:rPr>
+              <a:t>Two months later in the interview room, we forget the exact pattern we practiced.</a:t>
             </a:r>
           </a:p>
         </p:txBody>
@@ -5962,7 +4400,7 @@
     <p:bg>
       <p:bgPr>
         <a:solidFill>
-          <a:srgbClr val="0D1117"/>
+          <a:srgbClr val="FFFFFF"/>
         </a:solidFill>
         <a:effectLst/>
       </p:bgPr>
@@ -5982,8 +4420,8 @@
         </p:nvSpPr>
         <p:spPr>
           <a:xfrm>
-            <a:off x="731520" y="411480"/>
-            <a:ext cx="4114800" cy="365760"/>
+            <a:off x="731520" y="365760"/>
+            <a:ext cx="7315200" cy="320040"/>
           </a:xfrm>
           <a:prstGeom prst="rect">
             <a:avLst/>
@@ -5997,14 +4435,14 @@
           <a:lstStyle/>
           <a:p>
             <a:pPr>
-              <a:defRPr sz="1100" b="1">
-                <a:solidFill>
-                  <a:srgbClr val="4285F4"/>
+              <a:defRPr sz="1300" b="1">
+                <a:solidFill>
+                  <a:srgbClr val="2563EB"/>
                 </a:solidFill>
               </a:defRPr>
             </a:pPr>
             <a:r>
-              <a:t>MARKET GAP ANALYSIS</a:t>
+              <a:t>SLIDE 3 • LITERATURE REVIEW (2024–2026)</a:t>
             </a:r>
           </a:p>
         </p:txBody>
@@ -6017,8 +4455,8 @@
         </p:nvSpPr>
         <p:spPr>
           <a:xfrm>
-            <a:off x="731520" y="777240"/>
-            <a:ext cx="10698480" cy="731520"/>
+            <a:off x="731520" y="713232"/>
+            <a:ext cx="10698480" cy="640080"/>
           </a:xfrm>
           <a:prstGeom prst="rect">
             <a:avLst/>
@@ -6032,14 +4470,14 @@
           <a:lstStyle/>
           <a:p>
             <a:pPr>
-              <a:defRPr sz="2800" b="1">
-                <a:solidFill>
-                  <a:srgbClr val="F0F6FC"/>
+              <a:defRPr sz="3200" b="1">
+                <a:solidFill>
+                  <a:srgbClr val="0F172A"/>
                 </a:solidFill>
               </a:defRPr>
             </a:pPr>
             <a:r>
-              <a:t>Why This Approach? (And Why Not The Others?)</a:t>
+              <a:t>The Research We Have Done to Solve This Problem</a:t>
             </a:r>
           </a:p>
         </p:txBody>
@@ -6052,7 +4490,7 @@
         </p:nvSpPr>
         <p:spPr>
           <a:xfrm>
-            <a:off x="731520" y="1508760"/>
+            <a:off x="731520" y="1353312"/>
             <a:ext cx="10698480" cy="411480"/>
           </a:xfrm>
           <a:prstGeom prst="rect">
@@ -6067,39 +4505,37 @@
           <a:lstStyle/>
           <a:p>
             <a:pPr>
-              <a:defRPr sz="1400">
-                <a:solidFill>
-                  <a:srgbClr val="8B949E"/>
+              <a:defRPr sz="1600">
+                <a:solidFill>
+                  <a:srgbClr val="475569"/>
                 </a:solidFill>
               </a:defRPr>
             </a:pPr>
             <a:r>
-              <a:t>Existing alternatives either grade blindly, spoil the answer, or miss algorithmic semantics.</a:t>
-            </a:r>
-          </a:p>
-        </p:txBody>
-      </p:sp>
-      <p:sp>
-        <p:nvSpPr>
-          <p:cNvPr id="5" name="Rounded Rectangle 4"/>
+              <a:t>Verified 2024–2026 research papers that proved these gaps and guided our solution.</a:t>
+            </a:r>
+          </a:p>
+        </p:txBody>
+      </p:sp>
+      <p:sp>
+        <p:nvSpPr>
+          <p:cNvPr id="5" name="Rectangle 4"/>
           <p:cNvSpPr/>
           <p:nvPr/>
         </p:nvSpPr>
         <p:spPr>
           <a:xfrm>
-            <a:off x="731520" y="2011680"/>
-            <a:ext cx="3291840" cy="4297680"/>
-          </a:xfrm>
-          <a:prstGeom prst="roundRect">
+            <a:off x="731520" y="1847088"/>
+            <a:ext cx="10725912" cy="18288"/>
+          </a:xfrm>
+          <a:prstGeom prst="rect">
             <a:avLst/>
           </a:prstGeom>
           <a:solidFill>
-            <a:srgbClr val="161B22"/>
+            <a:srgbClr val="CBD5E1"/>
           </a:solidFill>
-          <a:ln w="15240">
-            <a:solidFill>
-              <a:srgbClr val="30363D"/>
-            </a:solidFill>
+          <a:ln>
+            <a:noFill/>
           </a:ln>
         </p:spPr>
         <p:style>
@@ -6132,17 +4568,21 @@
         </p:nvSpPr>
         <p:spPr>
           <a:xfrm>
-            <a:off x="731520" y="2011680"/>
-            <a:ext cx="3291840" cy="73152"/>
+            <a:off x="731520" y="2057400"/>
+            <a:ext cx="3337560" cy="4297680"/>
           </a:xfrm>
           <a:prstGeom prst="roundRect">
-            <a:avLst/>
+            <a:avLst>
+              <a:gd name="adj" fmla="val 3000"/>
+            </a:avLst>
           </a:prstGeom>
           <a:solidFill>
-            <a:srgbClr val="EA4335"/>
+            <a:srgbClr val="F8FAFC"/>
           </a:solidFill>
-          <a:ln>
-            <a:noFill/>
+          <a:ln w="15240">
+            <a:solidFill>
+              <a:srgbClr val="CBD5E1"/>
+            </a:solidFill>
           </a:ln>
         </p:spPr>
         <p:style>
@@ -6169,132 +4609,23 @@
       </p:sp>
       <p:sp>
         <p:nvSpPr>
-          <p:cNvPr id="7" name="TextBox 6"/>
-          <p:cNvSpPr txBox="1"/>
-          <p:nvPr/>
-        </p:nvSpPr>
-        <p:spPr>
-          <a:xfrm>
-            <a:off x="1051560" y="2286000"/>
-            <a:ext cx="2651760" cy="3886200"/>
+          <p:cNvPr id="7" name="Rectangle 6"/>
+          <p:cNvSpPr/>
+          <p:nvPr/>
+        </p:nvSpPr>
+        <p:spPr>
+          <a:xfrm>
+            <a:off x="731520" y="2057400"/>
+            <a:ext cx="3337560" cy="73152"/>
           </a:xfrm>
           <a:prstGeom prst="rect">
             <a:avLst/>
           </a:prstGeom>
-          <a:noFill/>
-        </p:spPr>
-        <p:txBody>
-          <a:bodyPr wrap="square" lIns="0" tIns="0" rIns="0" bIns="0">
-            <a:spAutoFit/>
-          </a:bodyPr>
-          <a:lstStyle/>
-          <a:p>
-            <a:pPr>
-              <a:spcAft>
-                <a:spcPts val="1200"/>
-              </a:spcAft>
-              <a:defRPr sz="1900" b="1">
-                <a:solidFill>
-                  <a:srgbClr val="F0F6FC"/>
-                </a:solidFill>
-              </a:defRPr>
-            </a:pPr>
-            <a:r>
-              <a:t>Traditional Judges (LeetCode/GFG)</a:t>
-            </a:r>
-          </a:p>
-          <a:p>
-            <a:pPr>
-              <a:spcAft>
-                <a:spcPts val="800"/>
-              </a:spcAft>
-            </a:pPr>
-            <a:r>
-              <a:rPr b="1" sz="1400">
-                <a:solidFill>
-                  <a:srgbClr val="EA4335"/>
-                </a:solidFill>
-              </a:rPr>
-              <a:t>Limitation 1: </a:t>
-            </a:r>
-            <a:r>
-              <a:rPr b="0" sz="1400">
-                <a:solidFill>
-                  <a:srgbClr val="F0F6FC"/>
-                </a:solidFill>
-              </a:rPr>
-              <a:t>Binary verdict only (Pass vs. Fail). Zero feedback on algorithmic style or invariants.</a:t>
-            </a:r>
-          </a:p>
-          <a:p>
-            <a:pPr>
-              <a:spcAft>
-                <a:spcPts val="800"/>
-              </a:spcAft>
-            </a:pPr>
-            <a:r>
-              <a:rPr b="1" sz="1400">
-                <a:solidFill>
-                  <a:srgbClr val="EA4335"/>
-                </a:solidFill>
-              </a:rPr>
-              <a:t>Limitation 2: </a:t>
-            </a:r>
-            <a:r>
-              <a:rPr b="0" sz="1400">
-                <a:solidFill>
-                  <a:srgbClr val="F0F6FC"/>
-                </a:solidFill>
-              </a:rPr>
-              <a:t>Server CPU noise causes 40ms vs. 80ms runtime swings for identical code.</a:t>
-            </a:r>
-          </a:p>
-          <a:p>
-            <a:pPr>
-              <a:spcAft>
-                <a:spcPts val="800"/>
-              </a:spcAft>
-            </a:pPr>
-            <a:r>
-              <a:rPr b="1" sz="1400">
-                <a:solidFill>
-                  <a:srgbClr val="EA4335"/>
-                </a:solidFill>
-              </a:rPr>
-              <a:t>Limitation 3: </a:t>
-            </a:r>
-            <a:r>
-              <a:rPr b="0" sz="1400">
-                <a:solidFill>
-                  <a:srgbClr val="F0F6FC"/>
-                </a:solidFill>
-              </a:rPr>
-              <a:t>Does not tell you if you used the right mental model or if your memory was wasteful.</a:t>
-            </a:r>
-          </a:p>
-        </p:txBody>
-      </p:sp>
-      <p:sp>
-        <p:nvSpPr>
-          <p:cNvPr id="8" name="Rounded Rectangle 7"/>
-          <p:cNvSpPr/>
-          <p:nvPr/>
-        </p:nvSpPr>
-        <p:spPr>
-          <a:xfrm>
-            <a:off x="4389120" y="2011680"/>
-            <a:ext cx="3291840" cy="4297680"/>
-          </a:xfrm>
-          <a:prstGeom prst="roundRect">
-            <a:avLst/>
-          </a:prstGeom>
           <a:solidFill>
-            <a:srgbClr val="161B22"/>
+            <a:srgbClr val="DC2626"/>
           </a:solidFill>
-          <a:ln w="15240">
-            <a:solidFill>
-              <a:srgbClr val="30363D"/>
-            </a:solidFill>
+          <a:ln>
+            <a:noFill/>
           </a:ln>
         </p:spPr>
         <p:style>
@@ -6321,23 +4652,134 @@
       </p:sp>
       <p:sp>
         <p:nvSpPr>
+          <p:cNvPr id="8" name="TextBox 7"/>
+          <p:cNvSpPr txBox="1"/>
+          <p:nvPr/>
+        </p:nvSpPr>
+        <p:spPr>
+          <a:xfrm>
+            <a:off x="1024128" y="2313432"/>
+            <a:ext cx="2752344" cy="3886200"/>
+          </a:xfrm>
+          <a:prstGeom prst="rect">
+            <a:avLst/>
+          </a:prstGeom>
+          <a:noFill/>
+        </p:spPr>
+        <p:txBody>
+          <a:bodyPr wrap="square" lIns="0" tIns="0" rIns="0" bIns="0">
+            <a:spAutoFit/>
+          </a:bodyPr>
+          <a:lstStyle/>
+          <a:p>
+            <a:pPr>
+              <a:spcAft>
+                <a:spcPts val="1400"/>
+              </a:spcAft>
+              <a:defRPr sz="2100" b="1">
+                <a:solidFill>
+                  <a:srgbClr val="0F172A"/>
+                </a:solidFill>
+              </a:defRPr>
+            </a:pPr>
+            <a:r>
+              <a:t>1. Code Efficiency Gaps</a:t>
+            </a:r>
+          </a:p>
+          <a:p>
+            <a:pPr>
+              <a:spcAft>
+                <a:spcPts val="1100"/>
+              </a:spcAft>
+            </a:pPr>
+            <a:r>
+              <a:rPr b="1" sz="1500">
+                <a:solidFill>
+                  <a:srgbClr val="DC2626"/>
+                </a:solidFill>
+              </a:rPr>
+              <a:t>• Papers (2024–2026): </a:t>
+            </a:r>
+            <a:r>
+              <a:rPr b="0" sz="1500">
+                <a:solidFill>
+                  <a:srgbClr val="1E293B"/>
+                </a:solidFill>
+              </a:rPr>
+              <a:t>EffiBench (NeurIPS 2024), BigO(Bench) (2025), &amp; Khan et al. (2026).</a:t>
+            </a:r>
+          </a:p>
+          <a:p>
+            <a:pPr>
+              <a:spcAft>
+                <a:spcPts val="1100"/>
+              </a:spcAft>
+            </a:pPr>
+            <a:r>
+              <a:rPr b="1" sz="1500">
+                <a:solidFill>
+                  <a:srgbClr val="DC2626"/>
+                </a:solidFill>
+              </a:rPr>
+              <a:t>• What They Found: </a:t>
+            </a:r>
+            <a:r>
+              <a:rPr b="0" sz="1500">
+                <a:solidFill>
+                  <a:srgbClr val="1E293B"/>
+                </a:solidFill>
+              </a:rPr>
+              <a:t>Passed LeetCode code is often 13x slower and uses 43x more memory than optimal code.</a:t>
+            </a:r>
+          </a:p>
+          <a:p>
+            <a:pPr>
+              <a:spcAft>
+                <a:spcPts val="1100"/>
+              </a:spcAft>
+            </a:pPr>
+            <a:r>
+              <a:rPr b="1" sz="1500">
+                <a:solidFill>
+                  <a:srgbClr val="DC2626"/>
+                </a:solidFill>
+              </a:rPr>
+              <a:t>• How We Solved It: </a:t>
+            </a:r>
+            <a:r>
+              <a:rPr b="0" sz="1500">
+                <a:solidFill>
+                  <a:srgbClr val="1E293B"/>
+                </a:solidFill>
+              </a:rPr>
+              <a:t>We built a 4-Pillar Score (0–100) that grades Approach, Time, Space, and Code Style.</a:t>
+            </a:r>
+          </a:p>
+        </p:txBody>
+      </p:sp>
+      <p:sp>
+        <p:nvSpPr>
           <p:cNvPr id="9" name="Rounded Rectangle 8"/>
           <p:cNvSpPr/>
           <p:nvPr/>
         </p:nvSpPr>
         <p:spPr>
           <a:xfrm>
-            <a:off x="4389120" y="2011680"/>
-            <a:ext cx="3291840" cy="73152"/>
+            <a:off x="4425696" y="2057400"/>
+            <a:ext cx="3337560" cy="4297680"/>
           </a:xfrm>
           <a:prstGeom prst="roundRect">
-            <a:avLst/>
+            <a:avLst>
+              <a:gd name="adj" fmla="val 3000"/>
+            </a:avLst>
           </a:prstGeom>
           <a:solidFill>
-            <a:srgbClr val="FBBC05"/>
+            <a:srgbClr val="F8FAFC"/>
           </a:solidFill>
-          <a:ln>
-            <a:noFill/>
+          <a:ln w="15240">
+            <a:solidFill>
+              <a:srgbClr val="CBD5E1"/>
+            </a:solidFill>
           </a:ln>
         </p:spPr>
         <p:style>
@@ -6364,132 +4806,23 @@
       </p:sp>
       <p:sp>
         <p:nvSpPr>
-          <p:cNvPr id="10" name="TextBox 9"/>
-          <p:cNvSpPr txBox="1"/>
-          <p:nvPr/>
-        </p:nvSpPr>
-        <p:spPr>
-          <a:xfrm>
-            <a:off x="4709160" y="2286000"/>
-            <a:ext cx="2651760" cy="3886200"/>
+          <p:cNvPr id="10" name="Rectangle 9"/>
+          <p:cNvSpPr/>
+          <p:nvPr/>
+        </p:nvSpPr>
+        <p:spPr>
+          <a:xfrm>
+            <a:off x="4425696" y="2057400"/>
+            <a:ext cx="3337560" cy="73152"/>
           </a:xfrm>
           <a:prstGeom prst="rect">
             <a:avLst/>
           </a:prstGeom>
-          <a:noFill/>
-        </p:spPr>
-        <p:txBody>
-          <a:bodyPr wrap="square" lIns="0" tIns="0" rIns="0" bIns="0">
-            <a:spAutoFit/>
-          </a:bodyPr>
-          <a:lstStyle/>
-          <a:p>
-            <a:pPr>
-              <a:spcAft>
-                <a:spcPts val="1200"/>
-              </a:spcAft>
-              <a:defRPr sz="1900" b="1">
-                <a:solidFill>
-                  <a:srgbClr val="F0F6FC"/>
-                </a:solidFill>
-              </a:defRPr>
-            </a:pPr>
-            <a:r>
-              <a:t>Raw ChatGPT / Chat LLMs</a:t>
-            </a:r>
-          </a:p>
-          <a:p>
-            <a:pPr>
-              <a:spcAft>
-                <a:spcPts val="800"/>
-              </a:spcAft>
-            </a:pPr>
-            <a:r>
-              <a:rPr b="1" sz="1400">
-                <a:solidFill>
-                  <a:srgbClr val="FBBC05"/>
-                </a:solidFill>
-              </a:rPr>
-              <a:t>Limitation 1: </a:t>
-            </a:r>
-            <a:r>
-              <a:rPr b="0" sz="1400">
-                <a:solidFill>
-                  <a:srgbClr val="F0F6FC"/>
-                </a:solidFill>
-              </a:rPr>
-              <a:t>Spoils the answer immediately, completely destroying the learning and recall struggle.</a:t>
-            </a:r>
-          </a:p>
-          <a:p>
-            <a:pPr>
-              <a:spcAft>
-                <a:spcPts val="800"/>
-              </a:spcAft>
-            </a:pPr>
-            <a:r>
-              <a:rPr b="1" sz="1400">
-                <a:solidFill>
-                  <a:srgbClr val="FBBC05"/>
-                </a:solidFill>
-              </a:rPr>
-              <a:t>Limitation 2: </a:t>
-            </a:r>
-            <a:r>
-              <a:rPr b="0" sz="1400">
-                <a:solidFill>
-                  <a:srgbClr val="F0F6FC"/>
-                </a:solidFill>
-              </a:rPr>
-              <a:t>High context friction: requires copy-pasting code, problem descriptions, and constraints.</a:t>
-            </a:r>
-          </a:p>
-          <a:p>
-            <a:pPr>
-              <a:spcAft>
-                <a:spcPts val="800"/>
-              </a:spcAft>
-            </a:pPr>
-            <a:r>
-              <a:rPr b="1" sz="1400">
-                <a:solidFill>
-                  <a:srgbClr val="FBBC05"/>
-                </a:solidFill>
-              </a:rPr>
-              <a:t>Limitation 3: </a:t>
-            </a:r>
-            <a:r>
-              <a:rPr b="0" sz="1400">
-                <a:solidFill>
-                  <a:srgbClr val="F0F6FC"/>
-                </a:solidFill>
-              </a:rPr>
-              <a:t>No persistent tracking: does not remember your streaks, paradigms, or weak spots.</a:t>
-            </a:r>
-          </a:p>
-        </p:txBody>
-      </p:sp>
-      <p:sp>
-        <p:nvSpPr>
-          <p:cNvPr id="11" name="Rounded Rectangle 10"/>
-          <p:cNvSpPr/>
-          <p:nvPr/>
-        </p:nvSpPr>
-        <p:spPr>
-          <a:xfrm>
-            <a:off x="8046720" y="2011680"/>
-            <a:ext cx="3291840" cy="4297680"/>
-          </a:xfrm>
-          <a:prstGeom prst="roundRect">
-            <a:avLst/>
-          </a:prstGeom>
           <a:solidFill>
-            <a:srgbClr val="161B22"/>
+            <a:srgbClr val="D97706"/>
           </a:solidFill>
-          <a:ln w="15240">
-            <a:solidFill>
-              <a:srgbClr val="30363D"/>
-            </a:solidFill>
+          <a:ln>
+            <a:noFill/>
           </a:ln>
         </p:spPr>
         <p:style>
@@ -6516,23 +4849,134 @@
       </p:sp>
       <p:sp>
         <p:nvSpPr>
+          <p:cNvPr id="11" name="TextBox 10"/>
+          <p:cNvSpPr txBox="1"/>
+          <p:nvPr/>
+        </p:nvSpPr>
+        <p:spPr>
+          <a:xfrm>
+            <a:off x="4718304" y="2313432"/>
+            <a:ext cx="2752344" cy="3886200"/>
+          </a:xfrm>
+          <a:prstGeom prst="rect">
+            <a:avLst/>
+          </a:prstGeom>
+          <a:noFill/>
+        </p:spPr>
+        <p:txBody>
+          <a:bodyPr wrap="square" lIns="0" tIns="0" rIns="0" bIns="0">
+            <a:spAutoFit/>
+          </a:bodyPr>
+          <a:lstStyle/>
+          <a:p>
+            <a:pPr>
+              <a:spcAft>
+                <a:spcPts val="1400"/>
+              </a:spcAft>
+              <a:defRPr sz="2100" b="1">
+                <a:solidFill>
+                  <a:srgbClr val="0F172A"/>
+                </a:solidFill>
+              </a:defRPr>
+            </a:pPr>
+            <a:r>
+              <a:t>2. Socratic Hints vs. Spoiling</a:t>
+            </a:r>
+          </a:p>
+          <a:p>
+            <a:pPr>
+              <a:spcAft>
+                <a:spcPts val="1100"/>
+              </a:spcAft>
+            </a:pPr>
+            <a:r>
+              <a:rPr b="1" sz="1500">
+                <a:solidFill>
+                  <a:srgbClr val="D97706"/>
+                </a:solidFill>
+              </a:rPr>
+              <a:t>• Papers (2024–2025): </a:t>
+            </a:r>
+            <a:r>
+              <a:rPr b="0" sz="1500">
+                <a:solidFill>
+                  <a:srgbClr val="1E293B"/>
+                </a:solidFill>
+              </a:rPr>
+              <a:t>CodeAid (ACM CHI 2024) &amp; Al-Hossami et al. (ACM SIGCSE 2024 / 2025).</a:t>
+            </a:r>
+          </a:p>
+          <a:p>
+            <a:pPr>
+              <a:spcAft>
+                <a:spcPts val="1100"/>
+              </a:spcAft>
+            </a:pPr>
+            <a:r>
+              <a:rPr b="1" sz="1500">
+                <a:solidFill>
+                  <a:srgbClr val="D97706"/>
+                </a:solidFill>
+              </a:rPr>
+              <a:t>• What They Found: </a:t>
+            </a:r>
+            <a:r>
+              <a:rPr b="0" sz="1500">
+                <a:solidFill>
+                  <a:srgbClr val="1E293B"/>
+                </a:solidFill>
+              </a:rPr>
+              <a:t>700-student study showed direct AI answers harm learning; step-by-step hints work best.</a:t>
+            </a:r>
+          </a:p>
+          <a:p>
+            <a:pPr>
+              <a:spcAft>
+                <a:spcPts val="1100"/>
+              </a:spcAft>
+            </a:pPr>
+            <a:r>
+              <a:rPr b="1" sz="1500">
+                <a:solidFill>
+                  <a:srgbClr val="D97706"/>
+                </a:solidFill>
+              </a:rPr>
+              <a:t>• How We Solved It: </a:t>
+            </a:r>
+            <a:r>
+              <a:rPr b="0" sz="1500">
+                <a:solidFill>
+                  <a:srgbClr val="1E293B"/>
+                </a:solidFill>
+              </a:rPr>
+              <a:t>We built 3-Step Progressive Hints that guide your thinking without giving away code.</a:t>
+            </a:r>
+          </a:p>
+        </p:txBody>
+      </p:sp>
+      <p:sp>
+        <p:nvSpPr>
           <p:cNvPr id="12" name="Rounded Rectangle 11"/>
           <p:cNvSpPr/>
           <p:nvPr/>
         </p:nvSpPr>
         <p:spPr>
           <a:xfrm>
-            <a:off x="8046720" y="2011680"/>
-            <a:ext cx="3291840" cy="73152"/>
+            <a:off x="8119872" y="2057400"/>
+            <a:ext cx="3337560" cy="4297680"/>
           </a:xfrm>
           <a:prstGeom prst="roundRect">
-            <a:avLst/>
+            <a:avLst>
+              <a:gd name="adj" fmla="val 3000"/>
+            </a:avLst>
           </a:prstGeom>
           <a:solidFill>
-            <a:srgbClr val="34A853"/>
+            <a:srgbClr val="F8FAFC"/>
           </a:solidFill>
-          <a:ln>
-            <a:noFill/>
+          <a:ln w="15240">
+            <a:solidFill>
+              <a:srgbClr val="CBD5E1"/>
+            </a:solidFill>
           </a:ln>
         </p:spPr>
         <p:style>
@@ -6559,14 +5003,57 @@
       </p:sp>
       <p:sp>
         <p:nvSpPr>
-          <p:cNvPr id="13" name="TextBox 12"/>
+          <p:cNvPr id="13" name="Rectangle 12"/>
+          <p:cNvSpPr/>
+          <p:nvPr/>
+        </p:nvSpPr>
+        <p:spPr>
+          <a:xfrm>
+            <a:off x="8119872" y="2057400"/>
+            <a:ext cx="3337560" cy="73152"/>
+          </a:xfrm>
+          <a:prstGeom prst="rect">
+            <a:avLst/>
+          </a:prstGeom>
+          <a:solidFill>
+            <a:srgbClr val="059669"/>
+          </a:solidFill>
+          <a:ln>
+            <a:noFill/>
+          </a:ln>
+        </p:spPr>
+        <p:style>
+          <a:lnRef idx="1">
+            <a:schemeClr val="accent1"/>
+          </a:lnRef>
+          <a:fillRef idx="3">
+            <a:schemeClr val="accent1"/>
+          </a:fillRef>
+          <a:effectRef idx="2">
+            <a:schemeClr val="accent1"/>
+          </a:effectRef>
+          <a:fontRef idx="minor">
+            <a:schemeClr val="lt1"/>
+          </a:fontRef>
+        </p:style>
+        <p:txBody>
+          <a:bodyPr rtlCol="0" anchor="ctr"/>
+          <a:lstStyle/>
+          <a:p>
+            <a:pPr algn="ctr"/>
+          </a:p>
+        </p:txBody>
+      </p:sp>
+      <p:sp>
+        <p:nvSpPr>
+          <p:cNvPr id="14" name="TextBox 13"/>
           <p:cNvSpPr txBox="1"/>
           <p:nvPr/>
         </p:nvSpPr>
         <p:spPr>
           <a:xfrm>
-            <a:off x="8366760" y="2286000"/>
-            <a:ext cx="2651760" cy="3886200"/>
+            <a:off x="8412480" y="2313432"/>
+            <a:ext cx="2752344" cy="3886200"/>
           </a:xfrm>
           <a:prstGeom prst="rect">
             <a:avLst/>
@@ -6581,85 +5068,85 @@
           <a:p>
             <a:pPr>
               <a:spcAft>
-                <a:spcPts val="1200"/>
-              </a:spcAft>
-              <a:defRPr sz="1900" b="1">
-                <a:solidFill>
-                  <a:srgbClr val="F0F6FC"/>
+                <a:spcPts val="1400"/>
+              </a:spcAft>
+              <a:defRPr sz="2100" b="1">
+                <a:solidFill>
+                  <a:srgbClr val="0F172A"/>
                 </a:solidFill>
               </a:defRPr>
             </a:pPr>
             <a:r>
-              <a:t>AlgoPulse: The In-Flow Mentor</a:t>
-            </a:r>
-          </a:p>
-          <a:p>
-            <a:pPr>
-              <a:spcAft>
-                <a:spcPts val="800"/>
-              </a:spcAft>
-            </a:pPr>
-            <a:r>
-              <a:rPr b="1" sz="1400">
-                <a:solidFill>
-                  <a:srgbClr val="34A853"/>
-                </a:solidFill>
-              </a:rPr>
-              <a:t>In-Editor Flow: </a:t>
-            </a:r>
-            <a:r>
-              <a:rPr b="0" sz="1400">
-                <a:solidFill>
-                  <a:srgbClr val="F0F6FC"/>
-                </a:solidFill>
-              </a:rPr>
-              <a:t>Reviews code directly in LeetCode, GFG, HackerRank, and VS Code with 1 click.</a:t>
-            </a:r>
-          </a:p>
-          <a:p>
-            <a:pPr>
-              <a:spcAft>
-                <a:spcPts val="800"/>
-              </a:spcAft>
-            </a:pPr>
-            <a:r>
-              <a:rPr b="1" sz="1400">
-                <a:solidFill>
-                  <a:srgbClr val="34A853"/>
-                </a:solidFill>
-              </a:rPr>
-              <a:t>4-Pillar Model: </a:t>
-            </a:r>
-            <a:r>
-              <a:rPr b="0" sz="1400">
-                <a:solidFill>
-                  <a:srgbClr val="F0F6FC"/>
-                </a:solidFill>
-              </a:rPr>
-              <a:t>Scores Optimality, Time, Space, and Cleanliness on a calibrated 100-point rubric.</a:t>
-            </a:r>
-          </a:p>
-          <a:p>
-            <a:pPr>
-              <a:spcAft>
-                <a:spcPts val="800"/>
-              </a:spcAft>
-            </a:pPr>
-            <a:r>
-              <a:rPr b="1" sz="1400">
-                <a:solidFill>
-                  <a:srgbClr val="34A853"/>
-                </a:solidFill>
-              </a:rPr>
-              <a:t>Pedagogical Hints: </a:t>
-            </a:r>
-            <a:r>
-              <a:rPr b="0" sz="1400">
-                <a:solidFill>
-                  <a:srgbClr val="F0F6FC"/>
-                </a:solidFill>
-              </a:rPr>
-              <a:t>3 progressive tiers nudge your thinking without ever spoiling code.</a:t>
+              <a:t>3. In-Editor Flow &amp; Memory</a:t>
+            </a:r>
+          </a:p>
+          <a:p>
+            <a:pPr>
+              <a:spcAft>
+                <a:spcPts val="1100"/>
+              </a:spcAft>
+            </a:pPr>
+            <a:r>
+              <a:rPr b="1" sz="1500">
+                <a:solidFill>
+                  <a:srgbClr val="059669"/>
+                </a:solidFill>
+              </a:rPr>
+              <a:t>• Papers (2024–2026): </a:t>
+            </a:r>
+            <a:r>
+              <a:rPr b="0" sz="1500">
+                <a:solidFill>
+                  <a:srgbClr val="1E293B"/>
+                </a:solidFill>
+              </a:rPr>
+              <a:t>Nam et al. (ICSE 2024), Pantelaios (NDSS 2024), LECTOR (2025), &amp; Schill (2026).</a:t>
+            </a:r>
+          </a:p>
+          <a:p>
+            <a:pPr>
+              <a:spcAft>
+                <a:spcPts val="1100"/>
+              </a:spcAft>
+            </a:pPr>
+            <a:r>
+              <a:rPr b="1" sz="1500">
+                <a:solidFill>
+                  <a:srgbClr val="059669"/>
+                </a:solidFill>
+              </a:rPr>
+              <a:t>• What They Found: </a:t>
+            </a:r>
+            <a:r>
+              <a:rPr b="0" sz="1500">
+                <a:solidFill>
+                  <a:srgbClr val="1E293B"/>
+                </a:solidFill>
+              </a:rPr>
+              <a:t>In-editor tools save time, and grouping problems by concept prevents forgetting.</a:t>
+            </a:r>
+          </a:p>
+          <a:p>
+            <a:pPr>
+              <a:spcAft>
+                <a:spcPts val="1100"/>
+              </a:spcAft>
+            </a:pPr>
+            <a:r>
+              <a:rPr b="1" sz="1500">
+                <a:solidFill>
+                  <a:srgbClr val="059669"/>
+                </a:solidFill>
+              </a:rPr>
+              <a:t>• How We Solved It: </a:t>
+            </a:r>
+            <a:r>
+              <a:rPr b="0" sz="1500">
+                <a:solidFill>
+                  <a:srgbClr val="1E293B"/>
+                </a:solidFill>
+              </a:rPr>
+              <a:t>Chrome &amp; VS Code extensions synced to a 14-Pattern Spaced Repetition Reminder.</a:t>
             </a:r>
           </a:p>
         </p:txBody>
@@ -6678,7 +5165,7 @@
     <p:bg>
       <p:bgPr>
         <a:solidFill>
-          <a:srgbClr val="0D1117"/>
+          <a:srgbClr val="FFFFFF"/>
         </a:solidFill>
         <a:effectLst/>
       </p:bgPr>
@@ -6698,8 +5185,8 @@
         </p:nvSpPr>
         <p:spPr>
           <a:xfrm>
-            <a:off x="731520" y="411480"/>
-            <a:ext cx="4114800" cy="365760"/>
+            <a:off x="731520" y="365760"/>
+            <a:ext cx="7315200" cy="320040"/>
           </a:xfrm>
           <a:prstGeom prst="rect">
             <a:avLst/>
@@ -6713,14 +5200,14 @@
           <a:lstStyle/>
           <a:p>
             <a:pPr>
-              <a:defRPr sz="1100" b="1">
-                <a:solidFill>
-                  <a:srgbClr val="4285F4"/>
+              <a:defRPr sz="1300" b="1">
+                <a:solidFill>
+                  <a:srgbClr val="059669"/>
                 </a:solidFill>
               </a:defRPr>
             </a:pPr>
             <a:r>
-              <a:t>EVERYDAY VALUE</a:t>
+              <a:t>SLIDE 4 • OUR SOLUTION &amp; IMPLEMENTATION</a:t>
             </a:r>
           </a:p>
         </p:txBody>
@@ -6733,8 +5220,8 @@
         </p:nvSpPr>
         <p:spPr>
           <a:xfrm>
-            <a:off x="731520" y="777240"/>
-            <a:ext cx="10698480" cy="731520"/>
+            <a:off x="731520" y="713232"/>
+            <a:ext cx="10698480" cy="640080"/>
           </a:xfrm>
           <a:prstGeom prst="rect">
             <a:avLst/>
@@ -6748,14 +5235,14 @@
           <a:lstStyle/>
           <a:p>
             <a:pPr>
-              <a:defRPr sz="2800" b="1">
-                <a:solidFill>
-                  <a:srgbClr val="F0F6FC"/>
+              <a:defRPr sz="3200" b="1">
+                <a:solidFill>
+                  <a:srgbClr val="0F172A"/>
                 </a:solidFill>
               </a:defRPr>
             </a:pPr>
             <a:r>
-              <a:t>How AlgoPulse Transforms Everyday Workflows</a:t>
+              <a:t>The Implementation We Have Built</a:t>
             </a:r>
           </a:p>
         </p:txBody>
@@ -6768,7 +5255,7 @@
         </p:nvSpPr>
         <p:spPr>
           <a:xfrm>
-            <a:off x="731520" y="1508760"/>
+            <a:off x="731520" y="1353312"/>
             <a:ext cx="10698480" cy="411480"/>
           </a:xfrm>
           <a:prstGeom prst="rect">
@@ -6783,39 +5270,37 @@
           <a:lstStyle/>
           <a:p>
             <a:pPr>
-              <a:defRPr sz="1400">
-                <a:solidFill>
-                  <a:srgbClr val="8B949E"/>
+              <a:defRPr sz="1600">
+                <a:solidFill>
+                  <a:srgbClr val="475569"/>
                 </a:solidFill>
               </a:defRPr>
             </a:pPr>
             <a:r>
-              <a:t>Designed for daily use by working engineers, college students, and technical interview candidates.</a:t>
-            </a:r>
-          </a:p>
-        </p:txBody>
-      </p:sp>
-      <p:sp>
-        <p:nvSpPr>
-          <p:cNvPr id="5" name="Rounded Rectangle 4"/>
+              <a:t>Three core components working together to coach developers in real time.</a:t>
+            </a:r>
+          </a:p>
+        </p:txBody>
+      </p:sp>
+      <p:sp>
+        <p:nvSpPr>
+          <p:cNvPr id="5" name="Rectangle 4"/>
           <p:cNvSpPr/>
           <p:nvPr/>
         </p:nvSpPr>
         <p:spPr>
           <a:xfrm>
-            <a:off x="731520" y="2011680"/>
-            <a:ext cx="5120640" cy="4297680"/>
-          </a:xfrm>
-          <a:prstGeom prst="roundRect">
+            <a:off x="731520" y="1847088"/>
+            <a:ext cx="10725912" cy="18288"/>
+          </a:xfrm>
+          <a:prstGeom prst="rect">
             <a:avLst/>
           </a:prstGeom>
           <a:solidFill>
-            <a:srgbClr val="161B22"/>
+            <a:srgbClr val="CBD5E1"/>
           </a:solidFill>
-          <a:ln w="15240">
-            <a:solidFill>
-              <a:srgbClr val="30363D"/>
-            </a:solidFill>
+          <a:ln>
+            <a:noFill/>
           </a:ln>
         </p:spPr>
         <p:style>
@@ -6848,17 +5333,21 @@
         </p:nvSpPr>
         <p:spPr>
           <a:xfrm>
-            <a:off x="731520" y="2011680"/>
-            <a:ext cx="5120640" cy="73152"/>
+            <a:off x="731520" y="2057400"/>
+            <a:ext cx="3337560" cy="4297680"/>
           </a:xfrm>
           <a:prstGeom prst="roundRect">
-            <a:avLst/>
+            <a:avLst>
+              <a:gd name="adj" fmla="val 3000"/>
+            </a:avLst>
           </a:prstGeom>
           <a:solidFill>
-            <a:srgbClr val="4285F4"/>
+            <a:srgbClr val="F8FAFC"/>
           </a:solidFill>
-          <a:ln>
-            <a:noFill/>
+          <a:ln w="15240">
+            <a:solidFill>
+              <a:srgbClr val="CBD5E1"/>
+            </a:solidFill>
           </a:ln>
         </p:spPr>
         <p:style>
@@ -6885,132 +5374,23 @@
       </p:sp>
       <p:sp>
         <p:nvSpPr>
-          <p:cNvPr id="7" name="TextBox 6"/>
-          <p:cNvSpPr txBox="1"/>
-          <p:nvPr/>
-        </p:nvSpPr>
-        <p:spPr>
-          <a:xfrm>
-            <a:off x="1051560" y="2286000"/>
-            <a:ext cx="4480560" cy="3886200"/>
+          <p:cNvPr id="7" name="Rectangle 6"/>
+          <p:cNvSpPr/>
+          <p:nvPr/>
+        </p:nvSpPr>
+        <p:spPr>
+          <a:xfrm>
+            <a:off x="731520" y="2057400"/>
+            <a:ext cx="3337560" cy="73152"/>
           </a:xfrm>
           <a:prstGeom prst="rect">
             <a:avLst/>
           </a:prstGeom>
-          <a:noFill/>
-        </p:spPr>
-        <p:txBody>
-          <a:bodyPr wrap="square" lIns="0" tIns="0" rIns="0" bIns="0">
-            <a:spAutoFit/>
-          </a:bodyPr>
-          <a:lstStyle/>
-          <a:p>
-            <a:pPr>
-              <a:spcAft>
-                <a:spcPts val="1200"/>
-              </a:spcAft>
-              <a:defRPr sz="1900" b="1">
-                <a:solidFill>
-                  <a:srgbClr val="F0F6FC"/>
-                </a:solidFill>
-              </a:defRPr>
-            </a:pPr>
-            <a:r>
-              <a:t>1. Daily Problem Solving &amp; Interview Prep</a:t>
-            </a:r>
-          </a:p>
-          <a:p>
-            <a:pPr>
-              <a:spcAft>
-                <a:spcPts val="800"/>
-              </a:spcAft>
-            </a:pPr>
-            <a:r>
-              <a:rPr b="1" sz="1400">
-                <a:solidFill>
-                  <a:srgbClr val="4285F4"/>
-                </a:solidFill>
-              </a:rPr>
-              <a:t>Zero Context-Switching: </a:t>
-            </a:r>
-            <a:r>
-              <a:rPr b="0" sz="1400">
-                <a:solidFill>
-                  <a:srgbClr val="F0F6FC"/>
-                </a:solidFill>
-              </a:rPr>
-              <a:t>Click 'Analyze Code' directly on LeetCode or press Ctrl+Alt+A in VS Code. Never leave your editor.</a:t>
-            </a:r>
-          </a:p>
-          <a:p>
-            <a:pPr>
-              <a:spcAft>
-                <a:spcPts val="800"/>
-              </a:spcAft>
-            </a:pPr>
-            <a:r>
-              <a:rPr b="1" sz="1400">
-                <a:solidFill>
-                  <a:srgbClr val="4285F4"/>
-                </a:solidFill>
-              </a:rPr>
-              <a:t>Immediate Pedagogical Hints: </a:t>
-            </a:r>
-            <a:r>
-              <a:rPr b="0" sz="1400">
-                <a:solidFill>
-                  <a:srgbClr val="F0F6FC"/>
-                </a:solidFill>
-              </a:rPr>
-              <a:t>Stuck on a tricky problem? Reveal Tier 1 (an invariant nudge) or Tier 2 (a pattern nudge) without giving away the solution.</a:t>
-            </a:r>
-          </a:p>
-          <a:p>
-            <a:pPr>
-              <a:spcAft>
-                <a:spcPts val="800"/>
-              </a:spcAft>
-            </a:pPr>
-            <a:r>
-              <a:rPr b="1" sz="1400">
-                <a:solidFill>
-                  <a:srgbClr val="4285F4"/>
-                </a:solidFill>
-              </a:rPr>
-              <a:t>Memory Decay Protection: </a:t>
-            </a:r>
-            <a:r>
-              <a:rPr b="0" sz="1400">
-                <a:solidFill>
-                  <a:srgbClr val="F0F6FC"/>
-                </a:solidFill>
-              </a:rPr>
-              <a:t>The dashboard automatically alerts you when high-yield patterns are about to fade from memory.</a:t>
-            </a:r>
-          </a:p>
-        </p:txBody>
-      </p:sp>
-      <p:sp>
-        <p:nvSpPr>
-          <p:cNvPr id="8" name="Rounded Rectangle 7"/>
-          <p:cNvSpPr/>
-          <p:nvPr/>
-        </p:nvSpPr>
-        <p:spPr>
-          <a:xfrm>
-            <a:off x="6217920" y="2011680"/>
-            <a:ext cx="5120640" cy="4297680"/>
-          </a:xfrm>
-          <a:prstGeom prst="roundRect">
-            <a:avLst/>
-          </a:prstGeom>
           <a:solidFill>
-            <a:srgbClr val="161B22"/>
+            <a:srgbClr val="2563EB"/>
           </a:solidFill>
-          <a:ln w="15240">
-            <a:solidFill>
-              <a:srgbClr val="30363D"/>
-            </a:solidFill>
+          <a:ln>
+            <a:noFill/>
           </a:ln>
         </p:spPr>
         <p:style>
@@ -7037,23 +5417,134 @@
       </p:sp>
       <p:sp>
         <p:nvSpPr>
+          <p:cNvPr id="8" name="TextBox 7"/>
+          <p:cNvSpPr txBox="1"/>
+          <p:nvPr/>
+        </p:nvSpPr>
+        <p:spPr>
+          <a:xfrm>
+            <a:off x="1024128" y="2313432"/>
+            <a:ext cx="2752344" cy="3886200"/>
+          </a:xfrm>
+          <a:prstGeom prst="rect">
+            <a:avLst/>
+          </a:prstGeom>
+          <a:noFill/>
+        </p:spPr>
+        <p:txBody>
+          <a:bodyPr wrap="square" lIns="0" tIns="0" rIns="0" bIns="0">
+            <a:spAutoFit/>
+          </a:bodyPr>
+          <a:lstStyle/>
+          <a:p>
+            <a:pPr>
+              <a:spcAft>
+                <a:spcPts val="1400"/>
+              </a:spcAft>
+              <a:defRPr sz="2100" b="1">
+                <a:solidFill>
+                  <a:srgbClr val="0F172A"/>
+                </a:solidFill>
+              </a:defRPr>
+            </a:pPr>
+            <a:r>
+              <a:t>1. Chrome &amp; VS Code Extensions</a:t>
+            </a:r>
+          </a:p>
+          <a:p>
+            <a:pPr>
+              <a:spcAft>
+                <a:spcPts val="1100"/>
+              </a:spcAft>
+            </a:pPr>
+            <a:r>
+              <a:rPr b="1" sz="1550">
+                <a:solidFill>
+                  <a:srgbClr val="2563EB"/>
+                </a:solidFill>
+              </a:rPr>
+              <a:t>• Browser Extension: </a:t>
+            </a:r>
+            <a:r>
+              <a:rPr b="0" sz="1550">
+                <a:solidFill>
+                  <a:srgbClr val="1E293B"/>
+                </a:solidFill>
+              </a:rPr>
+              <a:t>Works directly on LeetCode, GeeksforGeeks, and HackerRank with 1 click.</a:t>
+            </a:r>
+          </a:p>
+          <a:p>
+            <a:pPr>
+              <a:spcAft>
+                <a:spcPts val="1100"/>
+              </a:spcAft>
+            </a:pPr>
+            <a:r>
+              <a:rPr b="1" sz="1550">
+                <a:solidFill>
+                  <a:srgbClr val="2563EB"/>
+                </a:solidFill>
+              </a:rPr>
+              <a:t>• VS Code Extension: </a:t>
+            </a:r>
+            <a:r>
+              <a:rPr b="0" sz="1550">
+                <a:solidFill>
+                  <a:srgbClr val="1E293B"/>
+                </a:solidFill>
+              </a:rPr>
+              <a:t>Press Ctrl+Alt+A to review local Python, C++, Java, or JS files.</a:t>
+            </a:r>
+          </a:p>
+          <a:p>
+            <a:pPr>
+              <a:spcAft>
+                <a:spcPts val="1100"/>
+              </a:spcAft>
+            </a:pPr>
+            <a:r>
+              <a:rPr b="1" sz="1550">
+                <a:solidFill>
+                  <a:srgbClr val="2563EB"/>
+                </a:solidFill>
+              </a:rPr>
+              <a:t>• Zero Copy-Paste: </a:t>
+            </a:r>
+            <a:r>
+              <a:rPr b="0" sz="1550">
+                <a:solidFill>
+                  <a:srgbClr val="1E293B"/>
+                </a:solidFill>
+              </a:rPr>
+              <a:t>Reads your code automatically and opens a clean side panel.</a:t>
+            </a:r>
+          </a:p>
+        </p:txBody>
+      </p:sp>
+      <p:sp>
+        <p:nvSpPr>
           <p:cNvPr id="9" name="Rounded Rectangle 8"/>
           <p:cNvSpPr/>
           <p:nvPr/>
         </p:nvSpPr>
         <p:spPr>
           <a:xfrm>
-            <a:off x="6217920" y="2011680"/>
-            <a:ext cx="5120640" cy="73152"/>
+            <a:off x="4425696" y="2057400"/>
+            <a:ext cx="3337560" cy="4297680"/>
           </a:xfrm>
           <a:prstGeom prst="roundRect">
-            <a:avLst/>
+            <a:avLst>
+              <a:gd name="adj" fmla="val 3000"/>
+            </a:avLst>
           </a:prstGeom>
           <a:solidFill>
-            <a:srgbClr val="34A853"/>
+            <a:srgbClr val="F8FAFC"/>
           </a:solidFill>
-          <a:ln>
-            <a:noFill/>
+          <a:ln w="15240">
+            <a:solidFill>
+              <a:srgbClr val="CBD5E1"/>
+            </a:solidFill>
           </a:ln>
         </p:spPr>
         <p:style>
@@ -7080,14 +5571,57 @@
       </p:sp>
       <p:sp>
         <p:nvSpPr>
-          <p:cNvPr id="10" name="TextBox 9"/>
+          <p:cNvPr id="10" name="Rectangle 9"/>
+          <p:cNvSpPr/>
+          <p:nvPr/>
+        </p:nvSpPr>
+        <p:spPr>
+          <a:xfrm>
+            <a:off x="4425696" y="2057400"/>
+            <a:ext cx="3337560" cy="73152"/>
+          </a:xfrm>
+          <a:prstGeom prst="rect">
+            <a:avLst/>
+          </a:prstGeom>
+          <a:solidFill>
+            <a:srgbClr val="059669"/>
+          </a:solidFill>
+          <a:ln>
+            <a:noFill/>
+          </a:ln>
+        </p:spPr>
+        <p:style>
+          <a:lnRef idx="1">
+            <a:schemeClr val="accent1"/>
+          </a:lnRef>
+          <a:fillRef idx="3">
+            <a:schemeClr val="accent1"/>
+          </a:fillRef>
+          <a:effectRef idx="2">
+            <a:schemeClr val="accent1"/>
+          </a:effectRef>
+          <a:fontRef idx="minor">
+            <a:schemeClr val="lt1"/>
+          </a:fontRef>
+        </p:style>
+        <p:txBody>
+          <a:bodyPr rtlCol="0" anchor="ctr"/>
+          <a:lstStyle/>
+          <a:p>
+            <a:pPr algn="ctr"/>
+          </a:p>
+        </p:txBody>
+      </p:sp>
+      <p:sp>
+        <p:nvSpPr>
+          <p:cNvPr id="11" name="TextBox 10"/>
           <p:cNvSpPr txBox="1"/>
           <p:nvPr/>
         </p:nvSpPr>
         <p:spPr>
           <a:xfrm>
-            <a:off x="6537960" y="2286000"/>
-            <a:ext cx="4480560" cy="3886200"/>
+            <a:off x="4718304" y="2313432"/>
+            <a:ext cx="2752344" cy="3886200"/>
           </a:xfrm>
           <a:prstGeom prst="rect">
             <a:avLst/>
@@ -7102,85 +5636,282 @@
           <a:p>
             <a:pPr>
               <a:spcAft>
-                <a:spcPts val="1200"/>
-              </a:spcAft>
-              <a:defRPr sz="1900" b="1">
-                <a:solidFill>
-                  <a:srgbClr val="F0F6FC"/>
+                <a:spcPts val="1400"/>
+              </a:spcAft>
+              <a:defRPr sz="2100" b="1">
+                <a:solidFill>
+                  <a:srgbClr val="0F172A"/>
                 </a:solidFill>
               </a:defRPr>
             </a:pPr>
             <a:r>
-              <a:t>2. Real-World Engineering &amp; Clean Code</a:t>
-            </a:r>
-          </a:p>
-          <a:p>
-            <a:pPr>
-              <a:spcAft>
-                <a:spcPts val="800"/>
-              </a:spcAft>
-            </a:pPr>
-            <a:r>
-              <a:rPr b="1" sz="1400">
-                <a:solidFill>
-                  <a:srgbClr val="34A853"/>
-                </a:solidFill>
-              </a:rPr>
-              <a:t>Space &amp; Time Consciousness: </a:t>
-            </a:r>
-            <a:r>
-              <a:rPr b="0" sz="1400">
-                <a:solidFill>
-                  <a:srgbClr val="F0F6FC"/>
-                </a:solidFill>
-              </a:rPr>
-              <a:t>Highlights hidden O(N) memory allocations (like string slicing or unneeded hash tables) before code hits production.</a:t>
-            </a:r>
-          </a:p>
-          <a:p>
-            <a:pPr>
-              <a:spcAft>
-                <a:spcPts val="800"/>
-              </a:spcAft>
-            </a:pPr>
-            <a:r>
-              <a:rPr b="1" sz="1400">
-                <a:solidFill>
-                  <a:srgbClr val="34A853"/>
-                </a:solidFill>
-              </a:rPr>
-              <a:t>Senior Interview Preparation: </a:t>
-            </a:r>
-            <a:r>
-              <a:rPr b="0" sz="1400">
-                <a:solidFill>
-                  <a:srgbClr val="F0F6FC"/>
-                </a:solidFill>
-              </a:rPr>
-              <a:t>Generates real follow-up questions: 'What if N = 10¹²?' or 'Can you solve this with O(1) space?'</a:t>
-            </a:r>
-          </a:p>
-          <a:p>
-            <a:pPr>
-              <a:spcAft>
-                <a:spcPts val="800"/>
-              </a:spcAft>
-            </a:pPr>
-            <a:r>
-              <a:rPr b="1" sz="1400">
-                <a:solidFill>
-                  <a:srgbClr val="34A853"/>
-                </a:solidFill>
-              </a:rPr>
-              <a:t>Verified Proof of Consistency: </a:t>
-            </a:r>
-            <a:r>
-              <a:rPr b="0" sz="1400">
-                <a:solidFill>
-                  <a:srgbClr val="F0F6FC"/>
-                </a:solidFill>
-              </a:rPr>
-              <a:t>Share a public authenticated transcript with engineering recruiters showing real streaks and paradigm mastery.</a:t>
+              <a:t>2. 4-Pillar Score &amp; 3-Step Hints</a:t>
+            </a:r>
+          </a:p>
+          <a:p>
+            <a:pPr>
+              <a:spcAft>
+                <a:spcPts val="1100"/>
+              </a:spcAft>
+            </a:pPr>
+            <a:r>
+              <a:rPr b="1" sz="1550">
+                <a:solidFill>
+                  <a:srgbClr val="059669"/>
+                </a:solidFill>
+              </a:rPr>
+              <a:t>• 100-Point Score: </a:t>
+            </a:r>
+            <a:r>
+              <a:rPr b="0" sz="1550">
+                <a:solidFill>
+                  <a:srgbClr val="1E293B"/>
+                </a:solidFill>
+              </a:rPr>
+              <a:t>35 pts Approach + 25 pts Time + 20 pts Space + 20 pts Clean Code.</a:t>
+            </a:r>
+          </a:p>
+          <a:p>
+            <a:pPr>
+              <a:spcAft>
+                <a:spcPts val="1100"/>
+              </a:spcAft>
+            </a:pPr>
+            <a:r>
+              <a:rPr b="1" sz="1550">
+                <a:solidFill>
+                  <a:srgbClr val="059669"/>
+                </a:solidFill>
+              </a:rPr>
+              <a:t>• 3-Step Hints: </a:t>
+            </a:r>
+            <a:r>
+              <a:rPr b="0" sz="1550">
+                <a:solidFill>
+                  <a:srgbClr val="1E293B"/>
+                </a:solidFill>
+              </a:rPr>
+              <a:t>Hint 1 (Clue) -&gt; Hint 2 (Data Structure) -&gt; Hint 3 (Logic Steps).</a:t>
+            </a:r>
+          </a:p>
+          <a:p>
+            <a:pPr>
+              <a:spcAft>
+                <a:spcPts val="1100"/>
+              </a:spcAft>
+            </a:pPr>
+            <a:r>
+              <a:rPr b="1" sz="1550">
+                <a:solidFill>
+                  <a:srgbClr val="059669"/>
+                </a:solidFill>
+              </a:rPr>
+              <a:t>• Interview Curveballs: </a:t>
+            </a:r>
+            <a:r>
+              <a:rPr b="0" sz="1550">
+                <a:solidFill>
+                  <a:srgbClr val="1E293B"/>
+                </a:solidFill>
+              </a:rPr>
+              <a:t>Asks senior follow-up questions like 'What if input size is 10¹²?'</a:t>
+            </a:r>
+          </a:p>
+        </p:txBody>
+      </p:sp>
+      <p:sp>
+        <p:nvSpPr>
+          <p:cNvPr id="12" name="Rounded Rectangle 11"/>
+          <p:cNvSpPr/>
+          <p:nvPr/>
+        </p:nvSpPr>
+        <p:spPr>
+          <a:xfrm>
+            <a:off x="8119872" y="2057400"/>
+            <a:ext cx="3337560" cy="4297680"/>
+          </a:xfrm>
+          <a:prstGeom prst="roundRect">
+            <a:avLst>
+              <a:gd name="adj" fmla="val 3000"/>
+            </a:avLst>
+          </a:prstGeom>
+          <a:solidFill>
+            <a:srgbClr val="F8FAFC"/>
+          </a:solidFill>
+          <a:ln w="15240">
+            <a:solidFill>
+              <a:srgbClr val="CBD5E1"/>
+            </a:solidFill>
+          </a:ln>
+        </p:spPr>
+        <p:style>
+          <a:lnRef idx="1">
+            <a:schemeClr val="accent1"/>
+          </a:lnRef>
+          <a:fillRef idx="3">
+            <a:schemeClr val="accent1"/>
+          </a:fillRef>
+          <a:effectRef idx="2">
+            <a:schemeClr val="accent1"/>
+          </a:effectRef>
+          <a:fontRef idx="minor">
+            <a:schemeClr val="lt1"/>
+          </a:fontRef>
+        </p:style>
+        <p:txBody>
+          <a:bodyPr rtlCol="0" anchor="ctr"/>
+          <a:lstStyle/>
+          <a:p>
+            <a:pPr algn="ctr"/>
+          </a:p>
+        </p:txBody>
+      </p:sp>
+      <p:sp>
+        <p:nvSpPr>
+          <p:cNvPr id="13" name="Rectangle 12"/>
+          <p:cNvSpPr/>
+          <p:nvPr/>
+        </p:nvSpPr>
+        <p:spPr>
+          <a:xfrm>
+            <a:off x="8119872" y="2057400"/>
+            <a:ext cx="3337560" cy="73152"/>
+          </a:xfrm>
+          <a:prstGeom prst="rect">
+            <a:avLst/>
+          </a:prstGeom>
+          <a:solidFill>
+            <a:srgbClr val="D97706"/>
+          </a:solidFill>
+          <a:ln>
+            <a:noFill/>
+          </a:ln>
+        </p:spPr>
+        <p:style>
+          <a:lnRef idx="1">
+            <a:schemeClr val="accent1"/>
+          </a:lnRef>
+          <a:fillRef idx="3">
+            <a:schemeClr val="accent1"/>
+          </a:fillRef>
+          <a:effectRef idx="2">
+            <a:schemeClr val="accent1"/>
+          </a:effectRef>
+          <a:fontRef idx="minor">
+            <a:schemeClr val="lt1"/>
+          </a:fontRef>
+        </p:style>
+        <p:txBody>
+          <a:bodyPr rtlCol="0" anchor="ctr"/>
+          <a:lstStyle/>
+          <a:p>
+            <a:pPr algn="ctr"/>
+          </a:p>
+        </p:txBody>
+      </p:sp>
+      <p:sp>
+        <p:nvSpPr>
+          <p:cNvPr id="14" name="TextBox 13"/>
+          <p:cNvSpPr txBox="1"/>
+          <p:nvPr/>
+        </p:nvSpPr>
+        <p:spPr>
+          <a:xfrm>
+            <a:off x="8412480" y="2313432"/>
+            <a:ext cx="2752344" cy="3886200"/>
+          </a:xfrm>
+          <a:prstGeom prst="rect">
+            <a:avLst/>
+          </a:prstGeom>
+          <a:noFill/>
+        </p:spPr>
+        <p:txBody>
+          <a:bodyPr wrap="square" lIns="0" tIns="0" rIns="0" bIns="0">
+            <a:spAutoFit/>
+          </a:bodyPr>
+          <a:lstStyle/>
+          <a:p>
+            <a:pPr>
+              <a:spcAft>
+                <a:spcPts val="1400"/>
+              </a:spcAft>
+              <a:defRPr sz="2100" b="1">
+                <a:solidFill>
+                  <a:srgbClr val="0F172A"/>
+                </a:solidFill>
+              </a:defRPr>
+            </a:pPr>
+            <a:r>
+              <a:t>3. Smart Revision Dashboard</a:t>
+            </a:r>
+          </a:p>
+          <a:p>
+            <a:pPr>
+              <a:spcAft>
+                <a:spcPts val="1100"/>
+              </a:spcAft>
+            </a:pPr>
+            <a:r>
+              <a:rPr b="1" sz="1550">
+                <a:solidFill>
+                  <a:srgbClr val="D97706"/>
+                </a:solidFill>
+              </a:rPr>
+              <a:t>• 16-Week Heatmap: </a:t>
+            </a:r>
+            <a:r>
+              <a:rPr b="0" sz="1550">
+                <a:solidFill>
+                  <a:srgbClr val="1E293B"/>
+                </a:solidFill>
+              </a:rPr>
+              <a:t>Tracks daily coding streaks across all 4 platforms in one place.</a:t>
+            </a:r>
+          </a:p>
+          <a:p>
+            <a:pPr>
+              <a:spcAft>
+                <a:spcPts val="1100"/>
+              </a:spcAft>
+            </a:pPr>
+            <a:r>
+              <a:rPr b="1" sz="1550">
+                <a:solidFill>
+                  <a:srgbClr val="D97706"/>
+                </a:solidFill>
+              </a:rPr>
+              <a:t>• 14 Coding Patterns: </a:t>
+            </a:r>
+            <a:r>
+              <a:rPr b="0" sz="1550">
+                <a:solidFill>
+                  <a:srgbClr val="1E293B"/>
+                </a:solidFill>
+              </a:rPr>
+              <a:t>Shows your strong and weak topics (Two Pointers, DP, Graphs).</a:t>
+            </a:r>
+          </a:p>
+          <a:p>
+            <a:pPr>
+              <a:spcAft>
+                <a:spcPts val="1100"/>
+              </a:spcAft>
+            </a:pPr>
+            <a:r>
+              <a:rPr b="1" sz="1550">
+                <a:solidFill>
+                  <a:srgbClr val="D97706"/>
+                </a:solidFill>
+              </a:rPr>
+              <a:t>• Forgetting Alerts: </a:t>
+            </a:r>
+            <a:r>
+              <a:rPr b="0" sz="1550">
+                <a:solidFill>
+                  <a:srgbClr val="1E293B"/>
+                </a:solidFill>
+              </a:rPr>
+              <a:t>Reminds you to revise old problems right before you forget them.</a:t>
             </a:r>
           </a:p>
         </p:txBody>
@@ -7199,7 +5930,7 @@
     <p:bg>
       <p:bgPr>
         <a:solidFill>
-          <a:srgbClr val="0D1117"/>
+          <a:srgbClr val="FFFFFF"/>
         </a:solidFill>
         <a:effectLst/>
       </p:bgPr>
@@ -7219,8 +5950,8 @@
         </p:nvSpPr>
         <p:spPr>
           <a:xfrm>
-            <a:off x="731520" y="411480"/>
-            <a:ext cx="4114800" cy="365760"/>
+            <a:off x="731520" y="365760"/>
+            <a:ext cx="7315200" cy="320040"/>
           </a:xfrm>
           <a:prstGeom prst="rect">
             <a:avLst/>
@@ -7234,14 +5965,14 @@
           <a:lstStyle/>
           <a:p>
             <a:pPr>
-              <a:defRPr sz="1100" b="1">
-                <a:solidFill>
-                  <a:srgbClr val="4285F4"/>
+              <a:defRPr sz="1300" b="1">
+                <a:solidFill>
+                  <a:srgbClr val="2563EB"/>
                 </a:solidFill>
               </a:defRPr>
             </a:pPr>
             <a:r>
-              <a:t>ARCHITECTURE</a:t>
+              <a:t>SLIDE 5 • SYSTEM ARCHITECTURE</a:t>
             </a:r>
           </a:p>
         </p:txBody>
@@ -7254,8 +5985,8 @@
         </p:nvSpPr>
         <p:spPr>
           <a:xfrm>
-            <a:off x="731520" y="777240"/>
-            <a:ext cx="10698480" cy="731520"/>
+            <a:off x="731520" y="713232"/>
+            <a:ext cx="10698480" cy="640080"/>
           </a:xfrm>
           <a:prstGeom prst="rect">
             <a:avLst/>
@@ -7269,14 +6000,14 @@
           <a:lstStyle/>
           <a:p>
             <a:pPr>
-              <a:defRPr sz="2800" b="1">
-                <a:solidFill>
-                  <a:srgbClr val="F0F6FC"/>
+              <a:defRPr sz="3200" b="1">
+                <a:solidFill>
+                  <a:srgbClr val="0F172A"/>
                 </a:solidFill>
               </a:defRPr>
             </a:pPr>
             <a:r>
-              <a:t>System Architecture &amp; Live Data Flow</a:t>
+              <a:t>System Architecture</a:t>
             </a:r>
           </a:p>
         </p:txBody>
@@ -7289,7 +6020,7 @@
         </p:nvSpPr>
         <p:spPr>
           <a:xfrm>
-            <a:off x="731520" y="1508760"/>
+            <a:off x="731520" y="1353312"/>
             <a:ext cx="10698480" cy="411480"/>
           </a:xfrm>
           <a:prstGeom prst="rect">
@@ -7304,39 +6035,37 @@
           <a:lstStyle/>
           <a:p>
             <a:pPr>
-              <a:defRPr sz="1400">
-                <a:solidFill>
-                  <a:srgbClr val="8B949E"/>
+              <a:defRPr sz="1600">
+                <a:solidFill>
+                  <a:srgbClr val="475569"/>
                 </a:solidFill>
               </a:defRPr>
             </a:pPr>
             <a:r>
-              <a:t>High-performance client extensions communicating with a zero-cost AI engine and reactive web dashboard.</a:t>
-            </a:r>
-          </a:p>
-        </p:txBody>
-      </p:sp>
-      <p:sp>
-        <p:nvSpPr>
-          <p:cNvPr id="5" name="Rounded Rectangle 4"/>
+              <a:t>How Web Coding Platforms, VS Code, Google Gemini AI, and the Next.js Dashboard connect.</a:t>
+            </a:r>
+          </a:p>
+        </p:txBody>
+      </p:sp>
+      <p:sp>
+        <p:nvSpPr>
+          <p:cNvPr id="5" name="Rectangle 4"/>
           <p:cNvSpPr/>
           <p:nvPr/>
         </p:nvSpPr>
         <p:spPr>
           <a:xfrm>
-            <a:off x="731520" y="2011680"/>
-            <a:ext cx="2468880" cy="4297680"/>
-          </a:xfrm>
-          <a:prstGeom prst="roundRect">
+            <a:off x="731520" y="1847088"/>
+            <a:ext cx="10725912" cy="18288"/>
+          </a:xfrm>
+          <a:prstGeom prst="rect">
             <a:avLst/>
           </a:prstGeom>
           <a:solidFill>
-            <a:srgbClr val="161B22"/>
+            <a:srgbClr val="CBD5E1"/>
           </a:solidFill>
-          <a:ln w="15240">
-            <a:solidFill>
-              <a:srgbClr val="30363D"/>
-            </a:solidFill>
+          <a:ln>
+            <a:noFill/>
           </a:ln>
         </p:spPr>
         <p:style>
@@ -7358,741 +6087,6 @@
           <a:lstStyle/>
           <a:p>
             <a:pPr algn="ctr"/>
-          </a:p>
-        </p:txBody>
-      </p:sp>
-      <p:sp>
-        <p:nvSpPr>
-          <p:cNvPr id="6" name="Rounded Rectangle 5"/>
-          <p:cNvSpPr/>
-          <p:nvPr/>
-        </p:nvSpPr>
-        <p:spPr>
-          <a:xfrm>
-            <a:off x="731520" y="2011680"/>
-            <a:ext cx="2468880" cy="73152"/>
-          </a:xfrm>
-          <a:prstGeom prst="roundRect">
-            <a:avLst/>
-          </a:prstGeom>
-          <a:solidFill>
-            <a:srgbClr val="4285F4"/>
-          </a:solidFill>
-          <a:ln>
-            <a:noFill/>
-          </a:ln>
-        </p:spPr>
-        <p:style>
-          <a:lnRef idx="1">
-            <a:schemeClr val="accent1"/>
-          </a:lnRef>
-          <a:fillRef idx="3">
-            <a:schemeClr val="accent1"/>
-          </a:fillRef>
-          <a:effectRef idx="2">
-            <a:schemeClr val="accent1"/>
-          </a:effectRef>
-          <a:fontRef idx="minor">
-            <a:schemeClr val="lt1"/>
-          </a:fontRef>
-        </p:style>
-        <p:txBody>
-          <a:bodyPr rtlCol="0" anchor="ctr"/>
-          <a:lstStyle/>
-          <a:p>
-            <a:pPr algn="ctr"/>
-          </a:p>
-        </p:txBody>
-      </p:sp>
-      <p:sp>
-        <p:nvSpPr>
-          <p:cNvPr id="7" name="TextBox 6"/>
-          <p:cNvSpPr txBox="1"/>
-          <p:nvPr/>
-        </p:nvSpPr>
-        <p:spPr>
-          <a:xfrm>
-            <a:off x="1051560" y="2286000"/>
-            <a:ext cx="1828800" cy="3886200"/>
-          </a:xfrm>
-          <a:prstGeom prst="rect">
-            <a:avLst/>
-          </a:prstGeom>
-          <a:noFill/>
-        </p:spPr>
-        <p:txBody>
-          <a:bodyPr wrap="square" lIns="0" tIns="0" rIns="0" bIns="0">
-            <a:spAutoFit/>
-          </a:bodyPr>
-          <a:lstStyle/>
-          <a:p>
-            <a:pPr>
-              <a:spcAft>
-                <a:spcPts val="1200"/>
-              </a:spcAft>
-              <a:defRPr sz="1900" b="1">
-                <a:solidFill>
-                  <a:srgbClr val="F0F6FC"/>
-                </a:solidFill>
-              </a:defRPr>
-            </a:pPr>
-            <a:r>
-              <a:t>Client Layer</a:t>
-            </a:r>
-          </a:p>
-          <a:p>
-            <a:pPr>
-              <a:spcAft>
-                <a:spcPts val="800"/>
-              </a:spcAft>
-            </a:pPr>
-            <a:r>
-              <a:rPr b="1" sz="1400">
-                <a:solidFill>
-                  <a:srgbClr val="4285F4"/>
-                </a:solidFill>
-              </a:rPr>
-              <a:t>Chrome Ext (MV3): </a:t>
-            </a:r>
-            <a:r>
-              <a:rPr b="0" sz="1400">
-                <a:solidFill>
-                  <a:srgbClr val="F0F6FC"/>
-                </a:solidFill>
-              </a:rPr>
-              <a:t>Injects into Monaco (LeetCode), Ace (GFG), &amp; CodeMirror (HackerRank).</a:t>
-            </a:r>
-          </a:p>
-          <a:p>
-            <a:pPr>
-              <a:spcAft>
-                <a:spcPts val="800"/>
-              </a:spcAft>
-            </a:pPr>
-            <a:r>
-              <a:rPr b="1" sz="1400">
-                <a:solidFill>
-                  <a:srgbClr val="4285F4"/>
-                </a:solidFill>
-              </a:rPr>
-              <a:t>VS Code Ext: </a:t>
-            </a:r>
-            <a:r>
-              <a:rPr b="0" sz="1400">
-                <a:solidFill>
-                  <a:srgbClr val="F0F6FC"/>
-                </a:solidFill>
-              </a:rPr>
-              <a:t>TypeScript extension using active TextEditor buffer and Webview panel.</a:t>
-            </a:r>
-          </a:p>
-          <a:p>
-            <a:pPr>
-              <a:spcAft>
-                <a:spcPts val="800"/>
-              </a:spcAft>
-            </a:pPr>
-            <a:r>
-              <a:rPr b="1" sz="1400">
-                <a:solidFill>
-                  <a:srgbClr val="4285F4"/>
-                </a:solidFill>
-              </a:rPr>
-              <a:t>Zero Friction: </a:t>
-            </a:r>
-            <a:r>
-              <a:rPr b="0" sz="1400">
-                <a:solidFill>
-                  <a:srgbClr val="F0F6FC"/>
-                </a:solidFill>
-              </a:rPr>
-              <a:t>Native hotkeys and slide-over panels.</a:t>
-            </a:r>
-          </a:p>
-        </p:txBody>
-      </p:sp>
-      <p:sp>
-        <p:nvSpPr>
-          <p:cNvPr id="8" name="Rounded Rectangle 7"/>
-          <p:cNvSpPr/>
-          <p:nvPr/>
-        </p:nvSpPr>
-        <p:spPr>
-          <a:xfrm>
-            <a:off x="3474720" y="2011680"/>
-            <a:ext cx="2468880" cy="4297680"/>
-          </a:xfrm>
-          <a:prstGeom prst="roundRect">
-            <a:avLst/>
-          </a:prstGeom>
-          <a:solidFill>
-            <a:srgbClr val="161B22"/>
-          </a:solidFill>
-          <a:ln w="15240">
-            <a:solidFill>
-              <a:srgbClr val="30363D"/>
-            </a:solidFill>
-          </a:ln>
-        </p:spPr>
-        <p:style>
-          <a:lnRef idx="1">
-            <a:schemeClr val="accent1"/>
-          </a:lnRef>
-          <a:fillRef idx="3">
-            <a:schemeClr val="accent1"/>
-          </a:fillRef>
-          <a:effectRef idx="2">
-            <a:schemeClr val="accent1"/>
-          </a:effectRef>
-          <a:fontRef idx="minor">
-            <a:schemeClr val="lt1"/>
-          </a:fontRef>
-        </p:style>
-        <p:txBody>
-          <a:bodyPr rtlCol="0" anchor="ctr"/>
-          <a:lstStyle/>
-          <a:p>
-            <a:pPr algn="ctr"/>
-          </a:p>
-        </p:txBody>
-      </p:sp>
-      <p:sp>
-        <p:nvSpPr>
-          <p:cNvPr id="9" name="Rounded Rectangle 8"/>
-          <p:cNvSpPr/>
-          <p:nvPr/>
-        </p:nvSpPr>
-        <p:spPr>
-          <a:xfrm>
-            <a:off x="3474720" y="2011680"/>
-            <a:ext cx="2468880" cy="73152"/>
-          </a:xfrm>
-          <a:prstGeom prst="roundRect">
-            <a:avLst/>
-          </a:prstGeom>
-          <a:solidFill>
-            <a:srgbClr val="FBBC05"/>
-          </a:solidFill>
-          <a:ln>
-            <a:noFill/>
-          </a:ln>
-        </p:spPr>
-        <p:style>
-          <a:lnRef idx="1">
-            <a:schemeClr val="accent1"/>
-          </a:lnRef>
-          <a:fillRef idx="3">
-            <a:schemeClr val="accent1"/>
-          </a:fillRef>
-          <a:effectRef idx="2">
-            <a:schemeClr val="accent1"/>
-          </a:effectRef>
-          <a:fontRef idx="minor">
-            <a:schemeClr val="lt1"/>
-          </a:fontRef>
-        </p:style>
-        <p:txBody>
-          <a:bodyPr rtlCol="0" anchor="ctr"/>
-          <a:lstStyle/>
-          <a:p>
-            <a:pPr algn="ctr"/>
-          </a:p>
-        </p:txBody>
-      </p:sp>
-      <p:sp>
-        <p:nvSpPr>
-          <p:cNvPr id="10" name="TextBox 9"/>
-          <p:cNvSpPr txBox="1"/>
-          <p:nvPr/>
-        </p:nvSpPr>
-        <p:spPr>
-          <a:xfrm>
-            <a:off x="3794760" y="2286000"/>
-            <a:ext cx="1828800" cy="3886200"/>
-          </a:xfrm>
-          <a:prstGeom prst="rect">
-            <a:avLst/>
-          </a:prstGeom>
-          <a:noFill/>
-        </p:spPr>
-        <p:txBody>
-          <a:bodyPr wrap="square" lIns="0" tIns="0" rIns="0" bIns="0">
-            <a:spAutoFit/>
-          </a:bodyPr>
-          <a:lstStyle/>
-          <a:p>
-            <a:pPr>
-              <a:spcAft>
-                <a:spcPts val="1200"/>
-              </a:spcAft>
-              <a:defRPr sz="1900" b="1">
-                <a:solidFill>
-                  <a:srgbClr val="F0F6FC"/>
-                </a:solidFill>
-              </a:defRPr>
-            </a:pPr>
-            <a:r>
-              <a:t>AI Engine</a:t>
-            </a:r>
-          </a:p>
-          <a:p>
-            <a:pPr>
-              <a:spcAft>
-                <a:spcPts val="800"/>
-              </a:spcAft>
-            </a:pPr>
-            <a:r>
-              <a:rPr b="1" sz="1400">
-                <a:solidFill>
-                  <a:srgbClr val="FBBC05"/>
-                </a:solidFill>
-              </a:rPr>
-              <a:t>Google Gemini API: </a:t>
-            </a:r>
-            <a:r>
-              <a:rPr b="0" sz="1400">
-                <a:solidFill>
-                  <a:srgbClr val="F0F6FC"/>
-                </a:solidFill>
-              </a:rPr>
-              <a:t>Dynamic model discovery via Google ModelService.ListModels API (3.7/3.6/3.8 Flash).</a:t>
-            </a:r>
-          </a:p>
-          <a:p>
-            <a:pPr>
-              <a:spcAft>
-                <a:spcPts val="800"/>
-              </a:spcAft>
-            </a:pPr>
-            <a:r>
-              <a:rPr b="1" sz="1400">
-                <a:solidFill>
-                  <a:srgbClr val="FBBC05"/>
-                </a:solidFill>
-              </a:rPr>
-              <a:t>Zero Hardcoding: </a:t>
-            </a:r>
-            <a:r>
-              <a:rPr b="0" sz="1400">
-                <a:solidFill>
-                  <a:srgbClr val="F0F6FC"/>
-                </a:solidFill>
-              </a:rPr>
-              <a:t>Auto-detects live supported models with fallback resilience.</a:t>
-            </a:r>
-          </a:p>
-          <a:p>
-            <a:pPr>
-              <a:spcAft>
-                <a:spcPts val="800"/>
-              </a:spcAft>
-            </a:pPr>
-            <a:r>
-              <a:rPr b="1" sz="1400">
-                <a:solidFill>
-                  <a:srgbClr val="FBBC05"/>
-                </a:solidFill>
-              </a:rPr>
-              <a:t>Zero Latency: </a:t>
-            </a:r>
-            <a:r>
-              <a:rPr b="0" sz="1400">
-                <a:solidFill>
-                  <a:srgbClr val="F0F6FC"/>
-                </a:solidFill>
-              </a:rPr>
-              <a:t>Sub-2-second evaluation turnaround with strict JSON formatting.</a:t>
-            </a:r>
-          </a:p>
-        </p:txBody>
-      </p:sp>
-      <p:sp>
-        <p:nvSpPr>
-          <p:cNvPr id="11" name="Rounded Rectangle 10"/>
-          <p:cNvSpPr/>
-          <p:nvPr/>
-        </p:nvSpPr>
-        <p:spPr>
-          <a:xfrm>
-            <a:off x="6217920" y="2011680"/>
-            <a:ext cx="2468880" cy="4297680"/>
-          </a:xfrm>
-          <a:prstGeom prst="roundRect">
-            <a:avLst/>
-          </a:prstGeom>
-          <a:solidFill>
-            <a:srgbClr val="161B22"/>
-          </a:solidFill>
-          <a:ln w="15240">
-            <a:solidFill>
-              <a:srgbClr val="30363D"/>
-            </a:solidFill>
-          </a:ln>
-        </p:spPr>
-        <p:style>
-          <a:lnRef idx="1">
-            <a:schemeClr val="accent1"/>
-          </a:lnRef>
-          <a:fillRef idx="3">
-            <a:schemeClr val="accent1"/>
-          </a:fillRef>
-          <a:effectRef idx="2">
-            <a:schemeClr val="accent1"/>
-          </a:effectRef>
-          <a:fontRef idx="minor">
-            <a:schemeClr val="lt1"/>
-          </a:fontRef>
-        </p:style>
-        <p:txBody>
-          <a:bodyPr rtlCol="0" anchor="ctr"/>
-          <a:lstStyle/>
-          <a:p>
-            <a:pPr algn="ctr"/>
-          </a:p>
-        </p:txBody>
-      </p:sp>
-      <p:sp>
-        <p:nvSpPr>
-          <p:cNvPr id="12" name="Rounded Rectangle 11"/>
-          <p:cNvSpPr/>
-          <p:nvPr/>
-        </p:nvSpPr>
-        <p:spPr>
-          <a:xfrm>
-            <a:off x="6217920" y="2011680"/>
-            <a:ext cx="2468880" cy="73152"/>
-          </a:xfrm>
-          <a:prstGeom prst="roundRect">
-            <a:avLst/>
-          </a:prstGeom>
-          <a:solidFill>
-            <a:srgbClr val="34A853"/>
-          </a:solidFill>
-          <a:ln>
-            <a:noFill/>
-          </a:ln>
-        </p:spPr>
-        <p:style>
-          <a:lnRef idx="1">
-            <a:schemeClr val="accent1"/>
-          </a:lnRef>
-          <a:fillRef idx="3">
-            <a:schemeClr val="accent1"/>
-          </a:fillRef>
-          <a:effectRef idx="2">
-            <a:schemeClr val="accent1"/>
-          </a:effectRef>
-          <a:fontRef idx="minor">
-            <a:schemeClr val="lt1"/>
-          </a:fontRef>
-        </p:style>
-        <p:txBody>
-          <a:bodyPr rtlCol="0" anchor="ctr"/>
-          <a:lstStyle/>
-          <a:p>
-            <a:pPr algn="ctr"/>
-          </a:p>
-        </p:txBody>
-      </p:sp>
-      <p:sp>
-        <p:nvSpPr>
-          <p:cNvPr id="13" name="TextBox 12"/>
-          <p:cNvSpPr txBox="1"/>
-          <p:nvPr/>
-        </p:nvSpPr>
-        <p:spPr>
-          <a:xfrm>
-            <a:off x="6537960" y="2286000"/>
-            <a:ext cx="1828800" cy="3886200"/>
-          </a:xfrm>
-          <a:prstGeom prst="rect">
-            <a:avLst/>
-          </a:prstGeom>
-          <a:noFill/>
-        </p:spPr>
-        <p:txBody>
-          <a:bodyPr wrap="square" lIns="0" tIns="0" rIns="0" bIns="0">
-            <a:spAutoFit/>
-          </a:bodyPr>
-          <a:lstStyle/>
-          <a:p>
-            <a:pPr>
-              <a:spcAft>
-                <a:spcPts val="1200"/>
-              </a:spcAft>
-              <a:defRPr sz="1900" b="1">
-                <a:solidFill>
-                  <a:srgbClr val="F0F6FC"/>
-                </a:solidFill>
-              </a:defRPr>
-            </a:pPr>
-            <a:r>
-              <a:t>Web Dashboard</a:t>
-            </a:r>
-          </a:p>
-          <a:p>
-            <a:pPr>
-              <a:spcAft>
-                <a:spcPts val="800"/>
-              </a:spcAft>
-            </a:pPr>
-            <a:r>
-              <a:rPr b="1" sz="1400">
-                <a:solidFill>
-                  <a:srgbClr val="34A853"/>
-                </a:solidFill>
-              </a:rPr>
-              <a:t>Next.js 14 App: </a:t>
-            </a:r>
-            <a:r>
-              <a:rPr b="0" sz="1400">
-                <a:solidFill>
-                  <a:srgbClr val="F0F6FC"/>
-                </a:solidFill>
-              </a:rPr>
-              <a:t>React 18, Tailwind CSS, and GitHub dark styling.</a:t>
-            </a:r>
-          </a:p>
-          <a:p>
-            <a:pPr>
-              <a:spcAft>
-                <a:spcPts val="800"/>
-              </a:spcAft>
-            </a:pPr>
-            <a:r>
-              <a:rPr b="1" sz="1400">
-                <a:solidFill>
-                  <a:srgbClr val="34A853"/>
-                </a:solidFill>
-              </a:rPr>
-              <a:t>Dynamic Theme: </a:t>
-            </a:r>
-            <a:r>
-              <a:rPr b="0" sz="1400">
-                <a:solidFill>
-                  <a:srgbClr val="F0F6FC"/>
-                </a:solidFill>
-              </a:rPr>
-              <a:t>Google 4-color ambient glowing lighting.</a:t>
-            </a:r>
-          </a:p>
-          <a:p>
-            <a:pPr>
-              <a:spcAft>
-                <a:spcPts val="800"/>
-              </a:spcAft>
-            </a:pPr>
-            <a:r>
-              <a:rPr b="1" sz="1400">
-                <a:solidFill>
-                  <a:srgbClr val="34A853"/>
-                </a:solidFill>
-              </a:rPr>
-              <a:t>Live Polling: </a:t>
-            </a:r>
-            <a:r>
-              <a:rPr b="0" sz="1400">
-                <a:solidFill>
-                  <a:srgbClr val="F0F6FC"/>
-                </a:solidFill>
-              </a:rPr>
-              <a:t>5-second non-intrusive sync with live activity badges.</a:t>
-            </a:r>
-          </a:p>
-        </p:txBody>
-      </p:sp>
-      <p:sp>
-        <p:nvSpPr>
-          <p:cNvPr id="14" name="Rounded Rectangle 13"/>
-          <p:cNvSpPr/>
-          <p:nvPr/>
-        </p:nvSpPr>
-        <p:spPr>
-          <a:xfrm>
-            <a:off x="8961120" y="2011680"/>
-            <a:ext cx="2468880" cy="4297680"/>
-          </a:xfrm>
-          <a:prstGeom prst="roundRect">
-            <a:avLst/>
-          </a:prstGeom>
-          <a:solidFill>
-            <a:srgbClr val="161B22"/>
-          </a:solidFill>
-          <a:ln w="15240">
-            <a:solidFill>
-              <a:srgbClr val="30363D"/>
-            </a:solidFill>
-          </a:ln>
-        </p:spPr>
-        <p:style>
-          <a:lnRef idx="1">
-            <a:schemeClr val="accent1"/>
-          </a:lnRef>
-          <a:fillRef idx="3">
-            <a:schemeClr val="accent1"/>
-          </a:fillRef>
-          <a:effectRef idx="2">
-            <a:schemeClr val="accent1"/>
-          </a:effectRef>
-          <a:fontRef idx="minor">
-            <a:schemeClr val="lt1"/>
-          </a:fontRef>
-        </p:style>
-        <p:txBody>
-          <a:bodyPr rtlCol="0" anchor="ctr"/>
-          <a:lstStyle/>
-          <a:p>
-            <a:pPr algn="ctr"/>
-          </a:p>
-        </p:txBody>
-      </p:sp>
-      <p:sp>
-        <p:nvSpPr>
-          <p:cNvPr id="15" name="Rounded Rectangle 14"/>
-          <p:cNvSpPr/>
-          <p:nvPr/>
-        </p:nvSpPr>
-        <p:spPr>
-          <a:xfrm>
-            <a:off x="8961120" y="2011680"/>
-            <a:ext cx="2468880" cy="73152"/>
-          </a:xfrm>
-          <a:prstGeom prst="roundRect">
-            <a:avLst/>
-          </a:prstGeom>
-          <a:solidFill>
-            <a:srgbClr val="EA4335"/>
-          </a:solidFill>
-          <a:ln>
-            <a:noFill/>
-          </a:ln>
-        </p:spPr>
-        <p:style>
-          <a:lnRef idx="1">
-            <a:schemeClr val="accent1"/>
-          </a:lnRef>
-          <a:fillRef idx="3">
-            <a:schemeClr val="accent1"/>
-          </a:fillRef>
-          <a:effectRef idx="2">
-            <a:schemeClr val="accent1"/>
-          </a:effectRef>
-          <a:fontRef idx="minor">
-            <a:schemeClr val="lt1"/>
-          </a:fontRef>
-        </p:style>
-        <p:txBody>
-          <a:bodyPr rtlCol="0" anchor="ctr"/>
-          <a:lstStyle/>
-          <a:p>
-            <a:pPr algn="ctr"/>
-          </a:p>
-        </p:txBody>
-      </p:sp>
-      <p:sp>
-        <p:nvSpPr>
-          <p:cNvPr id="16" name="TextBox 15"/>
-          <p:cNvSpPr txBox="1"/>
-          <p:nvPr/>
-        </p:nvSpPr>
-        <p:spPr>
-          <a:xfrm>
-            <a:off x="9281160" y="2286000"/>
-            <a:ext cx="1828800" cy="3886200"/>
-          </a:xfrm>
-          <a:prstGeom prst="rect">
-            <a:avLst/>
-          </a:prstGeom>
-          <a:noFill/>
-        </p:spPr>
-        <p:txBody>
-          <a:bodyPr wrap="square" lIns="0" tIns="0" rIns="0" bIns="0">
-            <a:spAutoFit/>
-          </a:bodyPr>
-          <a:lstStyle/>
-          <a:p>
-            <a:pPr>
-              <a:spcAft>
-                <a:spcPts val="1200"/>
-              </a:spcAft>
-              <a:defRPr sz="1900" b="1">
-                <a:solidFill>
-                  <a:srgbClr val="F0F6FC"/>
-                </a:solidFill>
-              </a:defRPr>
-            </a:pPr>
-            <a:r>
-              <a:t>Hybrid Storage</a:t>
-            </a:r>
-          </a:p>
-          <a:p>
-            <a:pPr>
-              <a:spcAft>
-                <a:spcPts val="800"/>
-              </a:spcAft>
-            </a:pPr>
-            <a:r>
-              <a:rPr b="1" sz="1400">
-                <a:solidFill>
-                  <a:srgbClr val="EA4335"/>
-                </a:solidFill>
-              </a:rPr>
-              <a:t>Supabase DB: </a:t>
-            </a:r>
-            <a:r>
-              <a:rPr b="0" sz="1400">
-                <a:solidFill>
-                  <a:srgbClr val="F0F6FC"/>
-                </a:solidFill>
-              </a:rPr>
-              <a:t>PostgreSQL database with Row Level Security.</a:t>
-            </a:r>
-          </a:p>
-          <a:p>
-            <a:pPr>
-              <a:spcAft>
-                <a:spcPts val="800"/>
-              </a:spcAft>
-            </a:pPr>
-            <a:r>
-              <a:rPr b="1" sz="1400">
-                <a:solidFill>
-                  <a:srgbClr val="EA4335"/>
-                </a:solidFill>
-              </a:rPr>
-              <a:t>Local Mirroring: </a:t>
-            </a:r>
-            <a:r>
-              <a:rPr b="0" sz="1400">
-                <a:solidFill>
-                  <a:srgbClr val="F0F6FC"/>
-                </a:solidFill>
-              </a:rPr>
-              <a:t>Automatic JSON fallback for 100% offline functionality.</a:t>
-            </a:r>
-          </a:p>
-          <a:p>
-            <a:pPr>
-              <a:spcAft>
-                <a:spcPts val="800"/>
-              </a:spcAft>
-            </a:pPr>
-            <a:r>
-              <a:rPr b="1" sz="1400">
-                <a:solidFill>
-                  <a:srgbClr val="EA4335"/>
-                </a:solidFill>
-              </a:rPr>
-              <a:t>Token Security: </a:t>
-            </a:r>
-            <a:r>
-              <a:rPr b="0" sz="1400">
-                <a:solidFill>
-                  <a:srgbClr val="F0F6FC"/>
-                </a:solidFill>
-              </a:rPr>
-              <a:t>Secure Bearer extension tokens.</a:t>
-            </a:r>
           </a:p>
         </p:txBody>
       </p:sp>
@@ -8110,7 +6104,7 @@
     <p:bg>
       <p:bgPr>
         <a:solidFill>
-          <a:srgbClr val="0D1117"/>
+          <a:srgbClr val="FFFFFF"/>
         </a:solidFill>
         <a:effectLst/>
       </p:bgPr>
@@ -8130,8 +6124,8 @@
         </p:nvSpPr>
         <p:spPr>
           <a:xfrm>
-            <a:off x="731520" y="411480"/>
-            <a:ext cx="4114800" cy="365760"/>
+            <a:off x="731520" y="365760"/>
+            <a:ext cx="7315200" cy="320040"/>
           </a:xfrm>
           <a:prstGeom prst="rect">
             <a:avLst/>
@@ -8145,14 +6139,14 @@
           <a:lstStyle/>
           <a:p>
             <a:pPr>
-              <a:defRPr sz="1100" b="1">
-                <a:solidFill>
-                  <a:srgbClr val="4285F4"/>
+              <a:defRPr sz="1300" b="1">
+                <a:solidFill>
+                  <a:srgbClr val="2563EB"/>
                 </a:solidFill>
               </a:defRPr>
             </a:pPr>
             <a:r>
-              <a:t>ENGINEERING DEPTH</a:t>
+              <a:t>SLIDE 6 • TECHNOLOGY STACK</a:t>
             </a:r>
           </a:p>
         </p:txBody>
@@ -8165,8 +6159,8 @@
         </p:nvSpPr>
         <p:spPr>
           <a:xfrm>
-            <a:off x="731520" y="777240"/>
-            <a:ext cx="10698480" cy="731520"/>
+            <a:off x="731520" y="713232"/>
+            <a:ext cx="10698480" cy="640080"/>
           </a:xfrm>
           <a:prstGeom prst="rect">
             <a:avLst/>
@@ -8180,14 +6174,14 @@
           <a:lstStyle/>
           <a:p>
             <a:pPr>
-              <a:defRPr sz="2800" b="1">
-                <a:solidFill>
-                  <a:srgbClr val="F0F6FC"/>
+              <a:defRPr sz="3200" b="1">
+                <a:solidFill>
+                  <a:srgbClr val="0F172A"/>
                 </a:solidFill>
               </a:defRPr>
             </a:pPr>
             <a:r>
-              <a:t>In-Depth Implementation: Editor AST &amp; Runtime Hooks</a:t>
+              <a:t>Tech Stack Explanation (100% Free Tools)</a:t>
             </a:r>
           </a:p>
         </p:txBody>
@@ -8200,7 +6194,7 @@
         </p:nvSpPr>
         <p:spPr>
           <a:xfrm>
-            <a:off x="731520" y="1508760"/>
+            <a:off x="731520" y="1353312"/>
             <a:ext cx="10698480" cy="411480"/>
           </a:xfrm>
           <a:prstGeom prst="rect">
@@ -8215,39 +6209,37 @@
           <a:lstStyle/>
           <a:p>
             <a:pPr>
-              <a:defRPr sz="1400">
-                <a:solidFill>
-                  <a:srgbClr val="8B949E"/>
+              <a:defRPr sz="1600">
+                <a:solidFill>
+                  <a:srgbClr val="475569"/>
                 </a:solidFill>
               </a:defRPr>
             </a:pPr>
             <a:r>
-              <a:t>How we extracted editor code safely across three competitive programming platforms and desktop IDEs.</a:t>
-            </a:r>
-          </a:p>
-        </p:txBody>
-      </p:sp>
-      <p:sp>
-        <p:nvSpPr>
-          <p:cNvPr id="5" name="Rounded Rectangle 4"/>
+              <a:t>Simple, fast, and 100% free technologies so any student can use it at zero cost.</a:t>
+            </a:r>
+          </a:p>
+        </p:txBody>
+      </p:sp>
+      <p:sp>
+        <p:nvSpPr>
+          <p:cNvPr id="5" name="Rectangle 4"/>
           <p:cNvSpPr/>
           <p:nvPr/>
         </p:nvSpPr>
         <p:spPr>
           <a:xfrm>
-            <a:off x="731520" y="2011680"/>
-            <a:ext cx="5120640" cy="4297680"/>
-          </a:xfrm>
-          <a:prstGeom prst="roundRect">
+            <a:off x="731520" y="1847088"/>
+            <a:ext cx="10725912" cy="18288"/>
+          </a:xfrm>
+          <a:prstGeom prst="rect">
             <a:avLst/>
           </a:prstGeom>
           <a:solidFill>
-            <a:srgbClr val="161B22"/>
+            <a:srgbClr val="CBD5E1"/>
           </a:solidFill>
-          <a:ln w="15240">
-            <a:solidFill>
-              <a:srgbClr val="30363D"/>
-            </a:solidFill>
+          <a:ln>
+            <a:noFill/>
           </a:ln>
         </p:spPr>
         <p:style>
@@ -8280,17 +6272,21 @@
         </p:nvSpPr>
         <p:spPr>
           <a:xfrm>
-            <a:off x="731520" y="2011680"/>
-            <a:ext cx="5120640" cy="73152"/>
+            <a:off x="731520" y="2057400"/>
+            <a:ext cx="3337560" cy="4297680"/>
           </a:xfrm>
           <a:prstGeom prst="roundRect">
-            <a:avLst/>
+            <a:avLst>
+              <a:gd name="adj" fmla="val 3000"/>
+            </a:avLst>
           </a:prstGeom>
           <a:solidFill>
-            <a:srgbClr val="4285F4"/>
+            <a:srgbClr val="F8FAFC"/>
           </a:solidFill>
-          <a:ln>
-            <a:noFill/>
+          <a:ln w="15240">
+            <a:solidFill>
+              <a:srgbClr val="CBD5E1"/>
+            </a:solidFill>
           </a:ln>
         </p:spPr>
         <p:style>
@@ -8317,155 +6313,23 @@
       </p:sp>
       <p:sp>
         <p:nvSpPr>
-          <p:cNvPr id="7" name="TextBox 6"/>
-          <p:cNvSpPr txBox="1"/>
-          <p:nvPr/>
-        </p:nvSpPr>
-        <p:spPr>
-          <a:xfrm>
-            <a:off x="1051560" y="2286000"/>
-            <a:ext cx="4480560" cy="3886200"/>
+          <p:cNvPr id="7" name="Rectangle 6"/>
+          <p:cNvSpPr/>
+          <p:nvPr/>
+        </p:nvSpPr>
+        <p:spPr>
+          <a:xfrm>
+            <a:off x="731520" y="2057400"/>
+            <a:ext cx="3337560" cy="73152"/>
           </a:xfrm>
           <a:prstGeom prst="rect">
             <a:avLst/>
           </a:prstGeom>
-          <a:noFill/>
-        </p:spPr>
-        <p:txBody>
-          <a:bodyPr wrap="square" lIns="0" tIns="0" rIns="0" bIns="0">
-            <a:spAutoFit/>
-          </a:bodyPr>
-          <a:lstStyle/>
-          <a:p>
-            <a:pPr>
-              <a:spcAft>
-                <a:spcPts val="1200"/>
-              </a:spcAft>
-              <a:defRPr sz="1900" b="1">
-                <a:solidFill>
-                  <a:srgbClr val="F0F6FC"/>
-                </a:solidFill>
-              </a:defRPr>
-            </a:pPr>
-            <a:r>
-              <a:t>Overcoming Browser Sandbox Isolation</a:t>
-            </a:r>
-          </a:p>
-          <a:p>
-            <a:pPr>
-              <a:spcAft>
-                <a:spcPts val="800"/>
-              </a:spcAft>
-            </a:pPr>
-            <a:r>
-              <a:rPr b="1" sz="1400">
-                <a:solidFill>
-                  <a:srgbClr val="4285F4"/>
-                </a:solidFill>
-              </a:rPr>
-              <a:t>The Challenge: </a:t>
-            </a:r>
-            <a:r>
-              <a:rPr b="0" sz="1400">
-                <a:solidFill>
-                  <a:srgbClr val="F0F6FC"/>
-                </a:solidFill>
-              </a:rPr>
-              <a:t>Modern web platforms isolate editor state inside window objects unreachable by standard content scripts.</a:t>
-            </a:r>
-          </a:p>
-          <a:p>
-            <a:pPr>
-              <a:spcAft>
-                <a:spcPts val="800"/>
-              </a:spcAft>
-            </a:pPr>
-            <a:r>
-              <a:rPr b="1" sz="1400">
-                <a:solidFill>
-                  <a:srgbClr val="4285F4"/>
-                </a:solidFill>
-              </a:rPr>
-              <a:t>Monaco Hook (LeetCode): </a:t>
-            </a:r>
-            <a:r>
-              <a:rPr b="0" sz="1400">
-                <a:solidFill>
-                  <a:srgbClr val="F0F6FC"/>
-                </a:solidFill>
-              </a:rPr>
-              <a:t>We inject an in-page runtime bridge directly into window.monaco.editor.getModels() to read exact buffer AST without relying on fragile DOM scraping.</a:t>
-            </a:r>
-          </a:p>
-          <a:p>
-            <a:pPr>
-              <a:spcAft>
-                <a:spcPts val="800"/>
-              </a:spcAft>
-            </a:pPr>
-            <a:r>
-              <a:rPr b="1" sz="1400">
-                <a:solidFill>
-                  <a:srgbClr val="4285F4"/>
-                </a:solidFill>
-              </a:rPr>
-              <a:t>Ace &amp; CodeMirror: </a:t>
-            </a:r>
-            <a:r>
-              <a:rPr b="0" sz="1400">
-                <a:solidFill>
-                  <a:srgbClr val="F0F6FC"/>
-                </a:solidFill>
-              </a:rPr>
-              <a:t>Custom bridge hooks attach directly to window.ace and CodeMirror editor instances on GeeksforGeeks and HackerRank.</a:t>
-            </a:r>
-          </a:p>
-          <a:p>
-            <a:pPr>
-              <a:spcAft>
-                <a:spcPts val="800"/>
-              </a:spcAft>
-            </a:pPr>
-            <a:r>
-              <a:rPr b="1" sz="1400">
-                <a:solidFill>
-                  <a:srgbClr val="4285F4"/>
-                </a:solidFill>
-              </a:rPr>
-              <a:t>Shadow DOM Slide-Over: </a:t>
-            </a:r>
-            <a:r>
-              <a:rPr b="0" sz="1400">
-                <a:solidFill>
-                  <a:srgbClr val="F0F6FC"/>
-                </a:solidFill>
-              </a:rPr>
-              <a:t>Review drawer renders inside an isolated Shadow DOM container, guaranteeing zero CSS collisions with host websites.</a:t>
-            </a:r>
-          </a:p>
-        </p:txBody>
-      </p:sp>
-      <p:sp>
-        <p:nvSpPr>
-          <p:cNvPr id="8" name="Rounded Rectangle 7"/>
-          <p:cNvSpPr/>
-          <p:nvPr/>
-        </p:nvSpPr>
-        <p:spPr>
-          <a:xfrm>
-            <a:off x="6217920" y="2011680"/>
-            <a:ext cx="5120640" cy="4297680"/>
-          </a:xfrm>
-          <a:prstGeom prst="roundRect">
-            <a:avLst/>
-          </a:prstGeom>
           <a:solidFill>
-            <a:srgbClr val="161B22"/>
+            <a:srgbClr val="2563EB"/>
           </a:solidFill>
-          <a:ln w="15240">
-            <a:solidFill>
-              <a:srgbClr val="30363D"/>
-            </a:solidFill>
+          <a:ln>
+            <a:noFill/>
           </a:ln>
         </p:spPr>
         <p:style>
@@ -8492,23 +6356,134 @@
       </p:sp>
       <p:sp>
         <p:nvSpPr>
+          <p:cNvPr id="8" name="TextBox 7"/>
+          <p:cNvSpPr txBox="1"/>
+          <p:nvPr/>
+        </p:nvSpPr>
+        <p:spPr>
+          <a:xfrm>
+            <a:off x="1024128" y="2313432"/>
+            <a:ext cx="2752344" cy="3886200"/>
+          </a:xfrm>
+          <a:prstGeom prst="rect">
+            <a:avLst/>
+          </a:prstGeom>
+          <a:noFill/>
+        </p:spPr>
+        <p:txBody>
+          <a:bodyPr wrap="square" lIns="0" tIns="0" rIns="0" bIns="0">
+            <a:spAutoFit/>
+          </a:bodyPr>
+          <a:lstStyle/>
+          <a:p>
+            <a:pPr>
+              <a:spcAft>
+                <a:spcPts val="1400"/>
+              </a:spcAft>
+              <a:defRPr sz="2100" b="1">
+                <a:solidFill>
+                  <a:srgbClr val="0F172A"/>
+                </a:solidFill>
+              </a:defRPr>
+            </a:pPr>
+            <a:r>
+              <a:t>1. Extensions (Front-End)</a:t>
+            </a:r>
+          </a:p>
+          <a:p>
+            <a:pPr>
+              <a:spcAft>
+                <a:spcPts val="1100"/>
+              </a:spcAft>
+            </a:pPr>
+            <a:r>
+              <a:rPr b="1" sz="1550">
+                <a:solidFill>
+                  <a:srgbClr val="2563EB"/>
+                </a:solidFill>
+              </a:rPr>
+              <a:t>• Chrome Manifest V3: </a:t>
+            </a:r>
+            <a:r>
+              <a:rPr b="0" sz="1550">
+                <a:solidFill>
+                  <a:srgbClr val="1E293B"/>
+                </a:solidFill>
+              </a:rPr>
+              <a:t>Latest secure Chrome standard; reads code from LeetCode &amp; GFG editors.</a:t>
+            </a:r>
+          </a:p>
+          <a:p>
+            <a:pPr>
+              <a:spcAft>
+                <a:spcPts val="1100"/>
+              </a:spcAft>
+            </a:pPr>
+            <a:r>
+              <a:rPr b="1" sz="1550">
+                <a:solidFill>
+                  <a:srgbClr val="2563EB"/>
+                </a:solidFill>
+              </a:rPr>
+              <a:t>• VS Code Extension API: </a:t>
+            </a:r>
+            <a:r>
+              <a:rPr b="0" sz="1550">
+                <a:solidFill>
+                  <a:srgbClr val="1E293B"/>
+                </a:solidFill>
+              </a:rPr>
+              <a:t>Built with TypeScript &amp; esbuild into a tiny 33 KB package.</a:t>
+            </a:r>
+          </a:p>
+          <a:p>
+            <a:pPr>
+              <a:spcAft>
+                <a:spcPts val="1100"/>
+              </a:spcAft>
+            </a:pPr>
+            <a:r>
+              <a:rPr b="1" sz="1550">
+                <a:solidFill>
+                  <a:srgbClr val="2563EB"/>
+                </a:solidFill>
+              </a:rPr>
+              <a:t>• Shadow DOM UI: </a:t>
+            </a:r>
+            <a:r>
+              <a:rPr b="0" sz="1550">
+                <a:solidFill>
+                  <a:srgbClr val="1E293B"/>
+                </a:solidFill>
+              </a:rPr>
+              <a:t>Keeps our review panel clean without breaking the website's layout.</a:t>
+            </a:r>
+          </a:p>
+        </p:txBody>
+      </p:sp>
+      <p:sp>
+        <p:nvSpPr>
           <p:cNvPr id="9" name="Rounded Rectangle 8"/>
           <p:cNvSpPr/>
           <p:nvPr/>
         </p:nvSpPr>
         <p:spPr>
           <a:xfrm>
-            <a:off x="6217920" y="2011680"/>
-            <a:ext cx="5120640" cy="73152"/>
+            <a:off x="4425696" y="2057400"/>
+            <a:ext cx="3337560" cy="4297680"/>
           </a:xfrm>
           <a:prstGeom prst="roundRect">
-            <a:avLst/>
+            <a:avLst>
+              <a:gd name="adj" fmla="val 3000"/>
+            </a:avLst>
           </a:prstGeom>
           <a:solidFill>
-            <a:srgbClr val="34A853"/>
+            <a:srgbClr val="F8FAFC"/>
           </a:solidFill>
-          <a:ln>
-            <a:noFill/>
+          <a:ln w="15240">
+            <a:solidFill>
+              <a:srgbClr val="CBD5E1"/>
+            </a:solidFill>
           </a:ln>
         </p:spPr>
         <p:style>
@@ -8535,14 +6510,57 @@
       </p:sp>
       <p:sp>
         <p:nvSpPr>
-          <p:cNvPr id="10" name="TextBox 9"/>
+          <p:cNvPr id="10" name="Rectangle 9"/>
+          <p:cNvSpPr/>
+          <p:nvPr/>
+        </p:nvSpPr>
+        <p:spPr>
+          <a:xfrm>
+            <a:off x="4425696" y="2057400"/>
+            <a:ext cx="3337560" cy="73152"/>
+          </a:xfrm>
+          <a:prstGeom prst="rect">
+            <a:avLst/>
+          </a:prstGeom>
+          <a:solidFill>
+            <a:srgbClr val="059669"/>
+          </a:solidFill>
+          <a:ln>
+            <a:noFill/>
+          </a:ln>
+        </p:spPr>
+        <p:style>
+          <a:lnRef idx="1">
+            <a:schemeClr val="accent1"/>
+          </a:lnRef>
+          <a:fillRef idx="3">
+            <a:schemeClr val="accent1"/>
+          </a:fillRef>
+          <a:effectRef idx="2">
+            <a:schemeClr val="accent1"/>
+          </a:effectRef>
+          <a:fontRef idx="minor">
+            <a:schemeClr val="lt1"/>
+          </a:fontRef>
+        </p:style>
+        <p:txBody>
+          <a:bodyPr rtlCol="0" anchor="ctr"/>
+          <a:lstStyle/>
+          <a:p>
+            <a:pPr algn="ctr"/>
+          </a:p>
+        </p:txBody>
+      </p:sp>
+      <p:sp>
+        <p:nvSpPr>
+          <p:cNvPr id="11" name="TextBox 10"/>
           <p:cNvSpPr txBox="1"/>
           <p:nvPr/>
         </p:nvSpPr>
         <p:spPr>
           <a:xfrm>
-            <a:off x="6537960" y="2286000"/>
-            <a:ext cx="4480560" cy="3886200"/>
+            <a:off x="4718304" y="2313432"/>
+            <a:ext cx="2752344" cy="3886200"/>
           </a:xfrm>
           <a:prstGeom prst="rect">
             <a:avLst/>
@@ -8557,108 +6575,282 @@
           <a:p>
             <a:pPr>
               <a:spcAft>
-                <a:spcPts val="1200"/>
-              </a:spcAft>
-              <a:defRPr sz="1900" b="1">
-                <a:solidFill>
-                  <a:srgbClr val="F0F6FC"/>
+                <a:spcPts val="1400"/>
+              </a:spcAft>
+              <a:defRPr sz="2100" b="1">
+                <a:solidFill>
+                  <a:srgbClr val="0F172A"/>
                 </a:solidFill>
               </a:defRPr>
             </a:pPr>
             <a:r>
-              <a:t>VS Code Extension Architecture</a:t>
-            </a:r>
-          </a:p>
-          <a:p>
-            <a:pPr>
-              <a:spcAft>
-                <a:spcPts val="800"/>
-              </a:spcAft>
-            </a:pPr>
-            <a:r>
-              <a:rPr b="1" sz="1400">
-                <a:solidFill>
-                  <a:srgbClr val="34A853"/>
-                </a:solidFill>
-              </a:rPr>
-              <a:t>Native Editor Access: </a:t>
-            </a:r>
-            <a:r>
-              <a:rPr b="0" sz="1400">
-                <a:solidFill>
-                  <a:srgbClr val="F0F6FC"/>
-                </a:solidFill>
-              </a:rPr>
-              <a:t>Captures active selection or entire document via vscode.window.activeTextEditor in real time.</a:t>
-            </a:r>
-          </a:p>
-          <a:p>
-            <a:pPr>
-              <a:spcAft>
-                <a:spcPts val="800"/>
-              </a:spcAft>
-            </a:pPr>
-            <a:r>
-              <a:rPr b="1" sz="1400">
-                <a:solidFill>
-                  <a:srgbClr val="34A853"/>
-                </a:solidFill>
-              </a:rPr>
-              <a:t>Interactive Webview: </a:t>
-            </a:r>
-            <a:r>
-              <a:rPr b="0" sz="1400">
-                <a:solidFill>
-                  <a:srgbClr val="F0F6FC"/>
-                </a:solidFill>
-              </a:rPr>
-              <a:t>Renders an embedded dark-themed UI panel in the VS Code Activity Bar with live hint reveal toggles.</a:t>
-            </a:r>
-          </a:p>
-          <a:p>
-            <a:pPr>
-              <a:spcAft>
-                <a:spcPts val="800"/>
-              </a:spcAft>
-            </a:pPr>
-            <a:r>
-              <a:rPr b="1" sz="1400">
-                <a:solidFill>
-                  <a:srgbClr val="34A853"/>
-                </a:solidFill>
-              </a:rPr>
-              <a:t>One-Click Code Insertion: </a:t>
-            </a:r>
-            <a:r>
-              <a:rPr b="0" sz="1400">
-                <a:solidFill>
-                  <a:srgbClr val="F0F6FC"/>
-                </a:solidFill>
-              </a:rPr>
-              <a:t>Includes an 'Insert in Editor' command that replaces the user buffer with optimal reference code on request.</a:t>
-            </a:r>
-          </a:p>
-          <a:p>
-            <a:pPr>
-              <a:spcAft>
-                <a:spcPts val="800"/>
-              </a:spcAft>
-            </a:pPr>
-            <a:r>
-              <a:rPr b="1" sz="1400">
-                <a:solidFill>
-                  <a:srgbClr val="34A853"/>
-                </a:solidFill>
-              </a:rPr>
-              <a:t>Universal Language Support: </a:t>
-            </a:r>
-            <a:r>
-              <a:rPr b="0" sz="1400">
-                <a:solidFill>
-                  <a:srgbClr val="F0F6FC"/>
-                </a:solidFill>
-              </a:rPr>
-              <a:t>Accurately parses Python, Java, C++, TypeScript, Go, and Rust problem statements and code.</a:t>
+              <a:t>2. AI Brain (Evaluation)</a:t>
+            </a:r>
+          </a:p>
+          <a:p>
+            <a:pPr>
+              <a:spcAft>
+                <a:spcPts val="1100"/>
+              </a:spcAft>
+            </a:pPr>
+            <a:r>
+              <a:rPr b="1" sz="1550">
+                <a:solidFill>
+                  <a:srgbClr val="059669"/>
+                </a:solidFill>
+              </a:rPr>
+              <a:t>• Google Gemini Flash API: </a:t>
+            </a:r>
+            <a:r>
+              <a:rPr b="0" sz="1550">
+                <a:solidFill>
+                  <a:srgbClr val="1E293B"/>
+                </a:solidFill>
+              </a:rPr>
+              <a:t>100% free tier via Google AI Studio; reviews code in under 2 seconds.</a:t>
+            </a:r>
+          </a:p>
+          <a:p>
+            <a:pPr>
+              <a:spcAft>
+                <a:spcPts val="1100"/>
+              </a:spcAft>
+            </a:pPr>
+            <a:r>
+              <a:rPr b="1" sz="1550">
+                <a:solidFill>
+                  <a:srgbClr val="059669"/>
+                </a:solidFill>
+              </a:rPr>
+              <a:t>• Auto-Model Switcher: </a:t>
+            </a:r>
+            <a:r>
+              <a:rPr b="0" sz="1550">
+                <a:solidFill>
+                  <a:srgbClr val="1E293B"/>
+                </a:solidFill>
+              </a:rPr>
+              <a:t>Automatically picks the fastest working Gemini Flash model.</a:t>
+            </a:r>
+          </a:p>
+          <a:p>
+            <a:pPr>
+              <a:spcAft>
+                <a:spcPts val="1100"/>
+              </a:spcAft>
+            </a:pPr>
+            <a:r>
+              <a:rPr b="1" sz="1550">
+                <a:solidFill>
+                  <a:srgbClr val="059669"/>
+                </a:solidFill>
+              </a:rPr>
+              <a:t>• Zero Laptop Load: </a:t>
+            </a:r>
+            <a:r>
+              <a:rPr b="0" sz="1550">
+                <a:solidFill>
+                  <a:srgbClr val="1E293B"/>
+                </a:solidFill>
+              </a:rPr>
+              <a:t>Runs in the cloud—no heavy GPU or RAM needed on student laptops.</a:t>
+            </a:r>
+          </a:p>
+        </p:txBody>
+      </p:sp>
+      <p:sp>
+        <p:nvSpPr>
+          <p:cNvPr id="12" name="Rounded Rectangle 11"/>
+          <p:cNvSpPr/>
+          <p:nvPr/>
+        </p:nvSpPr>
+        <p:spPr>
+          <a:xfrm>
+            <a:off x="8119872" y="2057400"/>
+            <a:ext cx="3337560" cy="4297680"/>
+          </a:xfrm>
+          <a:prstGeom prst="roundRect">
+            <a:avLst>
+              <a:gd name="adj" fmla="val 3000"/>
+            </a:avLst>
+          </a:prstGeom>
+          <a:solidFill>
+            <a:srgbClr val="F8FAFC"/>
+          </a:solidFill>
+          <a:ln w="15240">
+            <a:solidFill>
+              <a:srgbClr val="CBD5E1"/>
+            </a:solidFill>
+          </a:ln>
+        </p:spPr>
+        <p:style>
+          <a:lnRef idx="1">
+            <a:schemeClr val="accent1"/>
+          </a:lnRef>
+          <a:fillRef idx="3">
+            <a:schemeClr val="accent1"/>
+          </a:fillRef>
+          <a:effectRef idx="2">
+            <a:schemeClr val="accent1"/>
+          </a:effectRef>
+          <a:fontRef idx="minor">
+            <a:schemeClr val="lt1"/>
+          </a:fontRef>
+        </p:style>
+        <p:txBody>
+          <a:bodyPr rtlCol="0" anchor="ctr"/>
+          <a:lstStyle/>
+          <a:p>
+            <a:pPr algn="ctr"/>
+          </a:p>
+        </p:txBody>
+      </p:sp>
+      <p:sp>
+        <p:nvSpPr>
+          <p:cNvPr id="13" name="Rectangle 12"/>
+          <p:cNvSpPr/>
+          <p:nvPr/>
+        </p:nvSpPr>
+        <p:spPr>
+          <a:xfrm>
+            <a:off x="8119872" y="2057400"/>
+            <a:ext cx="3337560" cy="73152"/>
+          </a:xfrm>
+          <a:prstGeom prst="rect">
+            <a:avLst/>
+          </a:prstGeom>
+          <a:solidFill>
+            <a:srgbClr val="D97706"/>
+          </a:solidFill>
+          <a:ln>
+            <a:noFill/>
+          </a:ln>
+        </p:spPr>
+        <p:style>
+          <a:lnRef idx="1">
+            <a:schemeClr val="accent1"/>
+          </a:lnRef>
+          <a:fillRef idx="3">
+            <a:schemeClr val="accent1"/>
+          </a:fillRef>
+          <a:effectRef idx="2">
+            <a:schemeClr val="accent1"/>
+          </a:effectRef>
+          <a:fontRef idx="minor">
+            <a:schemeClr val="lt1"/>
+          </a:fontRef>
+        </p:style>
+        <p:txBody>
+          <a:bodyPr rtlCol="0" anchor="ctr"/>
+          <a:lstStyle/>
+          <a:p>
+            <a:pPr algn="ctr"/>
+          </a:p>
+        </p:txBody>
+      </p:sp>
+      <p:sp>
+        <p:nvSpPr>
+          <p:cNvPr id="14" name="TextBox 13"/>
+          <p:cNvSpPr txBox="1"/>
+          <p:nvPr/>
+        </p:nvSpPr>
+        <p:spPr>
+          <a:xfrm>
+            <a:off x="8412480" y="2313432"/>
+            <a:ext cx="2752344" cy="3886200"/>
+          </a:xfrm>
+          <a:prstGeom prst="rect">
+            <a:avLst/>
+          </a:prstGeom>
+          <a:noFill/>
+        </p:spPr>
+        <p:txBody>
+          <a:bodyPr wrap="square" lIns="0" tIns="0" rIns="0" bIns="0">
+            <a:spAutoFit/>
+          </a:bodyPr>
+          <a:lstStyle/>
+          <a:p>
+            <a:pPr>
+              <a:spcAft>
+                <a:spcPts val="1400"/>
+              </a:spcAft>
+              <a:defRPr sz="2100" b="1">
+                <a:solidFill>
+                  <a:srgbClr val="0F172A"/>
+                </a:solidFill>
+              </a:defRPr>
+            </a:pPr>
+            <a:r>
+              <a:t>3. Dashboard &amp; Database</a:t>
+            </a:r>
+          </a:p>
+          <a:p>
+            <a:pPr>
+              <a:spcAft>
+                <a:spcPts val="1100"/>
+              </a:spcAft>
+            </a:pPr>
+            <a:r>
+              <a:rPr b="1" sz="1550">
+                <a:solidFill>
+                  <a:srgbClr val="D97706"/>
+                </a:solidFill>
+              </a:rPr>
+              <a:t>• Next.js 14 &amp; Tailwind CSS: </a:t>
+            </a:r>
+            <a:r>
+              <a:rPr b="0" sz="1550">
+                <a:solidFill>
+                  <a:srgbClr val="1E293B"/>
+                </a:solidFill>
+              </a:rPr>
+              <a:t>Powers both the web dashboard and backend API routes.</a:t>
+            </a:r>
+          </a:p>
+          <a:p>
+            <a:pPr>
+              <a:spcAft>
+                <a:spcPts val="1100"/>
+              </a:spcAft>
+            </a:pPr>
+            <a:r>
+              <a:rPr b="1" sz="1550">
+                <a:solidFill>
+                  <a:srgbClr val="D97706"/>
+                </a:solidFill>
+              </a:rPr>
+              <a:t>• Supabase PostgreSQL: </a:t>
+            </a:r>
+            <a:r>
+              <a:rPr b="0" sz="1550">
+                <a:solidFill>
+                  <a:srgbClr val="1E293B"/>
+                </a:solidFill>
+              </a:rPr>
+              <a:t>Free cloud database that securely stores each user's progress.</a:t>
+            </a:r>
+          </a:p>
+          <a:p>
+            <a:pPr>
+              <a:spcAft>
+                <a:spcPts val="1100"/>
+              </a:spcAft>
+            </a:pPr>
+            <a:r>
+              <a:rPr b="1" sz="1550">
+                <a:solidFill>
+                  <a:srgbClr val="D97706"/>
+                </a:solidFill>
+              </a:rPr>
+              <a:t>• Local JSON Backup: </a:t>
+            </a:r>
+            <a:r>
+              <a:rPr b="0" sz="1550">
+                <a:solidFill>
+                  <a:srgbClr val="1E293B"/>
+                </a:solidFill>
+              </a:rPr>
+              <a:t>Saves a local copy on disk so the dashboard works even without internet.</a:t>
             </a:r>
           </a:p>
         </p:txBody>
@@ -8677,7 +6869,7 @@
     <p:bg>
       <p:bgPr>
         <a:solidFill>
-          <a:srgbClr val="0D1117"/>
+          <a:srgbClr val="FFFFFF"/>
         </a:solidFill>
         <a:effectLst/>
       </p:bgPr>
@@ -8697,8 +6889,8 @@
         </p:nvSpPr>
         <p:spPr>
           <a:xfrm>
-            <a:off x="731520" y="411480"/>
-            <a:ext cx="4114800" cy="365760"/>
+            <a:off x="731520" y="365760"/>
+            <a:ext cx="7315200" cy="320040"/>
           </a:xfrm>
           <a:prstGeom prst="rect">
             <a:avLst/>
@@ -8712,14 +6904,14 @@
           <a:lstStyle/>
           <a:p>
             <a:pPr>
-              <a:defRPr sz="1100" b="1">
-                <a:solidFill>
-                  <a:srgbClr val="4285F4"/>
+              <a:defRPr sz="1300" b="1">
+                <a:solidFill>
+                  <a:srgbClr val="059669"/>
                 </a:solidFill>
               </a:defRPr>
             </a:pPr>
             <a:r>
-              <a:t>PEDAGOGICAL MODEL</a:t>
+              <a:t>SLIDE 7 • STEP-BY-STEP WORKFLOW</a:t>
             </a:r>
           </a:p>
         </p:txBody>
@@ -8732,8 +6924,8 @@
         </p:nvSpPr>
         <p:spPr>
           <a:xfrm>
-            <a:off x="731520" y="777240"/>
-            <a:ext cx="10698480" cy="731520"/>
+            <a:off x="731520" y="713232"/>
+            <a:ext cx="10698480" cy="640080"/>
           </a:xfrm>
           <a:prstGeom prst="rect">
             <a:avLst/>
@@ -8747,14 +6939,14 @@
           <a:lstStyle/>
           <a:p>
             <a:pPr>
-              <a:defRPr sz="2800" b="1">
-                <a:solidFill>
-                  <a:srgbClr val="F0F6FC"/>
+              <a:defRPr sz="3200" b="1">
+                <a:solidFill>
+                  <a:srgbClr val="0F172A"/>
                 </a:solidFill>
               </a:defRPr>
             </a:pPr>
             <a:r>
-              <a:t>The 4-Pillar Algorithmic Rubric &amp; Hint Engine</a:t>
+              <a:t>How the Complete Workflow Operates</a:t>
             </a:r>
           </a:p>
         </p:txBody>
@@ -8767,7 +6959,7 @@
         </p:nvSpPr>
         <p:spPr>
           <a:xfrm>
-            <a:off x="731520" y="1508760"/>
+            <a:off x="731520" y="1353312"/>
             <a:ext cx="10698480" cy="411480"/>
           </a:xfrm>
           <a:prstGeom prst="rect">
@@ -8782,39 +6974,37 @@
           <a:lstStyle/>
           <a:p>
             <a:pPr>
-              <a:defRPr sz="1400">
-                <a:solidFill>
-                  <a:srgbClr val="8B949E"/>
+              <a:defRPr sz="1600">
+                <a:solidFill>
+                  <a:srgbClr val="475569"/>
                 </a:solidFill>
               </a:defRPr>
             </a:pPr>
             <a:r>
-              <a:t>Moving away from simplistic execution time to holistic algorithmic craftsmanship.</a:t>
-            </a:r>
-          </a:p>
-        </p:txBody>
-      </p:sp>
-      <p:sp>
-        <p:nvSpPr>
-          <p:cNvPr id="5" name="Rounded Rectangle 4"/>
+              <a:t>Four simple steps from writing code to tracking long-term mastery.</a:t>
+            </a:r>
+          </a:p>
+        </p:txBody>
+      </p:sp>
+      <p:sp>
+        <p:nvSpPr>
+          <p:cNvPr id="5" name="Rectangle 4"/>
           <p:cNvSpPr/>
           <p:nvPr/>
         </p:nvSpPr>
         <p:spPr>
           <a:xfrm>
-            <a:off x="731520" y="2011680"/>
-            <a:ext cx="5120640" cy="4297680"/>
-          </a:xfrm>
-          <a:prstGeom prst="roundRect">
+            <a:off x="731520" y="1847088"/>
+            <a:ext cx="10725912" cy="18288"/>
+          </a:xfrm>
+          <a:prstGeom prst="rect">
             <a:avLst/>
           </a:prstGeom>
           <a:solidFill>
-            <a:srgbClr val="161B22"/>
+            <a:srgbClr val="CBD5E1"/>
           </a:solidFill>
-          <a:ln w="15240">
-            <a:solidFill>
-              <a:srgbClr val="30363D"/>
-            </a:solidFill>
+          <a:ln>
+            <a:noFill/>
           </a:ln>
         </p:spPr>
         <p:style>
@@ -8847,17 +7037,21 @@
         </p:nvSpPr>
         <p:spPr>
           <a:xfrm>
-            <a:off x="731520" y="2011680"/>
-            <a:ext cx="5120640" cy="73152"/>
+            <a:off x="731520" y="2057400"/>
+            <a:ext cx="2514600" cy="4297680"/>
           </a:xfrm>
           <a:prstGeom prst="roundRect">
-            <a:avLst/>
+            <a:avLst>
+              <a:gd name="adj" fmla="val 3000"/>
+            </a:avLst>
           </a:prstGeom>
           <a:solidFill>
-            <a:srgbClr val="4285F4"/>
+            <a:srgbClr val="F8FAFC"/>
           </a:solidFill>
-          <a:ln>
-            <a:noFill/>
+          <a:ln w="15240">
+            <a:solidFill>
+              <a:srgbClr val="CBD5E1"/>
+            </a:solidFill>
           </a:ln>
         </p:spPr>
         <p:style>
@@ -8884,155 +7078,23 @@
       </p:sp>
       <p:sp>
         <p:nvSpPr>
-          <p:cNvPr id="7" name="TextBox 6"/>
-          <p:cNvSpPr txBox="1"/>
-          <p:nvPr/>
-        </p:nvSpPr>
-        <p:spPr>
-          <a:xfrm>
-            <a:off x="1051560" y="2286000"/>
-            <a:ext cx="4480560" cy="3886200"/>
+          <p:cNvPr id="7" name="Rectangle 6"/>
+          <p:cNvSpPr/>
+          <p:nvPr/>
+        </p:nvSpPr>
+        <p:spPr>
+          <a:xfrm>
+            <a:off x="731520" y="2057400"/>
+            <a:ext cx="2514600" cy="73152"/>
           </a:xfrm>
           <a:prstGeom prst="rect">
             <a:avLst/>
           </a:prstGeom>
-          <a:noFill/>
-        </p:spPr>
-        <p:txBody>
-          <a:bodyPr wrap="square" lIns="0" tIns="0" rIns="0" bIns="0">
-            <a:spAutoFit/>
-          </a:bodyPr>
-          <a:lstStyle/>
-          <a:p>
-            <a:pPr>
-              <a:spcAft>
-                <a:spcPts val="1200"/>
-              </a:spcAft>
-              <a:defRPr sz="1900" b="1">
-                <a:solidFill>
-                  <a:srgbClr val="F0F6FC"/>
-                </a:solidFill>
-              </a:defRPr>
-            </a:pPr>
-            <a:r>
-              <a:t>The Calibrated 100-Point Rubric</a:t>
-            </a:r>
-          </a:p>
-          <a:p>
-            <a:pPr>
-              <a:spcAft>
-                <a:spcPts val="800"/>
-              </a:spcAft>
-            </a:pPr>
-            <a:r>
-              <a:rPr b="1" sz="1400">
-                <a:solidFill>
-                  <a:srgbClr val="4285F4"/>
-                </a:solidFill>
-              </a:rPr>
-              <a:t>🧠 Algorithmic Optimality (35 pts): </a:t>
-            </a:r>
-            <a:r>
-              <a:rPr b="0" sz="1400">
-                <a:solidFill>
-                  <a:srgbClr val="F0F6FC"/>
-                </a:solidFill>
-              </a:rPr>
-              <a:t>Evaluates whether you selected the mathematically optimal paradigm (e.g. Hash Map vs. Sorting vs. Dynamic Programming).</a:t>
-            </a:r>
-          </a:p>
-          <a:p>
-            <a:pPr>
-              <a:spcAft>
-                <a:spcPts val="800"/>
-              </a:spcAft>
-            </a:pPr>
-            <a:r>
-              <a:rPr b="1" sz="1400">
-                <a:solidFill>
-                  <a:srgbClr val="4285F4"/>
-                </a:solidFill>
-              </a:rPr>
-              <a:t>⏱️ Time Complexity (25 pts): </a:t>
-            </a:r>
-            <a:r>
-              <a:rPr b="0" sz="1400">
-                <a:solidFill>
-                  <a:srgbClr val="F0F6FC"/>
-                </a:solidFill>
-              </a:rPr>
-              <a:t>Calculates Big-O distance between your approach and the theoretical lower bound.</a:t>
-            </a:r>
-          </a:p>
-          <a:p>
-            <a:pPr>
-              <a:spcAft>
-                <a:spcPts val="800"/>
-              </a:spcAft>
-            </a:pPr>
-            <a:r>
-              <a:rPr b="1" sz="1400">
-                <a:solidFill>
-                  <a:srgbClr val="4285F4"/>
-                </a:solidFill>
-              </a:rPr>
-              <a:t>💾 Space Complexity (20 pts): </a:t>
-            </a:r>
-            <a:r>
-              <a:rPr b="0" sz="1400">
-                <a:solidFill>
-                  <a:srgbClr val="F0F6FC"/>
-                </a:solidFill>
-              </a:rPr>
-              <a:t>Evaluates auxiliary heap and stack allocations vs. in-place pointer mutations.</a:t>
-            </a:r>
-          </a:p>
-          <a:p>
-            <a:pPr>
-              <a:spcAft>
-                <a:spcPts val="800"/>
-              </a:spcAft>
-            </a:pPr>
-            <a:r>
-              <a:rPr b="1" sz="1400">
-                <a:solidFill>
-                  <a:srgbClr val="4285F4"/>
-                </a:solidFill>
-              </a:rPr>
-              <a:t>🧹 Cleanliness &amp; Edge Cases (20 pts): </a:t>
-            </a:r>
-            <a:r>
-              <a:rPr b="0" sz="1400">
-                <a:solidFill>
-                  <a:srgbClr val="F0F6FC"/>
-                </a:solidFill>
-              </a:rPr>
-              <a:t>Checks variable naming, guard clauses, empty inputs, single elements, and integer overflow handling.</a:t>
-            </a:r>
-          </a:p>
-        </p:txBody>
-      </p:sp>
-      <p:sp>
-        <p:nvSpPr>
-          <p:cNvPr id="8" name="Rounded Rectangle 7"/>
-          <p:cNvSpPr/>
-          <p:nvPr/>
-        </p:nvSpPr>
-        <p:spPr>
-          <a:xfrm>
-            <a:off x="6217920" y="2011680"/>
-            <a:ext cx="5120640" cy="4297680"/>
-          </a:xfrm>
-          <a:prstGeom prst="roundRect">
-            <a:avLst/>
-          </a:prstGeom>
           <a:solidFill>
-            <a:srgbClr val="161B22"/>
+            <a:srgbClr val="2563EB"/>
           </a:solidFill>
-          <a:ln w="15240">
-            <a:solidFill>
-              <a:srgbClr val="30363D"/>
-            </a:solidFill>
+          <a:ln>
+            <a:noFill/>
           </a:ln>
         </p:spPr>
         <p:style>
@@ -9059,23 +7121,134 @@
       </p:sp>
       <p:sp>
         <p:nvSpPr>
+          <p:cNvPr id="8" name="TextBox 7"/>
+          <p:cNvSpPr txBox="1"/>
+          <p:nvPr/>
+        </p:nvSpPr>
+        <p:spPr>
+          <a:xfrm>
+            <a:off x="1024128" y="2313432"/>
+            <a:ext cx="1929384" cy="3886200"/>
+          </a:xfrm>
+          <a:prstGeom prst="rect">
+            <a:avLst/>
+          </a:prstGeom>
+          <a:noFill/>
+        </p:spPr>
+        <p:txBody>
+          <a:bodyPr wrap="square" lIns="0" tIns="0" rIns="0" bIns="0">
+            <a:spAutoFit/>
+          </a:bodyPr>
+          <a:lstStyle/>
+          <a:p>
+            <a:pPr>
+              <a:spcAft>
+                <a:spcPts val="1400"/>
+              </a:spcAft>
+              <a:defRPr sz="2100" b="1">
+                <a:solidFill>
+                  <a:srgbClr val="0F172A"/>
+                </a:solidFill>
+              </a:defRPr>
+            </a:pPr>
+            <a:r>
+              <a:t>Step 1: Write Code</a:t>
+            </a:r>
+          </a:p>
+          <a:p>
+            <a:pPr>
+              <a:spcAft>
+                <a:spcPts val="1100"/>
+              </a:spcAft>
+            </a:pPr>
+            <a:r>
+              <a:rPr b="1" sz="1500">
+                <a:solidFill>
+                  <a:srgbClr val="2563EB"/>
+                </a:solidFill>
+              </a:rPr>
+              <a:t>• On Web: </a:t>
+            </a:r>
+            <a:r>
+              <a:rPr b="0" sz="1500">
+                <a:solidFill>
+                  <a:srgbClr val="1E293B"/>
+                </a:solidFill>
+              </a:rPr>
+              <a:t>Click 'Analyze Code' on LeetCode or GFG.</a:t>
+            </a:r>
+          </a:p>
+          <a:p>
+            <a:pPr>
+              <a:spcAft>
+                <a:spcPts val="1100"/>
+              </a:spcAft>
+            </a:pPr>
+            <a:r>
+              <a:rPr b="1" sz="1500">
+                <a:solidFill>
+                  <a:srgbClr val="2563EB"/>
+                </a:solidFill>
+              </a:rPr>
+              <a:t>• On Desktop: </a:t>
+            </a:r>
+            <a:r>
+              <a:rPr b="0" sz="1500">
+                <a:solidFill>
+                  <a:srgbClr val="1E293B"/>
+                </a:solidFill>
+              </a:rPr>
+              <a:t>Press Ctrl+Alt+A in VS Code.</a:t>
+            </a:r>
+          </a:p>
+          <a:p>
+            <a:pPr>
+              <a:spcAft>
+                <a:spcPts val="1100"/>
+              </a:spcAft>
+            </a:pPr>
+            <a:r>
+              <a:rPr b="1" sz="1500">
+                <a:solidFill>
+                  <a:srgbClr val="2563EB"/>
+                </a:solidFill>
+              </a:rPr>
+              <a:t>• Auto-Read: </a:t>
+            </a:r>
+            <a:r>
+              <a:rPr b="0" sz="1500">
+                <a:solidFill>
+                  <a:srgbClr val="1E293B"/>
+                </a:solidFill>
+              </a:rPr>
+              <a:t>Extension grabs your code and problem title.</a:t>
+            </a:r>
+          </a:p>
+        </p:txBody>
+      </p:sp>
+      <p:sp>
+        <p:nvSpPr>
           <p:cNvPr id="9" name="Rounded Rectangle 8"/>
           <p:cNvSpPr/>
           <p:nvPr/>
         </p:nvSpPr>
         <p:spPr>
           <a:xfrm>
-            <a:off x="6217920" y="2011680"/>
-            <a:ext cx="5120640" cy="73152"/>
+            <a:off x="3465576" y="2057400"/>
+            <a:ext cx="2514600" cy="4297680"/>
           </a:xfrm>
           <a:prstGeom prst="roundRect">
-            <a:avLst/>
+            <a:avLst>
+              <a:gd name="adj" fmla="val 3000"/>
+            </a:avLst>
           </a:prstGeom>
           <a:solidFill>
-            <a:srgbClr val="FBBC05"/>
+            <a:srgbClr val="F8FAFC"/>
           </a:solidFill>
-          <a:ln>
-            <a:noFill/>
+          <a:ln w="15240">
+            <a:solidFill>
+              <a:srgbClr val="CBD5E1"/>
+            </a:solidFill>
           </a:ln>
         </p:spPr>
         <p:style>
@@ -9102,14 +7275,57 @@
       </p:sp>
       <p:sp>
         <p:nvSpPr>
-          <p:cNvPr id="10" name="TextBox 9"/>
+          <p:cNvPr id="10" name="Rectangle 9"/>
+          <p:cNvSpPr/>
+          <p:nvPr/>
+        </p:nvSpPr>
+        <p:spPr>
+          <a:xfrm>
+            <a:off x="3465576" y="2057400"/>
+            <a:ext cx="2514600" cy="73152"/>
+          </a:xfrm>
+          <a:prstGeom prst="rect">
+            <a:avLst/>
+          </a:prstGeom>
+          <a:solidFill>
+            <a:srgbClr val="059669"/>
+          </a:solidFill>
+          <a:ln>
+            <a:noFill/>
+          </a:ln>
+        </p:spPr>
+        <p:style>
+          <a:lnRef idx="1">
+            <a:schemeClr val="accent1"/>
+          </a:lnRef>
+          <a:fillRef idx="3">
+            <a:schemeClr val="accent1"/>
+          </a:fillRef>
+          <a:effectRef idx="2">
+            <a:schemeClr val="accent1"/>
+          </a:effectRef>
+          <a:fontRef idx="minor">
+            <a:schemeClr val="lt1"/>
+          </a:fontRef>
+        </p:style>
+        <p:txBody>
+          <a:bodyPr rtlCol="0" anchor="ctr"/>
+          <a:lstStyle/>
+          <a:p>
+            <a:pPr algn="ctr"/>
+          </a:p>
+        </p:txBody>
+      </p:sp>
+      <p:sp>
+        <p:nvSpPr>
+          <p:cNvPr id="11" name="TextBox 10"/>
           <p:cNvSpPr txBox="1"/>
           <p:nvPr/>
         </p:nvSpPr>
         <p:spPr>
           <a:xfrm>
-            <a:off x="6537960" y="2286000"/>
-            <a:ext cx="4480560" cy="3886200"/>
+            <a:off x="3758184" y="2313432"/>
+            <a:ext cx="1929384" cy="3886200"/>
           </a:xfrm>
           <a:prstGeom prst="rect">
             <a:avLst/>
@@ -9124,85 +7340,479 @@
           <a:p>
             <a:pPr>
               <a:spcAft>
-                <a:spcPts val="1200"/>
-              </a:spcAft>
-              <a:defRPr sz="1900" b="1">
-                <a:solidFill>
-                  <a:srgbClr val="F0F6FC"/>
+                <a:spcPts val="1400"/>
+              </a:spcAft>
+              <a:defRPr sz="2100" b="1">
+                <a:solidFill>
+                  <a:srgbClr val="0F172A"/>
                 </a:solidFill>
               </a:defRPr>
             </a:pPr>
             <a:r>
-              <a:t>3-Tier Socratic Progressive Hints</a:t>
-            </a:r>
-          </a:p>
-          <a:p>
-            <a:pPr>
-              <a:spcAft>
-                <a:spcPts val="800"/>
-              </a:spcAft>
-            </a:pPr>
-            <a:r>
-              <a:rPr b="1" sz="1400">
-                <a:solidFill>
-                  <a:srgbClr val="FBBC05"/>
-                </a:solidFill>
-              </a:rPr>
-              <a:t>Tier 1 - Structural Invariant: </a:t>
-            </a:r>
-            <a:r>
-              <a:rPr b="0" sz="1400">
-                <a:solidFill>
-                  <a:srgbClr val="F0F6FC"/>
-                </a:solidFill>
-              </a:rPr>
-              <a:t>Gives a subtle nudge without naming algorithms. Example: 'Notice that elements are already sorted in ascending order.'</a:t>
-            </a:r>
-          </a:p>
-          <a:p>
-            <a:pPr>
-              <a:spcAft>
-                <a:spcPts val="800"/>
-              </a:spcAft>
-            </a:pPr>
-            <a:r>
-              <a:rPr b="1" sz="1400">
-                <a:solidFill>
-                  <a:srgbClr val="FBBC05"/>
-                </a:solidFill>
-              </a:rPr>
-              <a:t>Tier 2 - Pattern Suggestion: </a:t>
-            </a:r>
-            <a:r>
-              <a:rPr b="0" sz="1400">
-                <a:solidFill>
-                  <a:srgbClr val="F0F6FC"/>
-                </a:solidFill>
-              </a:rPr>
-              <a:t>Suggests the applicable data structure or mental model. Example: 'Consider using a two-pointer inward scan from both ends.'</a:t>
-            </a:r>
-          </a:p>
-          <a:p>
-            <a:pPr>
-              <a:spcAft>
-                <a:spcPts val="800"/>
-              </a:spcAft>
-            </a:pPr>
-            <a:r>
-              <a:rPr b="1" sz="1400">
-                <a:solidFill>
-                  <a:srgbClr val="FBBC05"/>
-                </a:solidFill>
-              </a:rPr>
-              <a:t>Tier 3 - Concrete Blueprint: </a:t>
-            </a:r>
-            <a:r>
-              <a:rPr b="0" sz="1400">
-                <a:solidFill>
-                  <a:srgbClr val="F0F6FC"/>
-                </a:solidFill>
-              </a:rPr>
-              <a:t>Explains the exact state transitions step-by-step without giving away code, preserving the 'Aha!' moment for the student.</a:t>
+              <a:t>Step 2: AI Review</a:t>
+            </a:r>
+          </a:p>
+          <a:p>
+            <a:pPr>
+              <a:spcAft>
+                <a:spcPts val="1100"/>
+              </a:spcAft>
+            </a:pPr>
+            <a:r>
+              <a:rPr b="1" sz="1500">
+                <a:solidFill>
+                  <a:srgbClr val="059669"/>
+                </a:solidFill>
+              </a:rPr>
+              <a:t>• Fast Check: </a:t>
+            </a:r>
+            <a:r>
+              <a:rPr b="0" sz="1500">
+                <a:solidFill>
+                  <a:srgbClr val="1E293B"/>
+                </a:solidFill>
+              </a:rPr>
+              <a:t>Sent securely to Google Gemini Flash.</a:t>
+            </a:r>
+          </a:p>
+          <a:p>
+            <a:pPr>
+              <a:spcAft>
+                <a:spcPts val="1100"/>
+              </a:spcAft>
+            </a:pPr>
+            <a:r>
+              <a:rPr b="1" sz="1500">
+                <a:solidFill>
+                  <a:srgbClr val="059669"/>
+                </a:solidFill>
+              </a:rPr>
+              <a:t>• Score (0–100): </a:t>
+            </a:r>
+            <a:r>
+              <a:rPr b="0" sz="1500">
+                <a:solidFill>
+                  <a:srgbClr val="1E293B"/>
+                </a:solidFill>
+              </a:rPr>
+              <a:t>Grades Approach, Time, Space, and Style.</a:t>
+            </a:r>
+          </a:p>
+          <a:p>
+            <a:pPr>
+              <a:spcAft>
+                <a:spcPts val="1100"/>
+              </a:spcAft>
+            </a:pPr>
+            <a:r>
+              <a:rPr b="1" sz="1500">
+                <a:solidFill>
+                  <a:srgbClr val="059669"/>
+                </a:solidFill>
+              </a:rPr>
+              <a:t>• Big-O Check: </a:t>
+            </a:r>
+            <a:r>
+              <a:rPr b="0" sz="1500">
+                <a:solidFill>
+                  <a:srgbClr val="1E293B"/>
+                </a:solidFill>
+              </a:rPr>
+              <a:t>Compares your speed vs. best speed.</a:t>
+            </a:r>
+          </a:p>
+        </p:txBody>
+      </p:sp>
+      <p:sp>
+        <p:nvSpPr>
+          <p:cNvPr id="12" name="Rounded Rectangle 11"/>
+          <p:cNvSpPr/>
+          <p:nvPr/>
+        </p:nvSpPr>
+        <p:spPr>
+          <a:xfrm>
+            <a:off x="6199632" y="2057400"/>
+            <a:ext cx="2514600" cy="4297680"/>
+          </a:xfrm>
+          <a:prstGeom prst="roundRect">
+            <a:avLst>
+              <a:gd name="adj" fmla="val 3000"/>
+            </a:avLst>
+          </a:prstGeom>
+          <a:solidFill>
+            <a:srgbClr val="F8FAFC"/>
+          </a:solidFill>
+          <a:ln w="15240">
+            <a:solidFill>
+              <a:srgbClr val="CBD5E1"/>
+            </a:solidFill>
+          </a:ln>
+        </p:spPr>
+        <p:style>
+          <a:lnRef idx="1">
+            <a:schemeClr val="accent1"/>
+          </a:lnRef>
+          <a:fillRef idx="3">
+            <a:schemeClr val="accent1"/>
+          </a:fillRef>
+          <a:effectRef idx="2">
+            <a:schemeClr val="accent1"/>
+          </a:effectRef>
+          <a:fontRef idx="minor">
+            <a:schemeClr val="lt1"/>
+          </a:fontRef>
+        </p:style>
+        <p:txBody>
+          <a:bodyPr rtlCol="0" anchor="ctr"/>
+          <a:lstStyle/>
+          <a:p>
+            <a:pPr algn="ctr"/>
+          </a:p>
+        </p:txBody>
+      </p:sp>
+      <p:sp>
+        <p:nvSpPr>
+          <p:cNvPr id="13" name="Rectangle 12"/>
+          <p:cNvSpPr/>
+          <p:nvPr/>
+        </p:nvSpPr>
+        <p:spPr>
+          <a:xfrm>
+            <a:off x="6199632" y="2057400"/>
+            <a:ext cx="2514600" cy="73152"/>
+          </a:xfrm>
+          <a:prstGeom prst="rect">
+            <a:avLst/>
+          </a:prstGeom>
+          <a:solidFill>
+            <a:srgbClr val="D97706"/>
+          </a:solidFill>
+          <a:ln>
+            <a:noFill/>
+          </a:ln>
+        </p:spPr>
+        <p:style>
+          <a:lnRef idx="1">
+            <a:schemeClr val="accent1"/>
+          </a:lnRef>
+          <a:fillRef idx="3">
+            <a:schemeClr val="accent1"/>
+          </a:fillRef>
+          <a:effectRef idx="2">
+            <a:schemeClr val="accent1"/>
+          </a:effectRef>
+          <a:fontRef idx="minor">
+            <a:schemeClr val="lt1"/>
+          </a:fontRef>
+        </p:style>
+        <p:txBody>
+          <a:bodyPr rtlCol="0" anchor="ctr"/>
+          <a:lstStyle/>
+          <a:p>
+            <a:pPr algn="ctr"/>
+          </a:p>
+        </p:txBody>
+      </p:sp>
+      <p:sp>
+        <p:nvSpPr>
+          <p:cNvPr id="14" name="TextBox 13"/>
+          <p:cNvSpPr txBox="1"/>
+          <p:nvPr/>
+        </p:nvSpPr>
+        <p:spPr>
+          <a:xfrm>
+            <a:off x="6492240" y="2313432"/>
+            <a:ext cx="1929384" cy="3886200"/>
+          </a:xfrm>
+          <a:prstGeom prst="rect">
+            <a:avLst/>
+          </a:prstGeom>
+          <a:noFill/>
+        </p:spPr>
+        <p:txBody>
+          <a:bodyPr wrap="square" lIns="0" tIns="0" rIns="0" bIns="0">
+            <a:spAutoFit/>
+          </a:bodyPr>
+          <a:lstStyle/>
+          <a:p>
+            <a:pPr>
+              <a:spcAft>
+                <a:spcPts val="1400"/>
+              </a:spcAft>
+              <a:defRPr sz="2100" b="1">
+                <a:solidFill>
+                  <a:srgbClr val="0F172A"/>
+                </a:solidFill>
+              </a:defRPr>
+            </a:pPr>
+            <a:r>
+              <a:t>Step 3: Learn &amp; Fix</a:t>
+            </a:r>
+          </a:p>
+          <a:p>
+            <a:pPr>
+              <a:spcAft>
+                <a:spcPts val="1100"/>
+              </a:spcAft>
+            </a:pPr>
+            <a:r>
+              <a:rPr b="1" sz="1500">
+                <a:solidFill>
+                  <a:srgbClr val="D97706"/>
+                </a:solidFill>
+              </a:rPr>
+              <a:t>• Side Panel: </a:t>
+            </a:r>
+            <a:r>
+              <a:rPr b="0" sz="1500">
+                <a:solidFill>
+                  <a:srgbClr val="1E293B"/>
+                </a:solidFill>
+              </a:rPr>
+              <a:t>See exact bottlenecks right next to your code.</a:t>
+            </a:r>
+          </a:p>
+          <a:p>
+            <a:pPr>
+              <a:spcAft>
+                <a:spcPts val="1100"/>
+              </a:spcAft>
+            </a:pPr>
+            <a:r>
+              <a:rPr b="1" sz="1500">
+                <a:solidFill>
+                  <a:srgbClr val="D97706"/>
+                </a:solidFill>
+              </a:rPr>
+              <a:t>• 3-Step Hints: </a:t>
+            </a:r>
+            <a:r>
+              <a:rPr b="0" sz="1500">
+                <a:solidFill>
+                  <a:srgbClr val="1E293B"/>
+                </a:solidFill>
+              </a:rPr>
+              <a:t>Unlock hints one by one without spoilers.</a:t>
+            </a:r>
+          </a:p>
+          <a:p>
+            <a:pPr>
+              <a:spcAft>
+                <a:spcPts val="1100"/>
+              </a:spcAft>
+            </a:pPr>
+            <a:r>
+              <a:rPr b="1" sz="1500">
+                <a:solidFill>
+                  <a:srgbClr val="D97706"/>
+                </a:solidFill>
+              </a:rPr>
+              <a:t>• 1-Click Insert: </a:t>
+            </a:r>
+            <a:r>
+              <a:rPr b="0" sz="1500">
+                <a:solidFill>
+                  <a:srgbClr val="1E293B"/>
+                </a:solidFill>
+              </a:rPr>
+              <a:t>Insert optimal reference code when done.</a:t>
+            </a:r>
+          </a:p>
+        </p:txBody>
+      </p:sp>
+      <p:sp>
+        <p:nvSpPr>
+          <p:cNvPr id="15" name="Rounded Rectangle 14"/>
+          <p:cNvSpPr/>
+          <p:nvPr/>
+        </p:nvSpPr>
+        <p:spPr>
+          <a:xfrm>
+            <a:off x="8933688" y="2057400"/>
+            <a:ext cx="2514600" cy="4297680"/>
+          </a:xfrm>
+          <a:prstGeom prst="roundRect">
+            <a:avLst>
+              <a:gd name="adj" fmla="val 3000"/>
+            </a:avLst>
+          </a:prstGeom>
+          <a:solidFill>
+            <a:srgbClr val="F8FAFC"/>
+          </a:solidFill>
+          <a:ln w="15240">
+            <a:solidFill>
+              <a:srgbClr val="CBD5E1"/>
+            </a:solidFill>
+          </a:ln>
+        </p:spPr>
+        <p:style>
+          <a:lnRef idx="1">
+            <a:schemeClr val="accent1"/>
+          </a:lnRef>
+          <a:fillRef idx="3">
+            <a:schemeClr val="accent1"/>
+          </a:fillRef>
+          <a:effectRef idx="2">
+            <a:schemeClr val="accent1"/>
+          </a:effectRef>
+          <a:fontRef idx="minor">
+            <a:schemeClr val="lt1"/>
+          </a:fontRef>
+        </p:style>
+        <p:txBody>
+          <a:bodyPr rtlCol="0" anchor="ctr"/>
+          <a:lstStyle/>
+          <a:p>
+            <a:pPr algn="ctr"/>
+          </a:p>
+        </p:txBody>
+      </p:sp>
+      <p:sp>
+        <p:nvSpPr>
+          <p:cNvPr id="16" name="Rectangle 15"/>
+          <p:cNvSpPr/>
+          <p:nvPr/>
+        </p:nvSpPr>
+        <p:spPr>
+          <a:xfrm>
+            <a:off x="8933688" y="2057400"/>
+            <a:ext cx="2514600" cy="73152"/>
+          </a:xfrm>
+          <a:prstGeom prst="rect">
+            <a:avLst/>
+          </a:prstGeom>
+          <a:solidFill>
+            <a:srgbClr val="DC2626"/>
+          </a:solidFill>
+          <a:ln>
+            <a:noFill/>
+          </a:ln>
+        </p:spPr>
+        <p:style>
+          <a:lnRef idx="1">
+            <a:schemeClr val="accent1"/>
+          </a:lnRef>
+          <a:fillRef idx="3">
+            <a:schemeClr val="accent1"/>
+          </a:fillRef>
+          <a:effectRef idx="2">
+            <a:schemeClr val="accent1"/>
+          </a:effectRef>
+          <a:fontRef idx="minor">
+            <a:schemeClr val="lt1"/>
+          </a:fontRef>
+        </p:style>
+        <p:txBody>
+          <a:bodyPr rtlCol="0" anchor="ctr"/>
+          <a:lstStyle/>
+          <a:p>
+            <a:pPr algn="ctr"/>
+          </a:p>
+        </p:txBody>
+      </p:sp>
+      <p:sp>
+        <p:nvSpPr>
+          <p:cNvPr id="17" name="TextBox 16"/>
+          <p:cNvSpPr txBox="1"/>
+          <p:nvPr/>
+        </p:nvSpPr>
+        <p:spPr>
+          <a:xfrm>
+            <a:off x="9226296" y="2313432"/>
+            <a:ext cx="1929384" cy="3886200"/>
+          </a:xfrm>
+          <a:prstGeom prst="rect">
+            <a:avLst/>
+          </a:prstGeom>
+          <a:noFill/>
+        </p:spPr>
+        <p:txBody>
+          <a:bodyPr wrap="square" lIns="0" tIns="0" rIns="0" bIns="0">
+            <a:spAutoFit/>
+          </a:bodyPr>
+          <a:lstStyle/>
+          <a:p>
+            <a:pPr>
+              <a:spcAft>
+                <a:spcPts val="1400"/>
+              </a:spcAft>
+              <a:defRPr sz="2100" b="1">
+                <a:solidFill>
+                  <a:srgbClr val="0F172A"/>
+                </a:solidFill>
+              </a:defRPr>
+            </a:pPr>
+            <a:r>
+              <a:t>Step 4: Live Sync</a:t>
+            </a:r>
+          </a:p>
+          <a:p>
+            <a:pPr>
+              <a:spcAft>
+                <a:spcPts val="1100"/>
+              </a:spcAft>
+            </a:pPr>
+            <a:r>
+              <a:rPr b="1" sz="1500">
+                <a:solidFill>
+                  <a:srgbClr val="DC2626"/>
+                </a:solidFill>
+              </a:rPr>
+              <a:t>• Auto-Save: </a:t>
+            </a:r>
+            <a:r>
+              <a:rPr b="0" sz="1500">
+                <a:solidFill>
+                  <a:srgbClr val="1E293B"/>
+                </a:solidFill>
+              </a:rPr>
+              <a:t>Sent to Next.js API and Supabase DB.</a:t>
+            </a:r>
+          </a:p>
+          <a:p>
+            <a:pPr>
+              <a:spcAft>
+                <a:spcPts val="1100"/>
+              </a:spcAft>
+            </a:pPr>
+            <a:r>
+              <a:rPr b="1" sz="1500">
+                <a:solidFill>
+                  <a:srgbClr val="DC2626"/>
+                </a:solidFill>
+              </a:rPr>
+              <a:t>• Live Update: </a:t>
+            </a:r>
+            <a:r>
+              <a:rPr b="0" sz="1500">
+                <a:solidFill>
+                  <a:srgbClr val="1E293B"/>
+                </a:solidFill>
+              </a:rPr>
+              <a:t>Dashboard updates in 5 seconds automatically.</a:t>
+            </a:r>
+          </a:p>
+          <a:p>
+            <a:pPr>
+              <a:spcAft>
+                <a:spcPts val="1100"/>
+              </a:spcAft>
+            </a:pPr>
+            <a:r>
+              <a:rPr b="1" sz="1500">
+                <a:solidFill>
+                  <a:srgbClr val="DC2626"/>
+                </a:solidFill>
+              </a:rPr>
+              <a:t>• Revision Queue: </a:t>
+            </a:r>
+            <a:r>
+              <a:rPr b="0" sz="1500">
+                <a:solidFill>
+                  <a:srgbClr val="1E293B"/>
+                </a:solidFill>
+              </a:rPr>
+              <a:t>Schedules your next revision date.</a:t>
             </a:r>
           </a:p>
         </p:txBody>
@@ -9221,7 +7831,7 @@
     <p:bg>
       <p:bgPr>
         <a:solidFill>
-          <a:srgbClr val="0D1117"/>
+          <a:srgbClr val="FFFFFF"/>
         </a:solidFill>
         <a:effectLst/>
       </p:bgPr>
@@ -9241,8 +7851,8 @@
         </p:nvSpPr>
         <p:spPr>
           <a:xfrm>
-            <a:off x="731520" y="411480"/>
-            <a:ext cx="4114800" cy="365760"/>
+            <a:off x="731520" y="365760"/>
+            <a:ext cx="7315200" cy="320040"/>
           </a:xfrm>
           <a:prstGeom prst="rect">
             <a:avLst/>
@@ -9256,14 +7866,14 @@
           <a:lstStyle/>
           <a:p>
             <a:pPr>
-              <a:defRPr sz="1100" b="1">
-                <a:solidFill>
-                  <a:srgbClr val="4285F4"/>
+              <a:defRPr sz="1300" b="1">
+                <a:solidFill>
+                  <a:srgbClr val="DC2626"/>
                 </a:solidFill>
               </a:defRPr>
             </a:pPr>
             <a:r>
-              <a:t>SKILL INTELLIGENCE</a:t>
+              <a:t>SLIDE 8 • CURRENT LIMITATIONS</a:t>
             </a:r>
           </a:p>
         </p:txBody>
@@ -9276,8 +7886,8 @@
         </p:nvSpPr>
         <p:spPr>
           <a:xfrm>
-            <a:off x="731520" y="777240"/>
-            <a:ext cx="10698480" cy="731520"/>
+            <a:off x="731520" y="713232"/>
+            <a:ext cx="10698480" cy="640080"/>
           </a:xfrm>
           <a:prstGeom prst="rect">
             <a:avLst/>
@@ -9291,14 +7901,14 @@
           <a:lstStyle/>
           <a:p>
             <a:pPr>
-              <a:defRPr sz="2800" b="1">
-                <a:solidFill>
-                  <a:srgbClr val="F0F6FC"/>
+              <a:defRPr sz="3200" b="1">
+                <a:solidFill>
+                  <a:srgbClr val="0F172A"/>
                 </a:solidFill>
               </a:defRPr>
             </a:pPr>
             <a:r>
-              <a:t>14-Paradigm Competency Matrix &amp; Forgetting Curve</a:t>
+              <a:t>Current Limitations of the System</a:t>
             </a:r>
           </a:p>
         </p:txBody>
@@ -9311,7 +7921,7 @@
         </p:nvSpPr>
         <p:spPr>
           <a:xfrm>
-            <a:off x="731520" y="1508760"/>
+            <a:off x="731520" y="1353312"/>
             <a:ext cx="10698480" cy="411480"/>
           </a:xfrm>
           <a:prstGeom prst="rect">
@@ -9326,39 +7936,37 @@
           <a:lstStyle/>
           <a:p>
             <a:pPr>
-              <a:defRPr sz="1400">
-                <a:solidFill>
-                  <a:srgbClr val="8B949E"/>
+              <a:defRPr sz="1600">
+                <a:solidFill>
+                  <a:srgbClr val="475569"/>
                 </a:solidFill>
               </a:defRPr>
             </a:pPr>
             <a:r>
-              <a:t>Going beyond generic tags like 'Array' to diagnose exact algorithmic mental models.</a:t>
-            </a:r>
-          </a:p>
-        </p:txBody>
-      </p:sp>
-      <p:sp>
-        <p:nvSpPr>
-          <p:cNvPr id="5" name="Rounded Rectangle 4"/>
+              <a:t>Honest technical constraints of our current version and how we handle them.</a:t>
+            </a:r>
+          </a:p>
+        </p:txBody>
+      </p:sp>
+      <p:sp>
+        <p:nvSpPr>
+          <p:cNvPr id="5" name="Rectangle 4"/>
           <p:cNvSpPr/>
           <p:nvPr/>
         </p:nvSpPr>
         <p:spPr>
           <a:xfrm>
-            <a:off x="731520" y="2011680"/>
-            <a:ext cx="5120640" cy="4297680"/>
-          </a:xfrm>
-          <a:prstGeom prst="roundRect">
+            <a:off x="731520" y="1847088"/>
+            <a:ext cx="10725912" cy="18288"/>
+          </a:xfrm>
+          <a:prstGeom prst="rect">
             <a:avLst/>
           </a:prstGeom>
           <a:solidFill>
-            <a:srgbClr val="161B22"/>
+            <a:srgbClr val="CBD5E1"/>
           </a:solidFill>
-          <a:ln w="15240">
-            <a:solidFill>
-              <a:srgbClr val="30363D"/>
-            </a:solidFill>
+          <a:ln>
+            <a:noFill/>
           </a:ln>
         </p:spPr>
         <p:style>
@@ -9391,17 +7999,21 @@
         </p:nvSpPr>
         <p:spPr>
           <a:xfrm>
-            <a:off x="731520" y="2011680"/>
-            <a:ext cx="5120640" cy="73152"/>
+            <a:off x="731520" y="2057400"/>
+            <a:ext cx="3337560" cy="4297680"/>
           </a:xfrm>
           <a:prstGeom prst="roundRect">
-            <a:avLst/>
+            <a:avLst>
+              <a:gd name="adj" fmla="val 3000"/>
+            </a:avLst>
           </a:prstGeom>
           <a:solidFill>
-            <a:srgbClr val="4285F4"/>
+            <a:srgbClr val="F8FAFC"/>
           </a:solidFill>
-          <a:ln>
-            <a:noFill/>
+          <a:ln w="15240">
+            <a:solidFill>
+              <a:srgbClr val="CBD5E1"/>
+            </a:solidFill>
           </a:ln>
         </p:spPr>
         <p:style>
@@ -9428,132 +8040,23 @@
       </p:sp>
       <p:sp>
         <p:nvSpPr>
-          <p:cNvPr id="7" name="TextBox 6"/>
-          <p:cNvSpPr txBox="1"/>
-          <p:nvPr/>
-        </p:nvSpPr>
-        <p:spPr>
-          <a:xfrm>
-            <a:off x="1051560" y="2286000"/>
-            <a:ext cx="4480560" cy="3886200"/>
+          <p:cNvPr id="7" name="Rectangle 6"/>
+          <p:cNvSpPr/>
+          <p:nvPr/>
+        </p:nvSpPr>
+        <p:spPr>
+          <a:xfrm>
+            <a:off x="731520" y="2057400"/>
+            <a:ext cx="3337560" cy="73152"/>
           </a:xfrm>
           <a:prstGeom prst="rect">
             <a:avLst/>
           </a:prstGeom>
-          <a:noFill/>
-        </p:spPr>
-        <p:txBody>
-          <a:bodyPr wrap="square" lIns="0" tIns="0" rIns="0" bIns="0">
-            <a:spAutoFit/>
-          </a:bodyPr>
-          <a:lstStyle/>
-          <a:p>
-            <a:pPr>
-              <a:spcAft>
-                <a:spcPts val="1200"/>
-              </a:spcAft>
-              <a:defRPr sz="1900" b="1">
-                <a:solidFill>
-                  <a:srgbClr val="F0F6FC"/>
-                </a:solidFill>
-              </a:defRPr>
-            </a:pPr>
-            <a:r>
-              <a:t>14 Foundational Interview Archetypes</a:t>
-            </a:r>
-          </a:p>
-          <a:p>
-            <a:pPr>
-              <a:spcAft>
-                <a:spcPts val="800"/>
-              </a:spcAft>
-            </a:pPr>
-            <a:r>
-              <a:rPr b="1" sz="1400">
-                <a:solidFill>
-                  <a:srgbClr val="4285F4"/>
-                </a:solidFill>
-              </a:rPr>
-              <a:t>Diagnostic Mapping: </a:t>
-            </a:r>
-            <a:r>
-              <a:rPr b="0" sz="1400">
-                <a:solidFill>
-                  <a:srgbClr val="F0F6FC"/>
-                </a:solidFill>
-              </a:rPr>
-              <a:t>Tracks Two Pointers, Sliding Window, Monotonic Stack, In-place Reversal, Fast &amp; Slow Pointers, Two Heaps, Subsets, Binary Search, Top K, Knapsack, and Graph BFS/DFS.</a:t>
-            </a:r>
-          </a:p>
-          <a:p>
-            <a:pPr>
-              <a:spcAft>
-                <a:spcPts val="800"/>
-              </a:spcAft>
-            </a:pPr>
-            <a:r>
-              <a:rPr b="1" sz="1400">
-                <a:solidFill>
-                  <a:srgbClr val="4285F4"/>
-                </a:solidFill>
-              </a:rPr>
-              <a:t>Blind-Spot Detection: </a:t>
-            </a:r>
-            <a:r>
-              <a:rPr b="0" sz="1400">
-                <a:solidFill>
-                  <a:srgbClr val="F0F6FC"/>
-                </a:solidFill>
-              </a:rPr>
-              <a:t>Identifies patterns where your scores drop below 60% or patterns you haven't touched in weeks.</a:t>
-            </a:r>
-          </a:p>
-          <a:p>
-            <a:pPr>
-              <a:spcAft>
-                <a:spcPts val="800"/>
-              </a:spcAft>
-            </a:pPr>
-            <a:r>
-              <a:rPr b="1" sz="1400">
-                <a:solidFill>
-                  <a:srgbClr val="4285F4"/>
-                </a:solidFill>
-              </a:rPr>
-              <a:t>Readiness Gauge (0-100%): </a:t>
-            </a:r>
-            <a:r>
-              <a:rPr b="0" sz="1400">
-                <a:solidFill>
-                  <a:srgbClr val="F0F6FC"/>
-                </a:solidFill>
-              </a:rPr>
-              <a:t>Computes an empirical FAANG/Tier-1 interview readiness index updated with every submission.</a:t>
-            </a:r>
-          </a:p>
-        </p:txBody>
-      </p:sp>
-      <p:sp>
-        <p:nvSpPr>
-          <p:cNvPr id="8" name="Rounded Rectangle 7"/>
-          <p:cNvSpPr/>
-          <p:nvPr/>
-        </p:nvSpPr>
-        <p:spPr>
-          <a:xfrm>
-            <a:off x="6217920" y="2011680"/>
-            <a:ext cx="5120640" cy="4297680"/>
-          </a:xfrm>
-          <a:prstGeom prst="roundRect">
-            <a:avLst/>
-          </a:prstGeom>
           <a:solidFill>
-            <a:srgbClr val="161B22"/>
+            <a:srgbClr val="DC2626"/>
           </a:solidFill>
-          <a:ln w="15240">
-            <a:solidFill>
-              <a:srgbClr val="30363D"/>
-            </a:solidFill>
+          <a:ln>
+            <a:noFill/>
           </a:ln>
         </p:spPr>
         <p:style>
@@ -9580,23 +8083,134 @@
       </p:sp>
       <p:sp>
         <p:nvSpPr>
+          <p:cNvPr id="8" name="TextBox 7"/>
+          <p:cNvSpPr txBox="1"/>
+          <p:nvPr/>
+        </p:nvSpPr>
+        <p:spPr>
+          <a:xfrm>
+            <a:off x="1024128" y="2313432"/>
+            <a:ext cx="2752344" cy="3886200"/>
+          </a:xfrm>
+          <a:prstGeom prst="rect">
+            <a:avLst/>
+          </a:prstGeom>
+          <a:noFill/>
+        </p:spPr>
+        <p:txBody>
+          <a:bodyPr wrap="square" lIns="0" tIns="0" rIns="0" bIns="0">
+            <a:spAutoFit/>
+          </a:bodyPr>
+          <a:lstStyle/>
+          <a:p>
+            <a:pPr>
+              <a:spcAft>
+                <a:spcPts val="1400"/>
+              </a:spcAft>
+              <a:defRPr sz="2100" b="1">
+                <a:solidFill>
+                  <a:srgbClr val="0F172A"/>
+                </a:solidFill>
+              </a:defRPr>
+            </a:pPr>
+            <a:r>
+              <a:t>1. Free API Speed Limit</a:t>
+            </a:r>
+          </a:p>
+          <a:p>
+            <a:pPr>
+              <a:spcAft>
+                <a:spcPts val="1100"/>
+              </a:spcAft>
+            </a:pPr>
+            <a:r>
+              <a:rPr b="1" sz="1550">
+                <a:solidFill>
+                  <a:srgbClr val="DC2626"/>
+                </a:solidFill>
+              </a:rPr>
+              <a:t>• The Limit: </a:t>
+            </a:r>
+            <a:r>
+              <a:rPr b="0" sz="1550">
+                <a:solidFill>
+                  <a:srgbClr val="1E293B"/>
+                </a:solidFill>
+              </a:rPr>
+              <a:t>Google's free Gemini API allows 15 requests per minute per key.</a:t>
+            </a:r>
+          </a:p>
+          <a:p>
+            <a:pPr>
+              <a:spcAft>
+                <a:spcPts val="1100"/>
+              </a:spcAft>
+            </a:pPr>
+            <a:r>
+              <a:rPr b="1" sz="1550">
+                <a:solidFill>
+                  <a:srgbClr val="DC2626"/>
+                </a:solidFill>
+              </a:rPr>
+              <a:t>• When It Matters: </a:t>
+            </a:r>
+            <a:r>
+              <a:rPr b="0" sz="1550">
+                <a:solidFill>
+                  <a:srgbClr val="1E293B"/>
+                </a:solidFill>
+              </a:rPr>
+              <a:t>If 50 students use the exact same API key at once, it will slow down.</a:t>
+            </a:r>
+          </a:p>
+          <a:p>
+            <a:pPr>
+              <a:spcAft>
+                <a:spcPts val="1100"/>
+              </a:spcAft>
+            </a:pPr>
+            <a:r>
+              <a:rPr b="1" sz="1550">
+                <a:solidFill>
+                  <a:srgbClr val="DC2626"/>
+                </a:solidFill>
+              </a:rPr>
+              <a:t>• How We Handle It: </a:t>
+            </a:r>
+            <a:r>
+              <a:rPr b="0" sz="1550">
+                <a:solidFill>
+                  <a:srgbClr val="1E293B"/>
+                </a:solidFill>
+              </a:rPr>
+              <a:t>Each student enters their own free personal API key in settings.</a:t>
+            </a:r>
+          </a:p>
+        </p:txBody>
+      </p:sp>
+      <p:sp>
+        <p:nvSpPr>
           <p:cNvPr id="9" name="Rounded Rectangle 8"/>
           <p:cNvSpPr/>
           <p:nvPr/>
         </p:nvSpPr>
         <p:spPr>
           <a:xfrm>
-            <a:off x="6217920" y="2011680"/>
-            <a:ext cx="5120640" cy="73152"/>
+            <a:off x="4425696" y="2057400"/>
+            <a:ext cx="3337560" cy="4297680"/>
           </a:xfrm>
           <a:prstGeom prst="roundRect">
-            <a:avLst/>
+            <a:avLst>
+              <a:gd name="adj" fmla="val 3000"/>
+            </a:avLst>
           </a:prstGeom>
           <a:solidFill>
-            <a:srgbClr val="34A853"/>
+            <a:srgbClr val="F8FAFC"/>
           </a:solidFill>
-          <a:ln>
-            <a:noFill/>
+          <a:ln w="15240">
+            <a:solidFill>
+              <a:srgbClr val="CBD5E1"/>
+            </a:solidFill>
           </a:ln>
         </p:spPr>
         <p:style>
@@ -9623,14 +8237,57 @@
       </p:sp>
       <p:sp>
         <p:nvSpPr>
-          <p:cNvPr id="10" name="TextBox 9"/>
+          <p:cNvPr id="10" name="Rectangle 9"/>
+          <p:cNvSpPr/>
+          <p:nvPr/>
+        </p:nvSpPr>
+        <p:spPr>
+          <a:xfrm>
+            <a:off x="4425696" y="2057400"/>
+            <a:ext cx="3337560" cy="73152"/>
+          </a:xfrm>
+          <a:prstGeom prst="rect">
+            <a:avLst/>
+          </a:prstGeom>
+          <a:solidFill>
+            <a:srgbClr val="D97706"/>
+          </a:solidFill>
+          <a:ln>
+            <a:noFill/>
+          </a:ln>
+        </p:spPr>
+        <p:style>
+          <a:lnRef idx="1">
+            <a:schemeClr val="accent1"/>
+          </a:lnRef>
+          <a:fillRef idx="3">
+            <a:schemeClr val="accent1"/>
+          </a:fillRef>
+          <a:effectRef idx="2">
+            <a:schemeClr val="accent1"/>
+          </a:effectRef>
+          <a:fontRef idx="minor">
+            <a:schemeClr val="lt1"/>
+          </a:fontRef>
+        </p:style>
+        <p:txBody>
+          <a:bodyPr rtlCol="0" anchor="ctr"/>
+          <a:lstStyle/>
+          <a:p>
+            <a:pPr algn="ctr"/>
+          </a:p>
+        </p:txBody>
+      </p:sp>
+      <p:sp>
+        <p:nvSpPr>
+          <p:cNvPr id="11" name="TextBox 10"/>
           <p:cNvSpPr txBox="1"/>
           <p:nvPr/>
         </p:nvSpPr>
         <p:spPr>
           <a:xfrm>
-            <a:off x="6537960" y="2286000"/>
-            <a:ext cx="4480560" cy="3886200"/>
+            <a:off x="4718304" y="2313432"/>
+            <a:ext cx="2752344" cy="3886200"/>
           </a:xfrm>
           <a:prstGeom prst="rect">
             <a:avLst/>
@@ -9645,85 +8302,282 @@
           <a:p>
             <a:pPr>
               <a:spcAft>
-                <a:spcPts val="1200"/>
-              </a:spcAft>
-              <a:defRPr sz="1900" b="1">
-                <a:solidFill>
-                  <a:srgbClr val="F0F6FC"/>
+                <a:spcPts val="1400"/>
+              </a:spcAft>
+              <a:defRPr sz="2100" b="1">
+                <a:solidFill>
+                  <a:srgbClr val="0F172A"/>
                 </a:solidFill>
               </a:defRPr>
             </a:pPr>
             <a:r>
-              <a:t>Ebbinghaus Spaced Repetition Engine</a:t>
-            </a:r>
-          </a:p>
-          <a:p>
-            <a:pPr>
-              <a:spcAft>
-                <a:spcPts val="800"/>
-              </a:spcAft>
-            </a:pPr>
-            <a:r>
-              <a:rPr b="1" sz="1400">
-                <a:solidFill>
-                  <a:srgbClr val="34A853"/>
-                </a:solidFill>
-              </a:rPr>
-              <a:t>The Decay Formula: </a:t>
-            </a:r>
-            <a:r>
-              <a:rPr b="0" sz="1400">
-                <a:solidFill>
-                  <a:srgbClr val="F0F6FC"/>
-                </a:solidFill>
-              </a:rPr>
-              <a:t>Decay % = min(100, Days Elapsed × 16 - Score Bonus). Models how fast memories fade without deliberate recall.</a:t>
-            </a:r>
-          </a:p>
-          <a:p>
-            <a:pPr>
-              <a:spcAft>
-                <a:spcPts val="800"/>
-              </a:spcAft>
-            </a:pPr>
-            <a:r>
-              <a:rPr b="1" sz="1400">
-                <a:solidFill>
-                  <a:srgbClr val="34A853"/>
-                </a:solidFill>
-              </a:rPr>
-              <a:t>Urgency Tiers: </a:t>
-            </a:r>
-            <a:r>
-              <a:rPr b="0" sz="1400">
-                <a:solidFill>
-                  <a:srgbClr val="F0F6FC"/>
-                </a:solidFill>
-              </a:rPr>
-              <a:t>Automatically classifies solved problems into: Due Today (≥65% decay), Upcoming (30-64%), and Mastered (&lt;30%).</a:t>
-            </a:r>
-          </a:p>
-          <a:p>
-            <a:pPr>
-              <a:spcAft>
-                <a:spcPts val="800"/>
-              </a:spcAft>
-            </a:pPr>
-            <a:r>
-              <a:rPr b="1" sz="1400">
-                <a:solidFill>
-                  <a:srgbClr val="34A853"/>
-                </a:solidFill>
-              </a:rPr>
-              <a:t>Targeted Repetition: </a:t>
-            </a:r>
-            <a:r>
-              <a:rPr b="0" sz="1400">
-                <a:solidFill>
-                  <a:srgbClr val="F0F6FC"/>
-                </a:solidFill>
-              </a:rPr>
-              <a:t>Prompts you to re-solve key patterns right before memory extinction occurs, locking concepts into long-term memory.</a:t>
+              <a:t>2. Internet Needed for AI</a:t>
+            </a:r>
+          </a:p>
+          <a:p>
+            <a:pPr>
+              <a:spcAft>
+                <a:spcPts val="1100"/>
+              </a:spcAft>
+            </a:pPr>
+            <a:r>
+              <a:rPr b="1" sz="1550">
+                <a:solidFill>
+                  <a:srgbClr val="D97706"/>
+                </a:solidFill>
+              </a:rPr>
+              <a:t>• The Limit: </a:t>
+            </a:r>
+            <a:r>
+              <a:rPr b="0" sz="1550">
+                <a:solidFill>
+                  <a:srgbClr val="1E293B"/>
+                </a:solidFill>
+              </a:rPr>
+              <a:t>Generating a new AI code review requires an active internet connection.</a:t>
+            </a:r>
+          </a:p>
+          <a:p>
+            <a:pPr>
+              <a:spcAft>
+                <a:spcPts val="1100"/>
+              </a:spcAft>
+            </a:pPr>
+            <a:r>
+              <a:rPr b="1" sz="1550">
+                <a:solidFill>
+                  <a:srgbClr val="D97706"/>
+                </a:solidFill>
+              </a:rPr>
+              <a:t>• When It Matters: </a:t>
+            </a:r>
+            <a:r>
+              <a:rPr b="0" sz="1550">
+                <a:solidFill>
+                  <a:srgbClr val="1E293B"/>
+                </a:solidFill>
+              </a:rPr>
+              <a:t>In offline college exam halls without internet, live AI calls cannot run.</a:t>
+            </a:r>
+          </a:p>
+          <a:p>
+            <a:pPr>
+              <a:spcAft>
+                <a:spcPts val="1100"/>
+              </a:spcAft>
+            </a:pPr>
+            <a:r>
+              <a:rPr b="1" sz="1550">
+                <a:solidFill>
+                  <a:srgbClr val="D97706"/>
+                </a:solidFill>
+              </a:rPr>
+              <a:t>• How We Handle It: </a:t>
+            </a:r>
+            <a:r>
+              <a:rPr b="0" sz="1550">
+                <a:solidFill>
+                  <a:srgbClr val="1E293B"/>
+                </a:solidFill>
+              </a:rPr>
+              <a:t>The dashboard and past saved reviews still work 100% offline via Local JSON.</a:t>
+            </a:r>
+          </a:p>
+        </p:txBody>
+      </p:sp>
+      <p:sp>
+        <p:nvSpPr>
+          <p:cNvPr id="12" name="Rounded Rectangle 11"/>
+          <p:cNvSpPr/>
+          <p:nvPr/>
+        </p:nvSpPr>
+        <p:spPr>
+          <a:xfrm>
+            <a:off x="8119872" y="2057400"/>
+            <a:ext cx="3337560" cy="4297680"/>
+          </a:xfrm>
+          <a:prstGeom prst="roundRect">
+            <a:avLst>
+              <a:gd name="adj" fmla="val 3000"/>
+            </a:avLst>
+          </a:prstGeom>
+          <a:solidFill>
+            <a:srgbClr val="F8FAFC"/>
+          </a:solidFill>
+          <a:ln w="15240">
+            <a:solidFill>
+              <a:srgbClr val="CBD5E1"/>
+            </a:solidFill>
+          </a:ln>
+        </p:spPr>
+        <p:style>
+          <a:lnRef idx="1">
+            <a:schemeClr val="accent1"/>
+          </a:lnRef>
+          <a:fillRef idx="3">
+            <a:schemeClr val="accent1"/>
+          </a:fillRef>
+          <a:effectRef idx="2">
+            <a:schemeClr val="accent1"/>
+          </a:effectRef>
+          <a:fontRef idx="minor">
+            <a:schemeClr val="lt1"/>
+          </a:fontRef>
+        </p:style>
+        <p:txBody>
+          <a:bodyPr rtlCol="0" anchor="ctr"/>
+          <a:lstStyle/>
+          <a:p>
+            <a:pPr algn="ctr"/>
+          </a:p>
+        </p:txBody>
+      </p:sp>
+      <p:sp>
+        <p:nvSpPr>
+          <p:cNvPr id="13" name="Rectangle 12"/>
+          <p:cNvSpPr/>
+          <p:nvPr/>
+        </p:nvSpPr>
+        <p:spPr>
+          <a:xfrm>
+            <a:off x="8119872" y="2057400"/>
+            <a:ext cx="3337560" cy="73152"/>
+          </a:xfrm>
+          <a:prstGeom prst="rect">
+            <a:avLst/>
+          </a:prstGeom>
+          <a:solidFill>
+            <a:srgbClr val="2563EB"/>
+          </a:solidFill>
+          <a:ln>
+            <a:noFill/>
+          </a:ln>
+        </p:spPr>
+        <p:style>
+          <a:lnRef idx="1">
+            <a:schemeClr val="accent1"/>
+          </a:lnRef>
+          <a:fillRef idx="3">
+            <a:schemeClr val="accent1"/>
+          </a:fillRef>
+          <a:effectRef idx="2">
+            <a:schemeClr val="accent1"/>
+          </a:effectRef>
+          <a:fontRef idx="minor">
+            <a:schemeClr val="lt1"/>
+          </a:fontRef>
+        </p:style>
+        <p:txBody>
+          <a:bodyPr rtlCol="0" anchor="ctr"/>
+          <a:lstStyle/>
+          <a:p>
+            <a:pPr algn="ctr"/>
+          </a:p>
+        </p:txBody>
+      </p:sp>
+      <p:sp>
+        <p:nvSpPr>
+          <p:cNvPr id="14" name="TextBox 13"/>
+          <p:cNvSpPr txBox="1"/>
+          <p:nvPr/>
+        </p:nvSpPr>
+        <p:spPr>
+          <a:xfrm>
+            <a:off x="8412480" y="2313432"/>
+            <a:ext cx="2752344" cy="3886200"/>
+          </a:xfrm>
+          <a:prstGeom prst="rect">
+            <a:avLst/>
+          </a:prstGeom>
+          <a:noFill/>
+        </p:spPr>
+        <p:txBody>
+          <a:bodyPr wrap="square" lIns="0" tIns="0" rIns="0" bIns="0">
+            <a:spAutoFit/>
+          </a:bodyPr>
+          <a:lstStyle/>
+          <a:p>
+            <a:pPr>
+              <a:spcAft>
+                <a:spcPts val="1400"/>
+              </a:spcAft>
+              <a:defRPr sz="2100" b="1">
+                <a:solidFill>
+                  <a:srgbClr val="0F172A"/>
+                </a:solidFill>
+              </a:defRPr>
+            </a:pPr>
+            <a:r>
+              <a:t>3. Website Layout Updates</a:t>
+            </a:r>
+          </a:p>
+          <a:p>
+            <a:pPr>
+              <a:spcAft>
+                <a:spcPts val="1100"/>
+              </a:spcAft>
+            </a:pPr>
+            <a:r>
+              <a:rPr b="1" sz="1550">
+                <a:solidFill>
+                  <a:srgbClr val="2563EB"/>
+                </a:solidFill>
+              </a:rPr>
+              <a:t>• The Limit: </a:t>
+            </a:r>
+            <a:r>
+              <a:rPr b="0" sz="1550">
+                <a:solidFill>
+                  <a:srgbClr val="1E293B"/>
+                </a:solidFill>
+              </a:rPr>
+              <a:t>Reading problem titles and difficulty relies on webpage layout tags.</a:t>
+            </a:r>
+          </a:p>
+          <a:p>
+            <a:pPr>
+              <a:spcAft>
+                <a:spcPts val="1100"/>
+              </a:spcAft>
+            </a:pPr>
+            <a:r>
+              <a:rPr b="1" sz="1550">
+                <a:solidFill>
+                  <a:srgbClr val="2563EB"/>
+                </a:solidFill>
+              </a:rPr>
+              <a:t>• When It Matters: </a:t>
+            </a:r>
+            <a:r>
+              <a:rPr b="0" sz="1550">
+                <a:solidFill>
+                  <a:srgbClr val="1E293B"/>
+                </a:solidFill>
+              </a:rPr>
+              <a:t>If LeetCode redesigns its webpage, title detection may need an update.</a:t>
+            </a:r>
+          </a:p>
+          <a:p>
+            <a:pPr>
+              <a:spcAft>
+                <a:spcPts val="1100"/>
+              </a:spcAft>
+            </a:pPr>
+            <a:r>
+              <a:rPr b="1" sz="1550">
+                <a:solidFill>
+                  <a:srgbClr val="2563EB"/>
+                </a:solidFill>
+              </a:rPr>
+              <a:t>• How We Handle It: </a:t>
+            </a:r>
+            <a:r>
+              <a:rPr b="0" sz="1550">
+                <a:solidFill>
+                  <a:srgbClr val="1E293B"/>
+                </a:solidFill>
+              </a:rPr>
+              <a:t>We backup-read the problem name directly from the page URL.</a:t>
             </a:r>
           </a:p>
         </p:txBody>
@@ -9742,7 +8596,7 @@
     <p:bg>
       <p:bgPr>
         <a:solidFill>
-          <a:srgbClr val="0D1117"/>
+          <a:srgbClr val="FFFFFF"/>
         </a:solidFill>
         <a:effectLst/>
       </p:bgPr>
@@ -9762,8 +8616,8 @@
         </p:nvSpPr>
         <p:spPr>
           <a:xfrm>
-            <a:off x="731520" y="411480"/>
-            <a:ext cx="4114800" cy="365760"/>
+            <a:off x="731520" y="365760"/>
+            <a:ext cx="7315200" cy="320040"/>
           </a:xfrm>
           <a:prstGeom prst="rect">
             <a:avLst/>
@@ -9777,14 +8631,14 @@
           <a:lstStyle/>
           <a:p>
             <a:pPr>
-              <a:defRPr sz="1100" b="1">
-                <a:solidFill>
-                  <a:srgbClr val="4285F4"/>
+              <a:defRPr sz="1300" b="1">
+                <a:solidFill>
+                  <a:srgbClr val="059669"/>
                 </a:solidFill>
               </a:defRPr>
             </a:pPr>
             <a:r>
-              <a:t>ADVANCED FEATURES</a:t>
+              <a:t>SLIDE 9 • FUTURE SCOPE</a:t>
             </a:r>
           </a:p>
         </p:txBody>
@@ -9797,8 +8651,8 @@
         </p:nvSpPr>
         <p:spPr>
           <a:xfrm>
-            <a:off x="731520" y="777240"/>
-            <a:ext cx="10698480" cy="731520"/>
+            <a:off x="731520" y="713232"/>
+            <a:ext cx="10698480" cy="640080"/>
           </a:xfrm>
           <a:prstGeom prst="rect">
             <a:avLst/>
@@ -9812,14 +8666,14 @@
           <a:lstStyle/>
           <a:p>
             <a:pPr>
-              <a:defRPr sz="2800" b="1">
-                <a:solidFill>
-                  <a:srgbClr val="F0F6FC"/>
+              <a:defRPr sz="3200" b="1">
+                <a:solidFill>
+                  <a:srgbClr val="0F172A"/>
                 </a:solidFill>
               </a:defRPr>
             </a:pPr>
             <a:r>
-              <a:t>Senior Follow-Up Curveballs &amp; Verified Portfolio</a:t>
+              <a:t>Future Scope &amp; Next Phase Upgrades</a:t>
             </a:r>
           </a:p>
         </p:txBody>
@@ -9832,7 +8686,7 @@
         </p:nvSpPr>
         <p:spPr>
           <a:xfrm>
-            <a:off x="731520" y="1508760"/>
+            <a:off x="731520" y="1353312"/>
             <a:ext cx="10698480" cy="411480"/>
           </a:xfrm>
           <a:prstGeom prst="rect">
@@ -9847,39 +8701,37 @@
           <a:lstStyle/>
           <a:p>
             <a:pPr>
-              <a:defRPr sz="1400">
-                <a:solidFill>
-                  <a:srgbClr val="8B949E"/>
+              <a:defRPr sz="1600">
+                <a:solidFill>
+                  <a:srgbClr val="475569"/>
                 </a:solidFill>
               </a:defRPr>
             </a:pPr>
             <a:r>
-              <a:t>Preparing candidates for real senior interview scenarios and showcasing verifiable proof of competency.</a:t>
-            </a:r>
-          </a:p>
-        </p:txBody>
-      </p:sp>
-      <p:sp>
-        <p:nvSpPr>
-          <p:cNvPr id="5" name="Rounded Rectangle 4"/>
+              <a:t>Upcoming features to turn AlgoPulse into a complete career and classroom platform.</a:t>
+            </a:r>
+          </a:p>
+        </p:txBody>
+      </p:sp>
+      <p:sp>
+        <p:nvSpPr>
+          <p:cNvPr id="5" name="Rectangle 4"/>
           <p:cNvSpPr/>
           <p:nvPr/>
         </p:nvSpPr>
         <p:spPr>
           <a:xfrm>
-            <a:off x="731520" y="2011680"/>
-            <a:ext cx="5120640" cy="4297680"/>
-          </a:xfrm>
-          <a:prstGeom prst="roundRect">
+            <a:off x="731520" y="1847088"/>
+            <a:ext cx="10725912" cy="18288"/>
+          </a:xfrm>
+          <a:prstGeom prst="rect">
             <a:avLst/>
           </a:prstGeom>
           <a:solidFill>
-            <a:srgbClr val="161B22"/>
+            <a:srgbClr val="CBD5E1"/>
           </a:solidFill>
-          <a:ln w="15240">
-            <a:solidFill>
-              <a:srgbClr val="30363D"/>
-            </a:solidFill>
+          <a:ln>
+            <a:noFill/>
           </a:ln>
         </p:spPr>
         <p:style>
@@ -9912,17 +8764,21 @@
         </p:nvSpPr>
         <p:spPr>
           <a:xfrm>
-            <a:off x="731520" y="2011680"/>
-            <a:ext cx="5120640" cy="73152"/>
+            <a:off x="731520" y="2057400"/>
+            <a:ext cx="3337560" cy="4297680"/>
           </a:xfrm>
           <a:prstGeom prst="roundRect">
-            <a:avLst/>
+            <a:avLst>
+              <a:gd name="adj" fmla="val 3000"/>
+            </a:avLst>
           </a:prstGeom>
           <a:solidFill>
-            <a:srgbClr val="EA4335"/>
+            <a:srgbClr val="F8FAFC"/>
           </a:solidFill>
-          <a:ln>
-            <a:noFill/>
+          <a:ln w="15240">
+            <a:solidFill>
+              <a:srgbClr val="CBD5E1"/>
+            </a:solidFill>
           </a:ln>
         </p:spPr>
         <p:style>
@@ -9949,155 +8805,23 @@
       </p:sp>
       <p:sp>
         <p:nvSpPr>
-          <p:cNvPr id="7" name="TextBox 6"/>
-          <p:cNvSpPr txBox="1"/>
-          <p:nvPr/>
-        </p:nvSpPr>
-        <p:spPr>
-          <a:xfrm>
-            <a:off x="1051560" y="2286000"/>
-            <a:ext cx="4480560" cy="3886200"/>
+          <p:cNvPr id="7" name="Rectangle 6"/>
+          <p:cNvSpPr/>
+          <p:nvPr/>
+        </p:nvSpPr>
+        <p:spPr>
+          <a:xfrm>
+            <a:off x="731520" y="2057400"/>
+            <a:ext cx="3337560" cy="73152"/>
           </a:xfrm>
           <a:prstGeom prst="rect">
             <a:avLst/>
           </a:prstGeom>
-          <a:noFill/>
-        </p:spPr>
-        <p:txBody>
-          <a:bodyPr wrap="square" lIns="0" tIns="0" rIns="0" bIns="0">
-            <a:spAutoFit/>
-          </a:bodyPr>
-          <a:lstStyle/>
-          <a:p>
-            <a:pPr>
-              <a:spcAft>
-                <a:spcPts val="1200"/>
-              </a:spcAft>
-              <a:defRPr sz="1900" b="1">
-                <a:solidFill>
-                  <a:srgbClr val="F0F6FC"/>
-                </a:solidFill>
-              </a:defRPr>
-            </a:pPr>
-            <a:r>
-              <a:t>Senior Interviewer Follow-Up Curveballs</a:t>
-            </a:r>
-          </a:p>
-          <a:p>
-            <a:pPr>
-              <a:spcAft>
-                <a:spcPts val="800"/>
-              </a:spcAft>
-            </a:pPr>
-            <a:r>
-              <a:rPr b="1" sz="1400">
-                <a:solidFill>
-                  <a:srgbClr val="EA4335"/>
-                </a:solidFill>
-              </a:rPr>
-              <a:t>Beyond Simple Code: </a:t>
-            </a:r>
-            <a:r>
-              <a:rPr b="0" sz="1400">
-                <a:solidFill>
-                  <a:srgbClr val="F0F6FC"/>
-                </a:solidFill>
-              </a:rPr>
-              <a:t>In real senior interviews, passing the problem is only step one. Interviewers immediately throw scale and constraint curveballs.</a:t>
-            </a:r>
-          </a:p>
-          <a:p>
-            <a:pPr>
-              <a:spcAft>
-                <a:spcPts val="800"/>
-              </a:spcAft>
-            </a:pPr>
-            <a:r>
-              <a:rPr b="1" sz="1400">
-                <a:solidFill>
-                  <a:srgbClr val="EA4335"/>
-                </a:solidFill>
-              </a:rPr>
-              <a:t>Scale Variations: </a:t>
-            </a:r>
-            <a:r>
-              <a:rPr b="0" sz="1400">
-                <a:solidFill>
-                  <a:srgbClr val="F0F6FC"/>
-                </a:solidFill>
-              </a:rPr>
-              <a:t>'What if the dataset contains 10¹² elements and exceeds single-machine RAM?' -&gt; Explores distributed sharding and disk streams.</a:t>
-            </a:r>
-          </a:p>
-          <a:p>
-            <a:pPr>
-              <a:spcAft>
-                <a:spcPts val="800"/>
-              </a:spcAft>
-            </a:pPr>
-            <a:r>
-              <a:rPr b="1" sz="1400">
-                <a:solidFill>
-                  <a:srgbClr val="EA4335"/>
-                </a:solidFill>
-              </a:rPr>
-              <a:t>Constraint Inversions: </a:t>
-            </a:r>
-            <a:r>
-              <a:rPr b="0" sz="1400">
-                <a:solidFill>
-                  <a:srgbClr val="F0F6FC"/>
-                </a:solidFill>
-              </a:rPr>
-              <a:t>'Can you solve this with strict O(1) space without modifying the input array?' -&gt; Explores bit manipulation and cycles.</a:t>
-            </a:r>
-          </a:p>
-          <a:p>
-            <a:pPr>
-              <a:spcAft>
-                <a:spcPts val="800"/>
-              </a:spcAft>
-            </a:pPr>
-            <a:r>
-              <a:rPr b="1" sz="1400">
-                <a:solidFill>
-                  <a:srgbClr val="EA4335"/>
-                </a:solidFill>
-              </a:rPr>
-              <a:t>Interactive Model Answers: </a:t>
-            </a:r>
-            <a:r>
-              <a:rPr b="0" sz="1400">
-                <a:solidFill>
-                  <a:srgbClr val="F0F6FC"/>
-                </a:solidFill>
-              </a:rPr>
-              <a:t>Includes collapsible senior engineering reference architectures for every challenge.</a:t>
-            </a:r>
-          </a:p>
-        </p:txBody>
-      </p:sp>
-      <p:sp>
-        <p:nvSpPr>
-          <p:cNvPr id="8" name="Rounded Rectangle 7"/>
-          <p:cNvSpPr/>
-          <p:nvPr/>
-        </p:nvSpPr>
-        <p:spPr>
-          <a:xfrm>
-            <a:off x="6217920" y="2011680"/>
-            <a:ext cx="5120640" cy="4297680"/>
-          </a:xfrm>
-          <a:prstGeom prst="roundRect">
-            <a:avLst/>
-          </a:prstGeom>
           <a:solidFill>
-            <a:srgbClr val="161B22"/>
+            <a:srgbClr val="059669"/>
           </a:solidFill>
-          <a:ln w="15240">
-            <a:solidFill>
-              <a:srgbClr val="30363D"/>
-            </a:solidFill>
+          <a:ln>
+            <a:noFill/>
           </a:ln>
         </p:spPr>
         <p:style>
@@ -10124,23 +8848,134 @@
       </p:sp>
       <p:sp>
         <p:nvSpPr>
+          <p:cNvPr id="8" name="TextBox 7"/>
+          <p:cNvSpPr txBox="1"/>
+          <p:nvPr/>
+        </p:nvSpPr>
+        <p:spPr>
+          <a:xfrm>
+            <a:off x="1024128" y="2313432"/>
+            <a:ext cx="2752344" cy="3886200"/>
+          </a:xfrm>
+          <a:prstGeom prst="rect">
+            <a:avLst/>
+          </a:prstGeom>
+          <a:noFill/>
+        </p:spPr>
+        <p:txBody>
+          <a:bodyPr wrap="square" lIns="0" tIns="0" rIns="0" bIns="0">
+            <a:spAutoFit/>
+          </a:bodyPr>
+          <a:lstStyle/>
+          <a:p>
+            <a:pPr>
+              <a:spcAft>
+                <a:spcPts val="1400"/>
+              </a:spcAft>
+              <a:defRPr sz="2100" b="1">
+                <a:solidFill>
+                  <a:srgbClr val="0F172A"/>
+                </a:solidFill>
+              </a:defRPr>
+            </a:pPr>
+            <a:r>
+              <a:t>1. Auto-Push Code to GitHub</a:t>
+            </a:r>
+          </a:p>
+          <a:p>
+            <a:pPr>
+              <a:spcAft>
+                <a:spcPts val="1100"/>
+              </a:spcAft>
+            </a:pPr>
+            <a:r>
+              <a:rPr b="1" sz="1550">
+                <a:solidFill>
+                  <a:srgbClr val="059669"/>
+                </a:solidFill>
+              </a:rPr>
+              <a:t>• GitHub Code Insertion: </a:t>
+            </a:r>
+            <a:r>
+              <a:rPr b="0" sz="1550">
+                <a:solidFill>
+                  <a:srgbClr val="1E293B"/>
+                </a:solidFill>
+              </a:rPr>
+              <a:t>Automatically pushes your best solved code to your GitHub repo in 1 click.</a:t>
+            </a:r>
+          </a:p>
+          <a:p>
+            <a:pPr>
+              <a:spcAft>
+                <a:spcPts val="1100"/>
+              </a:spcAft>
+            </a:pPr>
+            <a:r>
+              <a:rPr b="1" sz="1550">
+                <a:solidFill>
+                  <a:srgbClr val="059669"/>
+                </a:solidFill>
+              </a:rPr>
+              <a:t>• Auto-README Badges: </a:t>
+            </a:r>
+            <a:r>
+              <a:rPr b="0" sz="1550">
+                <a:solidFill>
+                  <a:srgbClr val="1E293B"/>
+                </a:solidFill>
+              </a:rPr>
+              <a:t>Creates a clean README with your 4-Pillar Score and Big-O stats.</a:t>
+            </a:r>
+          </a:p>
+          <a:p>
+            <a:pPr>
+              <a:spcAft>
+                <a:spcPts val="1100"/>
+              </a:spcAft>
+            </a:pPr>
+            <a:r>
+              <a:rPr b="1" sz="1550">
+                <a:solidFill>
+                  <a:srgbClr val="059669"/>
+                </a:solidFill>
+              </a:rPr>
+              <a:t>• GitHub PR Checker: </a:t>
+            </a:r>
+            <a:r>
+              <a:rPr b="0" sz="1550">
+                <a:solidFill>
+                  <a:srgbClr val="1E293B"/>
+                </a:solidFill>
+              </a:rPr>
+              <a:t>Bot that checks team Pull Requests for slow O(N²) loops.</a:t>
+            </a:r>
+          </a:p>
+        </p:txBody>
+      </p:sp>
+      <p:sp>
+        <p:nvSpPr>
           <p:cNvPr id="9" name="Rounded Rectangle 8"/>
           <p:cNvSpPr/>
           <p:nvPr/>
         </p:nvSpPr>
         <p:spPr>
           <a:xfrm>
-            <a:off x="6217920" y="2011680"/>
-            <a:ext cx="5120640" cy="73152"/>
+            <a:off x="4425696" y="2057400"/>
+            <a:ext cx="3337560" cy="4297680"/>
           </a:xfrm>
           <a:prstGeom prst="roundRect">
-            <a:avLst/>
+            <a:avLst>
+              <a:gd name="adj" fmla="val 3000"/>
+            </a:avLst>
           </a:prstGeom>
           <a:solidFill>
-            <a:srgbClr val="34A853"/>
+            <a:srgbClr val="F8FAFC"/>
           </a:solidFill>
-          <a:ln>
-            <a:noFill/>
+          <a:ln w="15240">
+            <a:solidFill>
+              <a:srgbClr val="CBD5E1"/>
+            </a:solidFill>
           </a:ln>
         </p:spPr>
         <p:style>
@@ -10167,14 +9002,57 @@
       </p:sp>
       <p:sp>
         <p:nvSpPr>
-          <p:cNvPr id="10" name="TextBox 9"/>
+          <p:cNvPr id="10" name="Rectangle 9"/>
+          <p:cNvSpPr/>
+          <p:nvPr/>
+        </p:nvSpPr>
+        <p:spPr>
+          <a:xfrm>
+            <a:off x="4425696" y="2057400"/>
+            <a:ext cx="3337560" cy="73152"/>
+          </a:xfrm>
+          <a:prstGeom prst="rect">
+            <a:avLst/>
+          </a:prstGeom>
+          <a:solidFill>
+            <a:srgbClr val="2563EB"/>
+          </a:solidFill>
+          <a:ln>
+            <a:noFill/>
+          </a:ln>
+        </p:spPr>
+        <p:style>
+          <a:lnRef idx="1">
+            <a:schemeClr val="accent1"/>
+          </a:lnRef>
+          <a:fillRef idx="3">
+            <a:schemeClr val="accent1"/>
+          </a:fillRef>
+          <a:effectRef idx="2">
+            <a:schemeClr val="accent1"/>
+          </a:effectRef>
+          <a:fontRef idx="minor">
+            <a:schemeClr val="lt1"/>
+          </a:fontRef>
+        </p:style>
+        <p:txBody>
+          <a:bodyPr rtlCol="0" anchor="ctr"/>
+          <a:lstStyle/>
+          <a:p>
+            <a:pPr algn="ctr"/>
+          </a:p>
+        </p:txBody>
+      </p:sp>
+      <p:sp>
+        <p:nvSpPr>
+          <p:cNvPr id="11" name="TextBox 10"/>
           <p:cNvSpPr txBox="1"/>
           <p:nvPr/>
         </p:nvSpPr>
         <p:spPr>
           <a:xfrm>
-            <a:off x="6537960" y="2286000"/>
-            <a:ext cx="4480560" cy="3886200"/>
+            <a:off x="4718304" y="2313432"/>
+            <a:ext cx="2752344" cy="3886200"/>
           </a:xfrm>
           <a:prstGeom prst="rect">
             <a:avLst/>
@@ -10189,85 +9067,282 @@
           <a:p>
             <a:pPr>
               <a:spcAft>
-                <a:spcPts val="1200"/>
-              </a:spcAft>
-              <a:defRPr sz="1900" b="1">
-                <a:solidFill>
-                  <a:srgbClr val="F0F6FC"/>
+                <a:spcPts val="1400"/>
+              </a:spcAft>
+              <a:defRPr sz="2100" b="1">
+                <a:solidFill>
+                  <a:srgbClr val="0F172A"/>
                 </a:solidFill>
               </a:defRPr>
             </a:pPr>
             <a:r>
-              <a:t>Cryptographic / Public Verified Transcript (/verify)</a:t>
-            </a:r>
-          </a:p>
-          <a:p>
-            <a:pPr>
-              <a:spcAft>
-                <a:spcPts val="800"/>
-              </a:spcAft>
-            </a:pPr>
-            <a:r>
-              <a:rPr b="1" sz="1400">
-                <a:solidFill>
-                  <a:srgbClr val="34A853"/>
-                </a:solidFill>
-              </a:rPr>
-              <a:t>Zero Token Exposure: </a:t>
-            </a:r>
-            <a:r>
-              <a:rPr b="0" sz="1400">
-                <a:solidFill>
-                  <a:srgbClr val="F0F6FC"/>
-                </a:solidFill>
-              </a:rPr>
-              <a:t>Generates a clean public proof-of-work transcript that developers can link on resumes and LinkedIn without exposing secret tokens.</a:t>
-            </a:r>
-          </a:p>
-          <a:p>
-            <a:pPr>
-              <a:spcAft>
-                <a:spcPts val="800"/>
-              </a:spcAft>
-            </a:pPr>
-            <a:r>
-              <a:rPr b="1" sz="1400">
-                <a:solidFill>
-                  <a:srgbClr val="34A853"/>
-                </a:solidFill>
-              </a:rPr>
-              <a:t>Verifiable Metrics: </a:t>
-            </a:r>
-            <a:r>
-              <a:rPr b="0" sz="1400">
-                <a:solidFill>
-                  <a:srgbClr val="F0F6FC"/>
-                </a:solidFill>
-              </a:rPr>
-              <a:t>Displays 16-week activity heatmap, interview readiness score, and paradigm competencies.</a:t>
-            </a:r>
-          </a:p>
-          <a:p>
-            <a:pPr>
-              <a:spcAft>
-                <a:spcPts val="800"/>
-              </a:spcAft>
-            </a:pPr>
-            <a:r>
-              <a:rPr b="1" sz="1400">
-                <a:solidFill>
-                  <a:srgbClr val="34A853"/>
-                </a:solidFill>
-              </a:rPr>
-              <a:t>Recruiter Confidence: </a:t>
-            </a:r>
-            <a:r>
-              <a:rPr b="0" sz="1400">
-                <a:solidFill>
-                  <a:srgbClr val="F0F6FC"/>
-                </a:solidFill>
-              </a:rPr>
-              <a:t>Gives hiring managers and bootcamp mentors authentic proof of consistent problem-solving.</a:t>
+              <a:t>2. Voice AI &amp; Visual Animations</a:t>
+            </a:r>
+          </a:p>
+          <a:p>
+            <a:pPr>
+              <a:spcAft>
+                <a:spcPts val="1100"/>
+              </a:spcAft>
+            </a:pPr>
+            <a:r>
+              <a:rPr b="1" sz="1550">
+                <a:solidFill>
+                  <a:srgbClr val="2563EB"/>
+                </a:solidFill>
+              </a:rPr>
+              <a:t>• Voice Mock Interviewer: </a:t>
+            </a:r>
+            <a:r>
+              <a:rPr b="0" sz="1550">
+                <a:solidFill>
+                  <a:srgbClr val="1E293B"/>
+                </a:solidFill>
+              </a:rPr>
+              <a:t>Talk aloud to an AI interviewer that asks follow-up questions in real time.</a:t>
+            </a:r>
+          </a:p>
+          <a:p>
+            <a:pPr>
+              <a:spcAft>
+                <a:spcPts val="1100"/>
+              </a:spcAft>
+            </a:pPr>
+            <a:r>
+              <a:rPr b="1" sz="1550">
+                <a:solidFill>
+                  <a:srgbClr val="2563EB"/>
+                </a:solidFill>
+              </a:rPr>
+              <a:t>• Visual Step-by-Step: </a:t>
+            </a:r>
+            <a:r>
+              <a:rPr b="0" sz="1550">
+                <a:solidFill>
+                  <a:srgbClr val="1E293B"/>
+                </a:solidFill>
+              </a:rPr>
+              <a:t>Animated arrows showing how Two Pointers and Sliding Windows move.</a:t>
+            </a:r>
+          </a:p>
+          <a:p>
+            <a:pPr>
+              <a:spcAft>
+                <a:spcPts val="1100"/>
+              </a:spcAft>
+            </a:pPr>
+            <a:r>
+              <a:rPr b="1" sz="1550">
+                <a:solidFill>
+                  <a:srgbClr val="2563EB"/>
+                </a:solidFill>
+              </a:rPr>
+              <a:t>• More Coding Sites: </a:t>
+            </a:r>
+            <a:r>
+              <a:rPr b="0" sz="1550">
+                <a:solidFill>
+                  <a:srgbClr val="1E293B"/>
+                </a:solidFill>
+              </a:rPr>
+              <a:t>Adding support for Codeforces, AtCoder, and CodeChef.</a:t>
+            </a:r>
+          </a:p>
+        </p:txBody>
+      </p:sp>
+      <p:sp>
+        <p:nvSpPr>
+          <p:cNvPr id="12" name="Rounded Rectangle 11"/>
+          <p:cNvSpPr/>
+          <p:nvPr/>
+        </p:nvSpPr>
+        <p:spPr>
+          <a:xfrm>
+            <a:off x="8119872" y="2057400"/>
+            <a:ext cx="3337560" cy="4297680"/>
+          </a:xfrm>
+          <a:prstGeom prst="roundRect">
+            <a:avLst>
+              <a:gd name="adj" fmla="val 3000"/>
+            </a:avLst>
+          </a:prstGeom>
+          <a:solidFill>
+            <a:srgbClr val="F8FAFC"/>
+          </a:solidFill>
+          <a:ln w="15240">
+            <a:solidFill>
+              <a:srgbClr val="CBD5E1"/>
+            </a:solidFill>
+          </a:ln>
+        </p:spPr>
+        <p:style>
+          <a:lnRef idx="1">
+            <a:schemeClr val="accent1"/>
+          </a:lnRef>
+          <a:fillRef idx="3">
+            <a:schemeClr val="accent1"/>
+          </a:fillRef>
+          <a:effectRef idx="2">
+            <a:schemeClr val="accent1"/>
+          </a:effectRef>
+          <a:fontRef idx="minor">
+            <a:schemeClr val="lt1"/>
+          </a:fontRef>
+        </p:style>
+        <p:txBody>
+          <a:bodyPr rtlCol="0" anchor="ctr"/>
+          <a:lstStyle/>
+          <a:p>
+            <a:pPr algn="ctr"/>
+          </a:p>
+        </p:txBody>
+      </p:sp>
+      <p:sp>
+        <p:nvSpPr>
+          <p:cNvPr id="13" name="Rectangle 12"/>
+          <p:cNvSpPr/>
+          <p:nvPr/>
+        </p:nvSpPr>
+        <p:spPr>
+          <a:xfrm>
+            <a:off x="8119872" y="2057400"/>
+            <a:ext cx="3337560" cy="73152"/>
+          </a:xfrm>
+          <a:prstGeom prst="rect">
+            <a:avLst/>
+          </a:prstGeom>
+          <a:solidFill>
+            <a:srgbClr val="D97706"/>
+          </a:solidFill>
+          <a:ln>
+            <a:noFill/>
+          </a:ln>
+        </p:spPr>
+        <p:style>
+          <a:lnRef idx="1">
+            <a:schemeClr val="accent1"/>
+          </a:lnRef>
+          <a:fillRef idx="3">
+            <a:schemeClr val="accent1"/>
+          </a:fillRef>
+          <a:effectRef idx="2">
+            <a:schemeClr val="accent1"/>
+          </a:effectRef>
+          <a:fontRef idx="minor">
+            <a:schemeClr val="lt1"/>
+          </a:fontRef>
+        </p:style>
+        <p:txBody>
+          <a:bodyPr rtlCol="0" anchor="ctr"/>
+          <a:lstStyle/>
+          <a:p>
+            <a:pPr algn="ctr"/>
+          </a:p>
+        </p:txBody>
+      </p:sp>
+      <p:sp>
+        <p:nvSpPr>
+          <p:cNvPr id="14" name="TextBox 13"/>
+          <p:cNvSpPr txBox="1"/>
+          <p:nvPr/>
+        </p:nvSpPr>
+        <p:spPr>
+          <a:xfrm>
+            <a:off x="8412480" y="2313432"/>
+            <a:ext cx="2752344" cy="3886200"/>
+          </a:xfrm>
+          <a:prstGeom prst="rect">
+            <a:avLst/>
+          </a:prstGeom>
+          <a:noFill/>
+        </p:spPr>
+        <p:txBody>
+          <a:bodyPr wrap="square" lIns="0" tIns="0" rIns="0" bIns="0">
+            <a:spAutoFit/>
+          </a:bodyPr>
+          <a:lstStyle/>
+          <a:p>
+            <a:pPr>
+              <a:spcAft>
+                <a:spcPts val="1400"/>
+              </a:spcAft>
+              <a:defRPr sz="2100" b="1">
+                <a:solidFill>
+                  <a:srgbClr val="0F172A"/>
+                </a:solidFill>
+              </a:defRPr>
+            </a:pPr>
+            <a:r>
+              <a:t>3. College &amp; Offline AI Mode</a:t>
+            </a:r>
+          </a:p>
+          <a:p>
+            <a:pPr>
+              <a:spcAft>
+                <a:spcPts val="1100"/>
+              </a:spcAft>
+            </a:pPr>
+            <a:r>
+              <a:rPr b="1" sz="1550">
+                <a:solidFill>
+                  <a:srgbClr val="D97706"/>
+                </a:solidFill>
+              </a:rPr>
+              <a:t>• Teacher / TA Dashboard: </a:t>
+            </a:r>
+            <a:r>
+              <a:rPr b="0" sz="1550">
+                <a:solidFill>
+                  <a:srgbClr val="1E293B"/>
+                </a:solidFill>
+              </a:rPr>
+              <a:t>Lets professors see which coding topics the whole class is struggling with.</a:t>
+            </a:r>
+          </a:p>
+          <a:p>
+            <a:pPr>
+              <a:spcAft>
+                <a:spcPts val="1100"/>
+              </a:spcAft>
+            </a:pPr>
+            <a:r>
+              <a:rPr b="1" sz="1550">
+                <a:solidFill>
+                  <a:srgbClr val="D97706"/>
+                </a:solidFill>
+              </a:rPr>
+              <a:t>• Copy-Paste Detection: </a:t>
+            </a:r>
+            <a:r>
+              <a:rPr b="0" sz="1550">
+                <a:solidFill>
+                  <a:srgbClr val="1E293B"/>
+                </a:solidFill>
+              </a:rPr>
+              <a:t>Checks typing patterns to ensure students write code themselves.</a:t>
+            </a:r>
+          </a:p>
+          <a:p>
+            <a:pPr>
+              <a:spcAft>
+                <a:spcPts val="1100"/>
+              </a:spcAft>
+            </a:pPr>
+            <a:r>
+              <a:rPr b="1" sz="1550">
+                <a:solidFill>
+                  <a:srgbClr val="D97706"/>
+                </a:solidFill>
+              </a:rPr>
+              <a:t>• 100% Offline AI (Ollama): </a:t>
+            </a:r>
+            <a:r>
+              <a:rPr b="0" sz="1550">
+                <a:solidFill>
+                  <a:srgbClr val="1E293B"/>
+                </a:solidFill>
+              </a:rPr>
+              <a:t>Runs a small local AI model on lab PCs without needing internet.</a:t>
             </a:r>
           </a:p>
         </p:txBody>
